--- a/docs/Z80-ROMless-SBC-Design-Overview.pptx
+++ b/docs/Z80-ROMless-SBC-Design-Overview.pptx
@@ -4,6 +4,9 @@
   <p:sldMasterIdLst>
     <p:sldMasterId id="2147483648" r:id="rId1"/>
   </p:sldMasterIdLst>
+  <p:notesMasterIdLst>
+    <p:notesMasterId r:id="rId11"/>
+  </p:notesMasterIdLst>
   <p:sldIdLst>
     <p:sldId id="256" r:id="rId2"/>
     <p:sldId id="257" r:id="rId3"/>
@@ -11,10 +14,10 @@
     <p:sldId id="259" r:id="rId5"/>
     <p:sldId id="260" r:id="rId6"/>
     <p:sldId id="261" r:id="rId7"/>
+    <p:sldId id="262" r:id="rId8"/>
+    <p:sldId id="263" r:id="rId9"/>
+    <p:sldId id="264" r:id="rId10"/>
   </p:sldIdLst>
-  <p:notesMasterIdLst>
-    <p:notesMasterId r:id="rId8"/>
-  </p:notesMasterIdLst>
   <p:sldSz cx="12192000" cy="6858000"/>
   <p:notesSz cx="6858000" cy="12192000"/>
   <p:defaultTextStyle>
@@ -109,6 +112,11 @@
       </a:defRPr>
     </a:lvl9pPr>
   </p:defaultTextStyle>
+  <p:extLst>
+    <p:ext uri="{EFAFB233-063F-42B5-8137-9DF3F51BA10A}">
+      <p15:sldGuideLst xmlns:p15="http://schemas.microsoft.com/office/powerpoint/2012/main"/>
+    </p:ext>
+  </p:extLst>
 </p:presentation>
 </file>
 
@@ -134,234 +142,10 @@
           <a:chExt cx="0" cy="0"/>
         </a:xfrm>
       </p:grpSpPr>
-      <p:sp>
-        <p:nvSpPr>
-          <p:cNvPr id="2" name="Header Placeholder 1"/>
-          <p:cNvSpPr>
-            <a:spLocks noGrp="1"/>
-          </p:cNvSpPr>
-          <p:nvPr>
-            <p:ph type="hdr" sz="quarter"/>
-          </p:nvPr>
-        </p:nvSpPr>
-        <p:spPr>
-          <a:xfrm>
-            <a:off x="0" y="0"/>
-            <a:ext cx="2971800" cy="458788"/>
-          </a:xfrm>
-          <a:prstGeom prst="rect">
-            <a:avLst/>
-          </a:prstGeom>
-        </p:spPr>
-        <p:txBody>
-          <a:bodyPr vert="horz" lIns="91440" tIns="45720" rIns="91440" bIns="45720" rtlCol="0"/>
-          <a:lstStyle>
-            <a:lvl1pPr algn="l">
-              <a:defRPr sz="1200"/>
-            </a:lvl1pPr>
-          </a:lstStyle>
-          <a:p>
-            <a:endParaRPr lang="en-US"/>
-          </a:p>
-        </p:txBody>
-      </p:sp>
-      <p:sp>
-        <p:nvSpPr>
-          <p:cNvPr id="3" name="Date Placeholder 2"/>
-          <p:cNvSpPr>
-            <a:spLocks noGrp="1"/>
-          </p:cNvSpPr>
-          <p:nvPr>
-            <p:ph type="dt" idx="1"/>
-          </p:nvPr>
-        </p:nvSpPr>
-        <p:spPr>
-          <a:xfrm>
-            <a:off x="3884613" y="0"/>
-            <a:ext cx="2971800" cy="458788"/>
-          </a:xfrm>
-          <a:prstGeom prst="rect">
-            <a:avLst/>
-          </a:prstGeom>
-        </p:spPr>
-        <p:txBody>
-          <a:bodyPr vert="horz" lIns="91440" tIns="45720" rIns="91440" bIns="45720" rtlCol="0"/>
-          <a:lstStyle>
-            <a:lvl1pPr algn="r">
-              <a:defRPr sz="1200"/>
-            </a:lvl1pPr>
-          </a:lstStyle>
-          <a:p>
-            <a:fld id="{5282F153-3F37-0F45-9E97-73ACFA13230C}" type="datetimeFigureOut">
-              <a:rPr lang="en-US"/>
-              <a:t>7/23/19</a:t>
-            </a:fld>
-            <a:endParaRPr lang="en-US"/>
-          </a:p>
-        </p:txBody>
-      </p:sp>
-      <p:sp>
-        <p:nvSpPr>
-          <p:cNvPr id="4" name="Slide Image Placeholder 3"/>
-          <p:cNvSpPr>
-            <a:spLocks noGrp="1" noRot="1" noChangeAspect="1"/>
-          </p:cNvSpPr>
-          <p:nvPr>
-            <p:ph type="sldImg" idx="2"/>
-          </p:nvPr>
-        </p:nvSpPr>
-        <p:spPr>
-          <a:xfrm>
-            <a:off x="685800" y="1143000"/>
-            <a:ext cx="5486400" cy="3086100"/>
-          </a:xfrm>
-          <a:prstGeom prst="rect">
-            <a:avLst/>
-          </a:prstGeom>
-          <a:noFill/>
-          <a:ln w="12700">
-            <a:solidFill>
-              <a:prstClr val="black"/>
-            </a:solidFill>
-          </a:ln>
-        </p:spPr>
-        <p:txBody>
-          <a:bodyPr vert="horz" lIns="91440" tIns="45720" rIns="91440" bIns="45720" rtlCol="0" anchor="ctr"/>
-          <a:lstStyle/>
-          <a:p>
-            <a:endParaRPr lang="en-US"/>
-          </a:p>
-        </p:txBody>
-      </p:sp>
-      <p:sp>
-        <p:nvSpPr>
-          <p:cNvPr id="5" name="Notes Placeholder 4"/>
-          <p:cNvSpPr>
-            <a:spLocks noGrp="1"/>
-          </p:cNvSpPr>
-          <p:nvPr>
-            <p:ph type="body" sz="quarter" idx="3"/>
-          </p:nvPr>
-        </p:nvSpPr>
-        <p:spPr>
-          <a:xfrm>
-            <a:off x="685800" y="4400550"/>
-            <a:ext cx="5486400" cy="3600450"/>
-          </a:xfrm>
-          <a:prstGeom prst="rect">
-            <a:avLst/>
-          </a:prstGeom>
-        </p:spPr>
-        <p:txBody>
-          <a:bodyPr vert="horz" lIns="91440" tIns="45720" rIns="91440" bIns="45720" rtlCol="0"/>
-          <a:lstStyle/>
-          <a:p>
-            <a:pPr lvl="0"/>
-            <a:r>
-              <a:rPr lang="en-US"/>
-              <a:t>Click to edit Master text styles</a:t>
-            </a:r>
-          </a:p>
-          <a:p>
-            <a:pPr lvl="1"/>
-            <a:r>
-              <a:rPr lang="en-US"/>
-              <a:t>Second level</a:t>
-            </a:r>
-          </a:p>
-          <a:p>
-            <a:pPr lvl="2"/>
-            <a:r>
-              <a:rPr lang="en-US"/>
-              <a:t>Third level</a:t>
-            </a:r>
-          </a:p>
-          <a:p>
-            <a:pPr lvl="3"/>
-            <a:r>
-              <a:rPr lang="en-US"/>
-              <a:t>Fourth level</a:t>
-            </a:r>
-          </a:p>
-          <a:p>
-            <a:pPr lvl="4"/>
-            <a:r>
-              <a:rPr lang="en-US"/>
-              <a:t>Fifth level</a:t>
-            </a:r>
-          </a:p>
-        </p:txBody>
-      </p:sp>
-      <p:sp>
-        <p:nvSpPr>
-          <p:cNvPr id="6" name="Footer Placeholder 5"/>
-          <p:cNvSpPr>
-            <a:spLocks noGrp="1"/>
-          </p:cNvSpPr>
-          <p:nvPr>
-            <p:ph type="ftr" sz="quarter" idx="4"/>
-          </p:nvPr>
-        </p:nvSpPr>
-        <p:spPr>
-          <a:xfrm>
-            <a:off x="0" y="8685213"/>
-            <a:ext cx="2971800" cy="458787"/>
-          </a:xfrm>
-          <a:prstGeom prst="rect">
-            <a:avLst/>
-          </a:prstGeom>
-        </p:spPr>
-        <p:txBody>
-          <a:bodyPr vert="horz" lIns="91440" tIns="45720" rIns="91440" bIns="45720" rtlCol="0" anchor="b"/>
-          <a:lstStyle>
-            <a:lvl1pPr algn="l">
-              <a:defRPr sz="1200"/>
-            </a:lvl1pPr>
-          </a:lstStyle>
-          <a:p>
-            <a:endParaRPr lang="en-US"/>
-          </a:p>
-        </p:txBody>
-      </p:sp>
-      <p:sp>
-        <p:nvSpPr>
-          <p:cNvPr id="7" name="Slide Number Placeholder 6"/>
-          <p:cNvSpPr>
-            <a:spLocks noGrp="1"/>
-          </p:cNvSpPr>
-          <p:nvPr>
-            <p:ph type="sldNum" sz="quarter" idx="5"/>
-          </p:nvPr>
-        </p:nvSpPr>
-        <p:spPr>
-          <a:xfrm>
-            <a:off x="3884613" y="8685213"/>
-            <a:ext cx="2971800" cy="458787"/>
-          </a:xfrm>
-          <a:prstGeom prst="rect">
-            <a:avLst/>
-          </a:prstGeom>
-        </p:spPr>
-        <p:txBody>
-          <a:bodyPr vert="horz" lIns="91440" tIns="45720" rIns="91440" bIns="45720" rtlCol="0" anchor="b"/>
-          <a:lstStyle>
-            <a:lvl1pPr algn="r">
-              <a:defRPr sz="1200"/>
-            </a:lvl1pPr>
-          </a:lstStyle>
-          <a:p>
-            <a:fld id="{CE5E9CC1-C706-0F49-92D6-E571CC5EEA8F}" type="slidenum">
-              <a:rPr lang="en-US"/>
-              <a:t>‹#›</a:t>
-            </a:fld>
-            <a:endParaRPr lang="en-US"/>
-          </a:p>
-        </p:txBody>
-      </p:sp>
     </p:spTree>
     <p:extLst>
       <p:ext uri="{BB962C8B-B14F-4D97-AF65-F5344CB8AC3E}">
-        <p14:creationId xmlns:p14="http://schemas.microsoft.com/office/powerpoint/2010/main" val="1024086991"/>
+        <p14:creationId xmlns:p14="http://schemas.microsoft.com/office/powerpoint/2010/main" val="2148543322"/>
       </p:ext>
     </p:extLst>
   </p:cSld>
@@ -516,7 +300,6 @@
 src/common/sram.c
 The deck describes the current source architecture, not a new hardware qualification. The configured nominal Z80 clock is 20 MHz. Combined networked operation requires timing and acceptance evidence. All diagrams use editable native PowerPoint shapes and text.</a:t>
             </a:r>
-            <a:endParaRPr lang="en-US" dirty="0"/>
           </a:p>
         </p:txBody>
       </p:sp>
@@ -611,7 +394,6 @@
 docs/docs/en/system/operation.md
 The deck describes the current source architecture, not a new hardware qualification. The configured nominal Z80 clock is 20 MHz. Combined networked operation requires timing and acceptance evidence. All diagrams use editable native PowerPoint shapes and text.</a:t>
             </a:r>
-            <a:endParaRPr lang="en-US" dirty="0"/>
           </a:p>
         </p:txBody>
       </p:sp>
@@ -708,7 +490,6 @@
 src/common/io_service.c
 The deck describes the current source architecture, not a new hardware qualification. The configured nominal Z80 clock is 20 MHz. Combined networked operation requires timing and acceptance evidence. All diagrams use editable native PowerPoint shapes and text.</a:t>
             </a:r>
-            <a:endParaRPr lang="en-US" dirty="0"/>
           </a:p>
         </p:txBody>
       </p:sp>
@@ -802,7 +583,6 @@
 src/stage09_flash_storage/main.c: load_image(), start_cpm()
 The deck describes the current source architecture, not a new hardware qualification. The configured nominal Z80 clock is 20 MHz. Combined networked operation requires timing and acceptance evidence. All diagrams use editable native PowerPoint shapes and text.</a:t>
             </a:r>
-            <a:endParaRPr lang="en-US" dirty="0"/>
           </a:p>
         </p:txBody>
       </p:sp>
@@ -898,7 +678,6 @@
 src/stage10_websocket_terminal/web_terminal.cpp
 The deck describes the current source architecture, not a new hardware qualification. The configured nominal Z80 clock is 20 MHz. Combined networked operation requires timing and acceptance evidence. All diagrams use editable native PowerPoint shapes and text.</a:t>
             </a:r>
-            <a:endParaRPr lang="en-US" dirty="0"/>
           </a:p>
         </p:txBody>
       </p:sp>
@@ -993,7 +772,6 @@
 src/stage10_websocket_terminal/network_services.c
 The deck describes the current source architecture, not a new hardware qualification. The configured nominal Z80 clock is 20 MHz. Combined networked operation requires timing and acceptance evidence. All diagrams use editable native PowerPoint shapes and text.</a:t>
             </a:r>
-            <a:endParaRPr lang="en-US" dirty="0"/>
           </a:p>
         </p:txBody>
       </p:sp>
@@ -1066,6 +844,11 @@
 <file path=ppt/slideMasters/slideMaster1.xml><?xml version="1.0" encoding="utf-8"?>
 <p:sldMaster xmlns:a="http://schemas.openxmlformats.org/drawingml/2006/main" xmlns:r="http://schemas.openxmlformats.org/officeDocument/2006/relationships" xmlns:p="http://schemas.openxmlformats.org/presentationml/2006/main">
   <p:cSld>
+    <p:bg>
+      <p:bgRef idx="1001">
+        <a:schemeClr val="bg1"/>
+      </p:bgRef>
+    </p:bg>
     <p:spTree>
       <p:nvGrpSpPr>
         <p:cNvPr id="1" name=""/>
@@ -1348,6 +1131,7 @@
         <a:solidFill>
           <a:srgbClr val="F5F7FB"/>
         </a:solidFill>
+        <a:effectLst/>
       </p:bgPr>
     </p:bg>
     <p:spTree>
@@ -1388,6 +1172,13 @@
             <a:prstDash val="solid"/>
           </a:ln>
         </p:spPr>
+        <p:txBody>
+          <a:bodyPr/>
+          <a:lstStyle/>
+          <a:p>
+            <a:endParaRPr lang="en-US"/>
+          </a:p>
+        </p:txBody>
       </p:sp>
       <p:sp>
         <p:nvSpPr>
@@ -1410,11 +1201,11 @@
           <a:bodyPr wrap="square" lIns="0" tIns="0" rIns="0" bIns="0" rtlCol="0" anchor="ctr"/>
           <a:lstStyle/>
           <a:p>
-            <a:pPr indent="0" marL="0">
-              <a:buNone/>
-            </a:pPr>
-            <a:r>
-              <a:rPr lang="en-US" sz="1100" b="1" spc="150" kern="0" dirty="0">
+            <a:pPr marL="0" indent="0">
+              <a:buNone/>
+            </a:pPr>
+            <a:r>
+              <a:rPr lang="en-US" sz="1100" b="1" kern="0" spc="150" dirty="0">
                 <a:solidFill>
                   <a:srgbClr val="5B6C83"/>
                 </a:solidFill>
@@ -1449,7 +1240,7 @@
           <a:bodyPr wrap="square" lIns="0" tIns="0" rIns="0" bIns="0" rtlCol="0" anchor="ctr"/>
           <a:lstStyle/>
           <a:p>
-            <a:pPr indent="0" marL="0">
+            <a:pPr marL="0" indent="0">
               <a:buNone/>
             </a:pPr>
             <a:r>
@@ -1488,7 +1279,7 @@
           <a:bodyPr wrap="square" lIns="0" tIns="0" rIns="0" bIns="0" rtlCol="0" anchor="ctr"/>
           <a:lstStyle/>
           <a:p>
-            <a:pPr indent="0" marL="0">
+            <a:pPr marL="0" indent="0">
               <a:buNone/>
             </a:pPr>
             <a:r>
@@ -1527,7 +1318,7 @@
           <a:bodyPr wrap="square" lIns="0" tIns="0" rIns="0" bIns="0" rtlCol="0" anchor="ctr"/>
           <a:lstStyle/>
           <a:p>
-            <a:pPr indent="0" marL="0">
+            <a:pPr marL="0" indent="0">
               <a:buNone/>
             </a:pPr>
             <a:r>
@@ -1566,7 +1357,7 @@
           <a:bodyPr wrap="square" lIns="0" tIns="0" rIns="0" bIns="0" rtlCol="0" anchor="ctr"/>
           <a:lstStyle/>
           <a:p>
-            <a:pPr algn="r" indent="0" marL="0">
+            <a:pPr marL="0" indent="0" algn="r">
               <a:buNone/>
             </a:pPr>
             <a:r>
@@ -1610,6 +1401,13 @@
             <a:prstDash val="solid"/>
           </a:ln>
         </p:spPr>
+        <p:txBody>
+          <a:bodyPr/>
+          <a:lstStyle/>
+          <a:p>
+            <a:endParaRPr lang="en-US"/>
+          </a:p>
+        </p:txBody>
       </p:sp>
       <p:sp>
         <p:nvSpPr>
@@ -1632,7 +1430,7 @@
           <a:bodyPr wrap="square" lIns="0" tIns="0" rIns="0" bIns="0" rtlCol="0" anchor="ctr"/>
           <a:lstStyle/>
           <a:p>
-            <a:pPr indent="0" marL="0">
+            <a:pPr marL="0" indent="0">
               <a:buNone/>
             </a:pPr>
             <a:r>
@@ -1671,7 +1469,7 @@
           <a:bodyPr wrap="square" lIns="0" tIns="0" rIns="0" bIns="0" rtlCol="0" anchor="ctr"/>
           <a:lstStyle/>
           <a:p>
-            <a:pPr indent="0" marL="0">
+            <a:pPr marL="0" indent="0">
               <a:buNone/>
             </a:pPr>
             <a:r>
@@ -1710,7 +1508,7 @@
           <a:bodyPr wrap="square" lIns="0" tIns="0" rIns="0" bIns="0" rtlCol="0" anchor="ctr"/>
           <a:lstStyle/>
           <a:p>
-            <a:pPr indent="0" marL="0">
+            <a:pPr marL="0" indent="0">
               <a:buNone/>
             </a:pPr>
             <a:r>
@@ -1727,7 +1525,7 @@
             <a:endParaRPr lang="en-US" sz="1700" dirty="0"/>
           </a:p>
           <a:p>
-            <a:pPr indent="0" marL="0">
+            <a:pPr marL="0" indent="0">
               <a:buNone/>
             </a:pPr>
             <a:r>
@@ -1771,6 +1569,13 @@
             <a:prstDash val="solid"/>
           </a:ln>
         </p:spPr>
+        <p:txBody>
+          <a:bodyPr/>
+          <a:lstStyle/>
+          <a:p>
+            <a:endParaRPr lang="en-US"/>
+          </a:p>
+        </p:txBody>
       </p:sp>
       <p:sp>
         <p:nvSpPr>
@@ -1793,7 +1598,7 @@
           <a:bodyPr wrap="square" lIns="0" tIns="0" rIns="0" bIns="0" rtlCol="0" anchor="ctr"/>
           <a:lstStyle/>
           <a:p>
-            <a:pPr indent="0" marL="0">
+            <a:pPr marL="0" indent="0">
               <a:buNone/>
             </a:pPr>
             <a:r>
@@ -1832,7 +1637,7 @@
           <a:bodyPr wrap="square" lIns="0" tIns="0" rIns="0" bIns="0" rtlCol="0" anchor="ctr"/>
           <a:lstStyle/>
           <a:p>
-            <a:pPr indent="0" marL="0">
+            <a:pPr marL="0" indent="0">
               <a:buNone/>
             </a:pPr>
             <a:r>
@@ -1871,7 +1676,7 @@
           <a:bodyPr wrap="square" lIns="0" tIns="0" rIns="0" bIns="0" rtlCol="0" anchor="ctr"/>
           <a:lstStyle/>
           <a:p>
-            <a:pPr indent="0" marL="0">
+            <a:pPr marL="0" indent="0">
               <a:buNone/>
             </a:pPr>
             <a:r>
@@ -1888,7 +1693,7 @@
             <a:endParaRPr lang="en-US" sz="1800" dirty="0"/>
           </a:p>
           <a:p>
-            <a:pPr indent="0" marL="0">
+            <a:pPr marL="0" indent="0">
               <a:buNone/>
             </a:pPr>
             <a:r>
@@ -1932,6 +1737,13 @@
             <a:prstDash val="solid"/>
           </a:ln>
         </p:spPr>
+        <p:txBody>
+          <a:bodyPr/>
+          <a:lstStyle/>
+          <a:p>
+            <a:endParaRPr lang="en-US"/>
+          </a:p>
+        </p:txBody>
       </p:sp>
       <p:sp>
         <p:nvSpPr>
@@ -1954,7 +1766,7 @@
           <a:bodyPr wrap="square" lIns="0" tIns="0" rIns="0" bIns="0" rtlCol="0" anchor="ctr"/>
           <a:lstStyle/>
           <a:p>
-            <a:pPr algn="ctr" indent="0" marL="0">
+            <a:pPr marL="0" indent="0" algn="ctr">
               <a:buNone/>
             </a:pPr>
             <a:r>
@@ -1998,6 +1810,13 @@
             <a:prstDash val="solid"/>
           </a:ln>
         </p:spPr>
+        <p:txBody>
+          <a:bodyPr/>
+          <a:lstStyle/>
+          <a:p>
+            <a:endParaRPr lang="en-US"/>
+          </a:p>
+        </p:txBody>
       </p:sp>
       <p:sp>
         <p:nvSpPr>
@@ -2020,7 +1839,7 @@
           <a:bodyPr wrap="square" lIns="0" tIns="0" rIns="0" bIns="0" rtlCol="0" anchor="ctr"/>
           <a:lstStyle/>
           <a:p>
-            <a:pPr indent="0" marL="0">
+            <a:pPr marL="0" indent="0">
               <a:buNone/>
             </a:pPr>
             <a:r>
@@ -2059,7 +1878,7 @@
           <a:bodyPr wrap="square" lIns="0" tIns="0" rIns="0" bIns="0" rtlCol="0" anchor="ctr"/>
           <a:lstStyle/>
           <a:p>
-            <a:pPr indent="0" marL="0">
+            <a:pPr marL="0" indent="0">
               <a:buNone/>
             </a:pPr>
             <a:r>
@@ -2103,6 +1922,13 @@
             <a:prstDash val="solid"/>
           </a:ln>
         </p:spPr>
+        <p:txBody>
+          <a:bodyPr/>
+          <a:lstStyle/>
+          <a:p>
+            <a:endParaRPr lang="en-US"/>
+          </a:p>
+        </p:txBody>
       </p:sp>
       <p:sp>
         <p:nvSpPr>
@@ -2125,7 +1951,7 @@
           <a:bodyPr wrap="square" lIns="0" tIns="0" rIns="0" bIns="0" rtlCol="0" anchor="ctr"/>
           <a:lstStyle/>
           <a:p>
-            <a:pPr indent="0" marL="0">
+            <a:pPr marL="0" indent="0">
               <a:buNone/>
             </a:pPr>
             <a:r>
@@ -2164,7 +1990,7 @@
           <a:bodyPr wrap="square" lIns="0" tIns="0" rIns="0" bIns="0" rtlCol="0" anchor="ctr"/>
           <a:lstStyle/>
           <a:p>
-            <a:pPr indent="0" marL="0">
+            <a:pPr marL="0" indent="0">
               <a:buNone/>
             </a:pPr>
             <a:r>
@@ -2206,6 +2032,13 @@
             <a:tailEnd type="triangle"/>
           </a:ln>
         </p:spPr>
+        <p:txBody>
+          <a:bodyPr/>
+          <a:lstStyle/>
+          <a:p>
+            <a:endParaRPr lang="en-US"/>
+          </a:p>
+        </p:txBody>
       </p:sp>
       <p:sp>
         <p:nvSpPr>
@@ -2231,6 +2064,13 @@
             <a:tailEnd type="triangle"/>
           </a:ln>
         </p:spPr>
+        <p:txBody>
+          <a:bodyPr/>
+          <a:lstStyle/>
+          <a:p>
+            <a:endParaRPr lang="en-US"/>
+          </a:p>
+        </p:txBody>
       </p:sp>
       <p:sp>
         <p:nvSpPr>
@@ -2253,7 +2093,7 @@
           <a:bodyPr wrap="square" lIns="0" tIns="0" rIns="0" bIns="0" rtlCol="0" anchor="ctr"/>
           <a:lstStyle/>
           <a:p>
-            <a:pPr algn="ctr" indent="0" marL="0">
+            <a:pPr marL="0" indent="0" algn="ctr">
               <a:buNone/>
             </a:pPr>
             <a:r>
@@ -2295,6 +2135,13 @@
             <a:tailEnd type="triangle"/>
           </a:ln>
         </p:spPr>
+        <p:txBody>
+          <a:bodyPr/>
+          <a:lstStyle/>
+          <a:p>
+            <a:endParaRPr lang="en-US"/>
+          </a:p>
+        </p:txBody>
       </p:sp>
       <p:sp>
         <p:nvSpPr>
@@ -2322,6 +2169,13 @@
             <a:prstDash val="solid"/>
           </a:ln>
         </p:spPr>
+        <p:txBody>
+          <a:bodyPr/>
+          <a:lstStyle/>
+          <a:p>
+            <a:endParaRPr lang="en-US"/>
+          </a:p>
+        </p:txBody>
       </p:sp>
       <p:sp>
         <p:nvSpPr>
@@ -2344,7 +2198,7 @@
           <a:bodyPr wrap="square" lIns="0" tIns="0" rIns="0" bIns="0" rtlCol="0" anchor="ctr"/>
           <a:lstStyle/>
           <a:p>
-            <a:pPr algn="ctr" indent="0" marL="0">
+            <a:pPr marL="0" indent="0" algn="ctr">
               <a:buNone/>
             </a:pPr>
             <a:r>
@@ -2378,6 +2232,7 @@
         <a:solidFill>
           <a:srgbClr val="F5F7FB"/>
         </a:solidFill>
+        <a:effectLst/>
       </p:bgPr>
     </p:bg>
     <p:spTree>
@@ -2418,6 +2273,13 @@
             <a:prstDash val="solid"/>
           </a:ln>
         </p:spPr>
+        <p:txBody>
+          <a:bodyPr/>
+          <a:lstStyle/>
+          <a:p>
+            <a:endParaRPr lang="en-US"/>
+          </a:p>
+        </p:txBody>
       </p:sp>
       <p:sp>
         <p:nvSpPr>
@@ -2440,11 +2302,11 @@
           <a:bodyPr wrap="square" lIns="0" tIns="0" rIns="0" bIns="0" rtlCol="0" anchor="ctr"/>
           <a:lstStyle/>
           <a:p>
-            <a:pPr indent="0" marL="0">
-              <a:buNone/>
-            </a:pPr>
-            <a:r>
-              <a:rPr lang="en-US" sz="1100" b="1" spc="150" kern="0" dirty="0">
+            <a:pPr marL="0" indent="0">
+              <a:buNone/>
+            </a:pPr>
+            <a:r>
+              <a:rPr lang="en-US" sz="1100" b="1" kern="0" spc="150" dirty="0">
                 <a:solidFill>
                   <a:srgbClr val="5B6C83"/>
                 </a:solidFill>
@@ -2479,7 +2341,7 @@
           <a:bodyPr wrap="square" lIns="0" tIns="0" rIns="0" bIns="0" rtlCol="0" anchor="ctr"/>
           <a:lstStyle/>
           <a:p>
-            <a:pPr indent="0" marL="0">
+            <a:pPr marL="0" indent="0">
               <a:buNone/>
             </a:pPr>
             <a:r>
@@ -2518,7 +2380,7 @@
           <a:bodyPr wrap="square" lIns="0" tIns="0" rIns="0" bIns="0" rtlCol="0" anchor="ctr"/>
           <a:lstStyle/>
           <a:p>
-            <a:pPr indent="0" marL="0">
+            <a:pPr marL="0" indent="0">
               <a:buNone/>
             </a:pPr>
             <a:r>
@@ -2557,7 +2419,7 @@
           <a:bodyPr wrap="square" lIns="0" tIns="0" rIns="0" bIns="0" rtlCol="0" anchor="ctr"/>
           <a:lstStyle/>
           <a:p>
-            <a:pPr indent="0" marL="0">
+            <a:pPr marL="0" indent="0">
               <a:buNone/>
             </a:pPr>
             <a:r>
@@ -2596,7 +2458,7 @@
           <a:bodyPr wrap="square" lIns="0" tIns="0" rIns="0" bIns="0" rtlCol="0" anchor="ctr"/>
           <a:lstStyle/>
           <a:p>
-            <a:pPr algn="r" indent="0" marL="0">
+            <a:pPr marL="0" indent="0" algn="r">
               <a:buNone/>
             </a:pPr>
             <a:r>
@@ -2640,6 +2502,13 @@
             <a:prstDash val="solid"/>
           </a:ln>
         </p:spPr>
+        <p:txBody>
+          <a:bodyPr/>
+          <a:lstStyle/>
+          <a:p>
+            <a:endParaRPr lang="en-US"/>
+          </a:p>
+        </p:txBody>
       </p:sp>
       <p:sp>
         <p:nvSpPr>
@@ -2662,7 +2531,7 @@
           <a:bodyPr wrap="square" lIns="0" tIns="0" rIns="0" bIns="0" rtlCol="0" anchor="ctr"/>
           <a:lstStyle/>
           <a:p>
-            <a:pPr indent="0" marL="0">
+            <a:pPr marL="0" indent="0">
               <a:buNone/>
             </a:pPr>
             <a:r>
@@ -2701,7 +2570,7 @@
           <a:bodyPr wrap="square" lIns="0" tIns="0" rIns="0" bIns="0" rtlCol="0" anchor="ctr"/>
           <a:lstStyle/>
           <a:p>
-            <a:pPr indent="0" marL="0">
+            <a:pPr marL="0" indent="0">
               <a:buNone/>
             </a:pPr>
             <a:r>
@@ -2718,7 +2587,7 @@
             <a:endParaRPr lang="en-US" sz="1800" dirty="0"/>
           </a:p>
           <a:p>
-            <a:pPr indent="0" marL="0">
+            <a:pPr marL="0" indent="0">
               <a:buNone/>
             </a:pPr>
             <a:r>
@@ -2735,13 +2604,13 @@
             <a:endParaRPr lang="en-US" sz="1800" dirty="0"/>
           </a:p>
           <a:p>
-            <a:pPr indent="0" marL="0">
+            <a:pPr marL="0" indent="0">
               <a:buNone/>
             </a:pPr>
             <a:endParaRPr lang="en-US" sz="1800" dirty="0"/>
           </a:p>
           <a:p>
-            <a:pPr indent="0" marL="0">
+            <a:pPr marL="0" indent="0">
               <a:buNone/>
             </a:pPr>
             <a:r>
@@ -2753,24 +2622,7 @@
                 <a:ea typeface="Arial" pitchFamily="34" charset="-122"/>
                 <a:cs typeface="Arial" pitchFamily="34" charset="-120"/>
               </a:rPr>
-              <a:t>Z80 alone drives memory addresses</a:t>
-            </a:r>
-            <a:endParaRPr lang="en-US" sz="1800" dirty="0"/>
-          </a:p>
-          <a:p>
-            <a:pPr indent="0" marL="0">
-              <a:buNone/>
-            </a:pPr>
-            <a:r>
-              <a:rPr lang="en-US" sz="1800" dirty="0">
-                <a:solidFill>
-                  <a:srgbClr val="172C46"/>
-                </a:solidFill>
-                <a:latin typeface="Arial" pitchFamily="34" charset="0"/>
-                <a:ea typeface="Arial" pitchFamily="34" charset="-122"/>
-                <a:cs typeface="Arial" pitchFamily="34" charset="-120"/>
-              </a:rPr>
-              <a:t>and writes SRAM, even during boot.</a:t>
+              <a:t>Z80 alone drives memory addresses and writes SRAM, even during boot.</a:t>
             </a:r>
             <a:endParaRPr lang="en-US" sz="1800" dirty="0"/>
           </a:p>
@@ -2802,6 +2654,13 @@
             <a:prstDash val="solid"/>
           </a:ln>
         </p:spPr>
+        <p:txBody>
+          <a:bodyPr/>
+          <a:lstStyle/>
+          <a:p>
+            <a:endParaRPr lang="en-US"/>
+          </a:p>
+        </p:txBody>
       </p:sp>
       <p:sp>
         <p:nvSpPr>
@@ -2824,7 +2683,7 @@
           <a:bodyPr wrap="square" lIns="0" tIns="0" rIns="0" bIns="0" rtlCol="0" anchor="ctr"/>
           <a:lstStyle/>
           <a:p>
-            <a:pPr indent="0" marL="0">
+            <a:pPr marL="0" indent="0">
               <a:buNone/>
             </a:pPr>
             <a:r>
@@ -2863,7 +2722,7 @@
           <a:bodyPr wrap="square" lIns="0" tIns="0" rIns="0" bIns="0" rtlCol="0" anchor="ctr"/>
           <a:lstStyle/>
           <a:p>
-            <a:pPr indent="0" marL="0">
+            <a:pPr marL="0" indent="0">
               <a:buNone/>
             </a:pPr>
             <a:r>
@@ -2880,7 +2739,7 @@
             <a:endParaRPr lang="en-US" sz="1800" dirty="0"/>
           </a:p>
           <a:p>
-            <a:pPr indent="0" marL="0">
+            <a:pPr marL="0" indent="0">
               <a:buNone/>
             </a:pPr>
             <a:r>
@@ -2897,13 +2756,13 @@
             <a:endParaRPr lang="en-US" sz="1800" dirty="0"/>
           </a:p>
           <a:p>
-            <a:pPr indent="0" marL="0">
+            <a:pPr marL="0" indent="0">
               <a:buNone/>
             </a:pPr>
             <a:endParaRPr lang="en-US" sz="1800" dirty="0"/>
           </a:p>
           <a:p>
-            <a:pPr indent="0" marL="0">
+            <a:pPr marL="0" indent="0">
               <a:buNone/>
             </a:pPr>
             <a:r>
@@ -2915,14 +2774,19 @@
                 <a:ea typeface="Arial" pitchFamily="34" charset="-122"/>
                 <a:cs typeface="Arial" pitchFamily="34" charset="-120"/>
               </a:rPr>
-              <a:t>HCT32 generates hardware WAIT</a:t>
-            </a:r>
-            <a:endParaRPr lang="en-US" sz="1800" dirty="0"/>
-          </a:p>
-          <a:p>
-            <a:pPr indent="0" marL="0">
-              <a:buNone/>
-            </a:pPr>
+              <a:t>HCT32 generates </a:t>
+            </a:r>
+            <a:r>
+              <a:rPr lang="en-US" sz="1800">
+                <a:solidFill>
+                  <a:srgbClr val="172C46"/>
+                </a:solidFill>
+                <a:latin typeface="Arial" pitchFamily="34" charset="0"/>
+                <a:ea typeface="Arial" pitchFamily="34" charset="-122"/>
+                <a:cs typeface="Arial" pitchFamily="34" charset="-120"/>
+              </a:rPr>
+              <a:t>hardware WAIT and </a:t>
+            </a:r>
             <a:r>
               <a:rPr lang="en-US" sz="1800" dirty="0">
                 <a:solidFill>
@@ -2932,7 +2796,7 @@
                 <a:ea typeface="Arial" pitchFamily="34" charset="-122"/>
                 <a:cs typeface="Arial" pitchFamily="34" charset="-120"/>
               </a:rPr>
-              <a:t>and gates SRAM / data-path enables.</a:t>
+              <a:t>gates SRAM / data-path enables.</a:t>
             </a:r>
             <a:endParaRPr lang="en-US" sz="1800" dirty="0"/>
           </a:p>
@@ -2964,6 +2828,13 @@
             <a:prstDash val="solid"/>
           </a:ln>
         </p:spPr>
+        <p:txBody>
+          <a:bodyPr/>
+          <a:lstStyle/>
+          <a:p>
+            <a:endParaRPr lang="en-US"/>
+          </a:p>
+        </p:txBody>
       </p:sp>
       <p:sp>
         <p:nvSpPr>
@@ -2986,7 +2857,7 @@
           <a:bodyPr wrap="square" lIns="0" tIns="0" rIns="0" bIns="0" rtlCol="0" anchor="ctr"/>
           <a:lstStyle/>
           <a:p>
-            <a:pPr indent="0" marL="0">
+            <a:pPr marL="0" indent="0">
               <a:buNone/>
             </a:pPr>
             <a:r>
@@ -3025,7 +2896,7 @@
           <a:bodyPr wrap="square" lIns="0" tIns="0" rIns="0" bIns="0" rtlCol="0" anchor="ctr"/>
           <a:lstStyle/>
           <a:p>
-            <a:pPr indent="0" marL="0">
+            <a:pPr marL="0" indent="0">
               <a:buNone/>
             </a:pPr>
             <a:r>
@@ -3042,7 +2913,7 @@
             <a:endParaRPr lang="en-US" sz="1800" dirty="0"/>
           </a:p>
           <a:p>
-            <a:pPr indent="0" marL="0">
+            <a:pPr marL="0" indent="0">
               <a:buNone/>
             </a:pPr>
             <a:r>
@@ -3059,13 +2930,13 @@
             <a:endParaRPr lang="en-US" sz="1800" dirty="0"/>
           </a:p>
           <a:p>
-            <a:pPr indent="0" marL="0">
+            <a:pPr marL="0" indent="0">
               <a:buNone/>
             </a:pPr>
             <a:endParaRPr lang="en-US" sz="1800" dirty="0"/>
           </a:p>
           <a:p>
-            <a:pPr indent="0" marL="0">
+            <a:pPr marL="0" indent="0">
               <a:buNone/>
             </a:pPr>
             <a:r>
@@ -3082,7 +2953,7 @@
             <a:endParaRPr lang="en-US" sz="1800" dirty="0"/>
           </a:p>
           <a:p>
-            <a:pPr indent="0" marL="0">
+            <a:pPr marL="0" indent="0">
               <a:buNone/>
             </a:pPr>
             <a:r>
@@ -3126,6 +2997,13 @@
             <a:prstDash val="solid"/>
           </a:ln>
         </p:spPr>
+        <p:txBody>
+          <a:bodyPr/>
+          <a:lstStyle/>
+          <a:p>
+            <a:endParaRPr lang="en-US"/>
+          </a:p>
+        </p:txBody>
       </p:sp>
       <p:sp>
         <p:nvSpPr>
@@ -3148,7 +3026,7 @@
           <a:bodyPr wrap="square" lIns="0" tIns="0" rIns="0" bIns="0" rtlCol="0" anchor="ctr"/>
           <a:lstStyle/>
           <a:p>
-            <a:pPr algn="ctr" indent="0" marL="0">
+            <a:pPr marL="0" indent="0" algn="ctr">
               <a:buNone/>
             </a:pPr>
             <a:r>
@@ -3182,6 +3060,7 @@
         <a:solidFill>
           <a:srgbClr val="F5F7FB"/>
         </a:solidFill>
+        <a:effectLst/>
       </p:bgPr>
     </p:bg>
     <p:spTree>
@@ -3222,6 +3101,13 @@
             <a:prstDash val="solid"/>
           </a:ln>
         </p:spPr>
+        <p:txBody>
+          <a:bodyPr/>
+          <a:lstStyle/>
+          <a:p>
+            <a:endParaRPr lang="en-US"/>
+          </a:p>
+        </p:txBody>
       </p:sp>
       <p:sp>
         <p:nvSpPr>
@@ -3244,11 +3130,11 @@
           <a:bodyPr wrap="square" lIns="0" tIns="0" rIns="0" bIns="0" rtlCol="0" anchor="ctr"/>
           <a:lstStyle/>
           <a:p>
-            <a:pPr indent="0" marL="0">
-              <a:buNone/>
-            </a:pPr>
-            <a:r>
-              <a:rPr lang="en-US" sz="1100" b="1" spc="150" kern="0" dirty="0">
+            <a:pPr marL="0" indent="0">
+              <a:buNone/>
+            </a:pPr>
+            <a:r>
+              <a:rPr lang="en-US" sz="1100" b="1" kern="0" spc="150" dirty="0">
                 <a:solidFill>
                   <a:srgbClr val="5B6C83"/>
                 </a:solidFill>
@@ -3283,7 +3169,7 @@
           <a:bodyPr wrap="square" lIns="0" tIns="0" rIns="0" bIns="0" rtlCol="0" anchor="ctr"/>
           <a:lstStyle/>
           <a:p>
-            <a:pPr indent="0" marL="0">
+            <a:pPr marL="0" indent="0">
               <a:buNone/>
             </a:pPr>
             <a:r>
@@ -3322,7 +3208,7 @@
           <a:bodyPr wrap="square" lIns="0" tIns="0" rIns="0" bIns="0" rtlCol="0" anchor="ctr"/>
           <a:lstStyle/>
           <a:p>
-            <a:pPr indent="0" marL="0">
+            <a:pPr marL="0" indent="0">
               <a:buNone/>
             </a:pPr>
             <a:r>
@@ -3361,7 +3247,7 @@
           <a:bodyPr wrap="square" lIns="0" tIns="0" rIns="0" bIns="0" rtlCol="0" anchor="ctr"/>
           <a:lstStyle/>
           <a:p>
-            <a:pPr indent="0" marL="0">
+            <a:pPr marL="0" indent="0">
               <a:buNone/>
             </a:pPr>
             <a:r>
@@ -3400,7 +3286,7 @@
           <a:bodyPr wrap="square" lIns="0" tIns="0" rIns="0" bIns="0" rtlCol="0" anchor="ctr"/>
           <a:lstStyle/>
           <a:p>
-            <a:pPr algn="r" indent="0" marL="0">
+            <a:pPr marL="0" indent="0" algn="r">
               <a:buNone/>
             </a:pPr>
             <a:r>
@@ -3444,6 +3330,13 @@
             <a:prstDash val="solid"/>
           </a:ln>
         </p:spPr>
+        <p:txBody>
+          <a:bodyPr/>
+          <a:lstStyle/>
+          <a:p>
+            <a:endParaRPr lang="en-US"/>
+          </a:p>
+        </p:txBody>
       </p:sp>
       <p:sp>
         <p:nvSpPr>
@@ -3466,7 +3359,7 @@
           <a:bodyPr wrap="square" lIns="0" tIns="0" rIns="0" bIns="0" rtlCol="0" anchor="ctr"/>
           <a:lstStyle/>
           <a:p>
-            <a:pPr indent="0" marL="0">
+            <a:pPr marL="0" indent="0">
               <a:buNone/>
             </a:pPr>
             <a:r>
@@ -3505,7 +3398,7 @@
           <a:bodyPr wrap="square" lIns="0" tIns="0" rIns="0" bIns="0" rtlCol="0" anchor="ctr"/>
           <a:lstStyle/>
           <a:p>
-            <a:pPr indent="0" marL="0">
+            <a:pPr marL="0" indent="0">
               <a:buNone/>
             </a:pPr>
             <a:r>
@@ -3544,7 +3437,7 @@
           <a:bodyPr wrap="square" lIns="0" tIns="0" rIns="0" bIns="0" rtlCol="0" anchor="ctr"/>
           <a:lstStyle/>
           <a:p>
-            <a:pPr indent="0" marL="0">
+            <a:pPr marL="0" indent="0">
               <a:buNone/>
             </a:pPr>
             <a:r>
@@ -3561,7 +3454,7 @@
             <a:endParaRPr lang="en-US" sz="1800" dirty="0"/>
           </a:p>
           <a:p>
-            <a:pPr indent="0" marL="0">
+            <a:pPr marL="0" indent="0">
               <a:buNone/>
             </a:pPr>
             <a:r>
@@ -3578,7 +3471,7 @@
             <a:endParaRPr lang="en-US" sz="1800" dirty="0"/>
           </a:p>
           <a:p>
-            <a:pPr indent="0" marL="0">
+            <a:pPr marL="0" indent="0">
               <a:buNone/>
             </a:pPr>
             <a:r>
@@ -3595,7 +3488,7 @@
             <a:endParaRPr lang="en-US" sz="1800" dirty="0"/>
           </a:p>
           <a:p>
-            <a:pPr indent="0" marL="0">
+            <a:pPr marL="0" indent="0">
               <a:buNone/>
             </a:pPr>
             <a:r>
@@ -3639,6 +3532,13 @@
             <a:prstDash val="solid"/>
           </a:ln>
         </p:spPr>
+        <p:txBody>
+          <a:bodyPr/>
+          <a:lstStyle/>
+          <a:p>
+            <a:endParaRPr lang="en-US"/>
+          </a:p>
+        </p:txBody>
       </p:sp>
       <p:sp>
         <p:nvSpPr>
@@ -3661,7 +3561,7 @@
           <a:bodyPr wrap="square" lIns="0" tIns="0" rIns="0" bIns="0" rtlCol="0" anchor="ctr"/>
           <a:lstStyle/>
           <a:p>
-            <a:pPr algn="ctr" indent="0" marL="0">
+            <a:pPr marL="0" indent="0" algn="ctr">
               <a:buNone/>
             </a:pPr>
             <a:r>
@@ -3700,7 +3600,7 @@
           <a:bodyPr wrap="square" lIns="0" tIns="0" rIns="0" bIns="0" rtlCol="0" anchor="ctr"/>
           <a:lstStyle/>
           <a:p>
-            <a:pPr algn="ctr" indent="0" marL="0">
+            <a:pPr marL="0" indent="0" algn="ctr">
               <a:buNone/>
             </a:pPr>
             <a:r>
@@ -3717,7 +3617,7 @@
             <a:endParaRPr lang="en-US" sz="1700" dirty="0"/>
           </a:p>
           <a:p>
-            <a:pPr algn="ctr" indent="0" marL="0">
+            <a:pPr marL="0" indent="0" algn="ctr">
               <a:buNone/>
             </a:pPr>
             <a:r>
@@ -3734,7 +3634,7 @@
             <a:endParaRPr lang="en-US" sz="1700" dirty="0"/>
           </a:p>
           <a:p>
-            <a:pPr algn="ctr" indent="0" marL="0">
+            <a:pPr marL="0" indent="0" algn="ctr">
               <a:buNone/>
             </a:pPr>
             <a:r>
@@ -3751,7 +3651,7 @@
             <a:endParaRPr lang="en-US" sz="1700" dirty="0"/>
           </a:p>
           <a:p>
-            <a:pPr algn="ctr" indent="0" marL="0">
+            <a:pPr marL="0" indent="0" algn="ctr">
               <a:buNone/>
             </a:pPr>
             <a:r>
@@ -3795,6 +3695,13 @@
             <a:prstDash val="solid"/>
           </a:ln>
         </p:spPr>
+        <p:txBody>
+          <a:bodyPr/>
+          <a:lstStyle/>
+          <a:p>
+            <a:endParaRPr lang="en-US"/>
+          </a:p>
+        </p:txBody>
       </p:sp>
       <p:sp>
         <p:nvSpPr>
@@ -3817,7 +3724,7 @@
           <a:bodyPr wrap="square" lIns="0" tIns="0" rIns="0" bIns="0" rtlCol="0" anchor="ctr"/>
           <a:lstStyle/>
           <a:p>
-            <a:pPr indent="0" marL="0">
+            <a:pPr marL="0" indent="0">
               <a:buNone/>
             </a:pPr>
             <a:r>
@@ -3856,7 +3763,7 @@
           <a:bodyPr wrap="square" lIns="0" tIns="0" rIns="0" bIns="0" rtlCol="0" anchor="ctr"/>
           <a:lstStyle/>
           <a:p>
-            <a:pPr indent="0" marL="0">
+            <a:pPr marL="0" indent="0">
               <a:buNone/>
             </a:pPr>
             <a:r>
@@ -3895,7 +3802,7 @@
           <a:bodyPr wrap="square" lIns="0" tIns="0" rIns="0" bIns="0" rtlCol="0" anchor="ctr"/>
           <a:lstStyle/>
           <a:p>
-            <a:pPr indent="0" marL="0">
+            <a:pPr marL="0" indent="0">
               <a:buNone/>
             </a:pPr>
             <a:r>
@@ -3912,7 +3819,7 @@
             <a:endParaRPr lang="en-US" sz="1800" dirty="0"/>
           </a:p>
           <a:p>
-            <a:pPr indent="0" marL="0">
+            <a:pPr marL="0" indent="0">
               <a:buNone/>
             </a:pPr>
             <a:r>
@@ -3929,7 +3836,7 @@
             <a:endParaRPr lang="en-US" sz="1800" dirty="0"/>
           </a:p>
           <a:p>
-            <a:pPr indent="0" marL="0">
+            <a:pPr marL="0" indent="0">
               <a:buNone/>
             </a:pPr>
             <a:r>
@@ -3946,7 +3853,7 @@
             <a:endParaRPr lang="en-US" sz="1800" dirty="0"/>
           </a:p>
           <a:p>
-            <a:pPr indent="0" marL="0">
+            <a:pPr marL="0" indent="0">
               <a:buNone/>
             </a:pPr>
             <a:r>
@@ -3988,6 +3895,13 @@
             <a:tailEnd type="triangle"/>
           </a:ln>
         </p:spPr>
+        <p:txBody>
+          <a:bodyPr/>
+          <a:lstStyle/>
+          <a:p>
+            <a:endParaRPr lang="en-US"/>
+          </a:p>
+        </p:txBody>
       </p:sp>
       <p:sp>
         <p:nvSpPr>
@@ -4013,6 +3927,13 @@
             <a:tailEnd type="triangle"/>
           </a:ln>
         </p:spPr>
+        <p:txBody>
+          <a:bodyPr/>
+          <a:lstStyle/>
+          <a:p>
+            <a:endParaRPr lang="en-US"/>
+          </a:p>
+        </p:txBody>
       </p:sp>
       <p:sp>
         <p:nvSpPr>
@@ -4040,6 +3961,13 @@
             <a:prstDash val="solid"/>
           </a:ln>
         </p:spPr>
+        <p:txBody>
+          <a:bodyPr/>
+          <a:lstStyle/>
+          <a:p>
+            <a:endParaRPr lang="en-US"/>
+          </a:p>
+        </p:txBody>
       </p:sp>
       <p:sp>
         <p:nvSpPr>
@@ -4062,7 +3990,7 @@
           <a:bodyPr wrap="square" lIns="0" tIns="0" rIns="0" bIns="0" rtlCol="0" anchor="ctr"/>
           <a:lstStyle/>
           <a:p>
-            <a:pPr algn="ctr" indent="0" marL="0">
+            <a:pPr marL="0" indent="0" algn="ctr">
               <a:buNone/>
             </a:pPr>
             <a:r>
@@ -4096,6 +4024,7 @@
         <a:solidFill>
           <a:srgbClr val="F5F7FB"/>
         </a:solidFill>
+        <a:effectLst/>
       </p:bgPr>
     </p:bg>
     <p:spTree>
@@ -4136,6 +4065,13 @@
             <a:prstDash val="solid"/>
           </a:ln>
         </p:spPr>
+        <p:txBody>
+          <a:bodyPr/>
+          <a:lstStyle/>
+          <a:p>
+            <a:endParaRPr lang="en-US"/>
+          </a:p>
+        </p:txBody>
       </p:sp>
       <p:sp>
         <p:nvSpPr>
@@ -4158,11 +4094,11 @@
           <a:bodyPr wrap="square" lIns="0" tIns="0" rIns="0" bIns="0" rtlCol="0" anchor="ctr"/>
           <a:lstStyle/>
           <a:p>
-            <a:pPr indent="0" marL="0">
-              <a:buNone/>
-            </a:pPr>
-            <a:r>
-              <a:rPr lang="en-US" sz="1100" b="1" spc="150" kern="0" dirty="0">
+            <a:pPr marL="0" indent="0">
+              <a:buNone/>
+            </a:pPr>
+            <a:r>
+              <a:rPr lang="en-US" sz="1100" b="1" kern="0" spc="150" dirty="0">
                 <a:solidFill>
                   <a:srgbClr val="5B6C83"/>
                 </a:solidFill>
@@ -4197,7 +4133,7 @@
           <a:bodyPr wrap="square" lIns="0" tIns="0" rIns="0" bIns="0" rtlCol="0" anchor="ctr"/>
           <a:lstStyle/>
           <a:p>
-            <a:pPr indent="0" marL="0">
+            <a:pPr marL="0" indent="0">
               <a:buNone/>
             </a:pPr>
             <a:r>
@@ -4236,7 +4172,7 @@
           <a:bodyPr wrap="square" lIns="0" tIns="0" rIns="0" bIns="0" rtlCol="0" anchor="ctr"/>
           <a:lstStyle/>
           <a:p>
-            <a:pPr indent="0" marL="0">
+            <a:pPr marL="0" indent="0">
               <a:buNone/>
             </a:pPr>
             <a:r>
@@ -4275,7 +4211,7 @@
           <a:bodyPr wrap="square" lIns="0" tIns="0" rIns="0" bIns="0" rtlCol="0" anchor="ctr"/>
           <a:lstStyle/>
           <a:p>
-            <a:pPr indent="0" marL="0">
+            <a:pPr marL="0" indent="0">
               <a:buNone/>
             </a:pPr>
             <a:r>
@@ -4314,7 +4250,7 @@
           <a:bodyPr wrap="square" lIns="0" tIns="0" rIns="0" bIns="0" rtlCol="0" anchor="ctr"/>
           <a:lstStyle/>
           <a:p>
-            <a:pPr algn="r" indent="0" marL="0">
+            <a:pPr marL="0" indent="0" algn="r">
               <a:buNone/>
             </a:pPr>
             <a:r>
@@ -4358,6 +4294,13 @@
             <a:prstDash val="solid"/>
           </a:ln>
         </p:spPr>
+        <p:txBody>
+          <a:bodyPr/>
+          <a:lstStyle/>
+          <a:p>
+            <a:endParaRPr lang="en-US"/>
+          </a:p>
+        </p:txBody>
       </p:sp>
       <p:sp>
         <p:nvSpPr>
@@ -4385,6 +4328,13 @@
             <a:prstDash val="solid"/>
           </a:ln>
         </p:spPr>
+        <p:txBody>
+          <a:bodyPr/>
+          <a:lstStyle/>
+          <a:p>
+            <a:endParaRPr lang="en-US"/>
+          </a:p>
+        </p:txBody>
       </p:sp>
       <p:sp>
         <p:nvSpPr>
@@ -4407,7 +4357,7 @@
           <a:bodyPr wrap="square" lIns="0" tIns="0" rIns="0" bIns="0" rtlCol="0" anchor="ctr"/>
           <a:lstStyle/>
           <a:p>
-            <a:pPr algn="ctr" indent="0" marL="0">
+            <a:pPr marL="0" indent="0" algn="ctr">
               <a:buNone/>
             </a:pPr>
             <a:r>
@@ -4446,7 +4396,7 @@
           <a:bodyPr wrap="square" lIns="0" tIns="0" rIns="0" bIns="0" rtlCol="0" anchor="ctr"/>
           <a:lstStyle/>
           <a:p>
-            <a:pPr indent="0" marL="0">
+            <a:pPr marL="0" indent="0">
               <a:buNone/>
             </a:pPr>
             <a:r>
@@ -4485,7 +4435,7 @@
           <a:bodyPr wrap="square" lIns="0" tIns="0" rIns="0" bIns="0" rtlCol="0" anchor="ctr"/>
           <a:lstStyle/>
           <a:p>
-            <a:pPr indent="0" marL="0">
+            <a:pPr marL="0" indent="0">
               <a:buNone/>
             </a:pPr>
             <a:r>
@@ -4502,7 +4452,7 @@
             <a:endParaRPr lang="en-US" sz="1550" dirty="0"/>
           </a:p>
           <a:p>
-            <a:pPr indent="0" marL="0">
+            <a:pPr marL="0" indent="0">
               <a:buNone/>
             </a:pPr>
             <a:r>
@@ -4519,7 +4469,7 @@
             <a:endParaRPr lang="en-US" sz="1550" dirty="0"/>
           </a:p>
           <a:p>
-            <a:pPr indent="0" marL="0">
+            <a:pPr marL="0" indent="0">
               <a:buNone/>
             </a:pPr>
             <a:r>
@@ -4560,6 +4510,13 @@
             <a:tailEnd type="triangle"/>
           </a:ln>
         </p:spPr>
+        <p:txBody>
+          <a:bodyPr/>
+          <a:lstStyle/>
+          <a:p>
+            <a:endParaRPr lang="en-US"/>
+          </a:p>
+        </p:txBody>
       </p:sp>
       <p:sp>
         <p:nvSpPr>
@@ -4587,6 +4544,13 @@
             <a:prstDash val="solid"/>
           </a:ln>
         </p:spPr>
+        <p:txBody>
+          <a:bodyPr/>
+          <a:lstStyle/>
+          <a:p>
+            <a:endParaRPr lang="en-US"/>
+          </a:p>
+        </p:txBody>
       </p:sp>
       <p:sp>
         <p:nvSpPr>
@@ -4614,6 +4578,13 @@
             <a:prstDash val="solid"/>
           </a:ln>
         </p:spPr>
+        <p:txBody>
+          <a:bodyPr/>
+          <a:lstStyle/>
+          <a:p>
+            <a:endParaRPr lang="en-US"/>
+          </a:p>
+        </p:txBody>
       </p:sp>
       <p:sp>
         <p:nvSpPr>
@@ -4636,7 +4607,7 @@
           <a:bodyPr wrap="square" lIns="0" tIns="0" rIns="0" bIns="0" rtlCol="0" anchor="ctr"/>
           <a:lstStyle/>
           <a:p>
-            <a:pPr algn="ctr" indent="0" marL="0">
+            <a:pPr marL="0" indent="0" algn="ctr">
               <a:buNone/>
             </a:pPr>
             <a:r>
@@ -4675,7 +4646,7 @@
           <a:bodyPr wrap="square" lIns="0" tIns="0" rIns="0" bIns="0" rtlCol="0" anchor="ctr"/>
           <a:lstStyle/>
           <a:p>
-            <a:pPr indent="0" marL="0">
+            <a:pPr marL="0" indent="0">
               <a:buNone/>
             </a:pPr>
             <a:r>
@@ -4714,7 +4685,7 @@
           <a:bodyPr wrap="square" lIns="0" tIns="0" rIns="0" bIns="0" rtlCol="0" anchor="ctr"/>
           <a:lstStyle/>
           <a:p>
-            <a:pPr indent="0" marL="0">
+            <a:pPr marL="0" indent="0">
               <a:buNone/>
             </a:pPr>
             <a:r>
@@ -4731,7 +4702,7 @@
             <a:endParaRPr lang="en-US" sz="1550" dirty="0"/>
           </a:p>
           <a:p>
-            <a:pPr indent="0" marL="0">
+            <a:pPr marL="0" indent="0">
               <a:buNone/>
             </a:pPr>
             <a:r>
@@ -4748,7 +4719,7 @@
             <a:endParaRPr lang="en-US" sz="1550" dirty="0"/>
           </a:p>
           <a:p>
-            <a:pPr indent="0" marL="0">
+            <a:pPr marL="0" indent="0">
               <a:buNone/>
             </a:pPr>
             <a:r>
@@ -4789,6 +4760,13 @@
             <a:tailEnd type="triangle"/>
           </a:ln>
         </p:spPr>
+        <p:txBody>
+          <a:bodyPr/>
+          <a:lstStyle/>
+          <a:p>
+            <a:endParaRPr lang="en-US"/>
+          </a:p>
+        </p:txBody>
       </p:sp>
       <p:sp>
         <p:nvSpPr>
@@ -4816,6 +4794,13 @@
             <a:prstDash val="solid"/>
           </a:ln>
         </p:spPr>
+        <p:txBody>
+          <a:bodyPr/>
+          <a:lstStyle/>
+          <a:p>
+            <a:endParaRPr lang="en-US"/>
+          </a:p>
+        </p:txBody>
       </p:sp>
       <p:sp>
         <p:nvSpPr>
@@ -4843,6 +4828,13 @@
             <a:prstDash val="solid"/>
           </a:ln>
         </p:spPr>
+        <p:txBody>
+          <a:bodyPr/>
+          <a:lstStyle/>
+          <a:p>
+            <a:endParaRPr lang="en-US"/>
+          </a:p>
+        </p:txBody>
       </p:sp>
       <p:sp>
         <p:nvSpPr>
@@ -4865,7 +4857,7 @@
           <a:bodyPr wrap="square" lIns="0" tIns="0" rIns="0" bIns="0" rtlCol="0" anchor="ctr"/>
           <a:lstStyle/>
           <a:p>
-            <a:pPr algn="ctr" indent="0" marL="0">
+            <a:pPr marL="0" indent="0" algn="ctr">
               <a:buNone/>
             </a:pPr>
             <a:r>
@@ -4904,7 +4896,7 @@
           <a:bodyPr wrap="square" lIns="0" tIns="0" rIns="0" bIns="0" rtlCol="0" anchor="ctr"/>
           <a:lstStyle/>
           <a:p>
-            <a:pPr indent="0" marL="0">
+            <a:pPr marL="0" indent="0">
               <a:buNone/>
             </a:pPr>
             <a:r>
@@ -4943,7 +4935,7 @@
           <a:bodyPr wrap="square" lIns="0" tIns="0" rIns="0" bIns="0" rtlCol="0" anchor="ctr"/>
           <a:lstStyle/>
           <a:p>
-            <a:pPr indent="0" marL="0">
+            <a:pPr marL="0" indent="0">
               <a:buNone/>
             </a:pPr>
             <a:r>
@@ -4960,7 +4952,7 @@
             <a:endParaRPr lang="en-US" sz="1550" dirty="0"/>
           </a:p>
           <a:p>
-            <a:pPr indent="0" marL="0">
+            <a:pPr marL="0" indent="0">
               <a:buNone/>
             </a:pPr>
             <a:r>
@@ -4977,7 +4969,7 @@
             <a:endParaRPr lang="en-US" sz="1550" dirty="0"/>
           </a:p>
           <a:p>
-            <a:pPr indent="0" marL="0">
+            <a:pPr marL="0" indent="0">
               <a:buNone/>
             </a:pPr>
             <a:r>
@@ -5018,6 +5010,13 @@
             <a:tailEnd type="triangle"/>
           </a:ln>
         </p:spPr>
+        <p:txBody>
+          <a:bodyPr/>
+          <a:lstStyle/>
+          <a:p>
+            <a:endParaRPr lang="en-US"/>
+          </a:p>
+        </p:txBody>
       </p:sp>
       <p:sp>
         <p:nvSpPr>
@@ -5045,6 +5044,13 @@
             <a:prstDash val="solid"/>
           </a:ln>
         </p:spPr>
+        <p:txBody>
+          <a:bodyPr/>
+          <a:lstStyle/>
+          <a:p>
+            <a:endParaRPr lang="en-US"/>
+          </a:p>
+        </p:txBody>
       </p:sp>
       <p:sp>
         <p:nvSpPr>
@@ -5072,6 +5078,13 @@
             <a:prstDash val="solid"/>
           </a:ln>
         </p:spPr>
+        <p:txBody>
+          <a:bodyPr/>
+          <a:lstStyle/>
+          <a:p>
+            <a:endParaRPr lang="en-US"/>
+          </a:p>
+        </p:txBody>
       </p:sp>
       <p:sp>
         <p:nvSpPr>
@@ -5094,7 +5107,7 @@
           <a:bodyPr wrap="square" lIns="0" tIns="0" rIns="0" bIns="0" rtlCol="0" anchor="ctr"/>
           <a:lstStyle/>
           <a:p>
-            <a:pPr algn="ctr" indent="0" marL="0">
+            <a:pPr marL="0" indent="0" algn="ctr">
               <a:buNone/>
             </a:pPr>
             <a:r>
@@ -5133,7 +5146,7 @@
           <a:bodyPr wrap="square" lIns="0" tIns="0" rIns="0" bIns="0" rtlCol="0" anchor="ctr"/>
           <a:lstStyle/>
           <a:p>
-            <a:pPr indent="0" marL="0">
+            <a:pPr marL="0" indent="0">
               <a:buNone/>
             </a:pPr>
             <a:r>
@@ -5172,7 +5185,7 @@
           <a:bodyPr wrap="square" lIns="0" tIns="0" rIns="0" bIns="0" rtlCol="0" anchor="ctr"/>
           <a:lstStyle/>
           <a:p>
-            <a:pPr indent="0" marL="0">
+            <a:pPr marL="0" indent="0">
               <a:buNone/>
             </a:pPr>
             <a:r>
@@ -5189,7 +5202,7 @@
             <a:endParaRPr lang="en-US" sz="1550" dirty="0"/>
           </a:p>
           <a:p>
-            <a:pPr indent="0" marL="0">
+            <a:pPr marL="0" indent="0">
               <a:buNone/>
             </a:pPr>
             <a:r>
@@ -5206,7 +5219,7 @@
             <a:endParaRPr lang="en-US" sz="1550" dirty="0"/>
           </a:p>
           <a:p>
-            <a:pPr indent="0" marL="0">
+            <a:pPr marL="0" indent="0">
               <a:buNone/>
             </a:pPr>
             <a:r>
@@ -5247,6 +5260,13 @@
             <a:tailEnd type="triangle"/>
           </a:ln>
         </p:spPr>
+        <p:txBody>
+          <a:bodyPr/>
+          <a:lstStyle/>
+          <a:p>
+            <a:endParaRPr lang="en-US"/>
+          </a:p>
+        </p:txBody>
       </p:sp>
       <p:sp>
         <p:nvSpPr>
@@ -5274,6 +5294,13 @@
             <a:prstDash val="solid"/>
           </a:ln>
         </p:spPr>
+        <p:txBody>
+          <a:bodyPr/>
+          <a:lstStyle/>
+          <a:p>
+            <a:endParaRPr lang="en-US"/>
+          </a:p>
+        </p:txBody>
       </p:sp>
       <p:sp>
         <p:nvSpPr>
@@ -5301,6 +5328,13 @@
             <a:prstDash val="solid"/>
           </a:ln>
         </p:spPr>
+        <p:txBody>
+          <a:bodyPr/>
+          <a:lstStyle/>
+          <a:p>
+            <a:endParaRPr lang="en-US"/>
+          </a:p>
+        </p:txBody>
       </p:sp>
       <p:sp>
         <p:nvSpPr>
@@ -5323,7 +5357,7 @@
           <a:bodyPr wrap="square" lIns="0" tIns="0" rIns="0" bIns="0" rtlCol="0" anchor="ctr"/>
           <a:lstStyle/>
           <a:p>
-            <a:pPr algn="ctr" indent="0" marL="0">
+            <a:pPr marL="0" indent="0" algn="ctr">
               <a:buNone/>
             </a:pPr>
             <a:r>
@@ -5362,7 +5396,7 @@
           <a:bodyPr wrap="square" lIns="0" tIns="0" rIns="0" bIns="0" rtlCol="0" anchor="ctr"/>
           <a:lstStyle/>
           <a:p>
-            <a:pPr indent="0" marL="0">
+            <a:pPr marL="0" indent="0">
               <a:buNone/>
             </a:pPr>
             <a:r>
@@ -5401,7 +5435,7 @@
           <a:bodyPr wrap="square" lIns="0" tIns="0" rIns="0" bIns="0" rtlCol="0" anchor="ctr"/>
           <a:lstStyle/>
           <a:p>
-            <a:pPr indent="0" marL="0">
+            <a:pPr marL="0" indent="0">
               <a:buNone/>
             </a:pPr>
             <a:r>
@@ -5418,7 +5452,7 @@
             <a:endParaRPr lang="en-US" sz="1550" dirty="0"/>
           </a:p>
           <a:p>
-            <a:pPr indent="0" marL="0">
+            <a:pPr marL="0" indent="0">
               <a:buNone/>
             </a:pPr>
             <a:r>
@@ -5435,7 +5469,7 @@
             <a:endParaRPr lang="en-US" sz="1550" dirty="0"/>
           </a:p>
           <a:p>
-            <a:pPr indent="0" marL="0">
+            <a:pPr marL="0" indent="0">
               <a:buNone/>
             </a:pPr>
             <a:r>
@@ -5474,7 +5508,7 @@
           <a:bodyPr wrap="square" lIns="0" tIns="0" rIns="0" bIns="0" rtlCol="0" anchor="ctr"/>
           <a:lstStyle/>
           <a:p>
-            <a:pPr algn="ctr" indent="0" marL="0">
+            <a:pPr marL="0" indent="0" algn="ctr">
               <a:buNone/>
             </a:pPr>
             <a:r>
@@ -5518,6 +5552,13 @@
             <a:prstDash val="solid"/>
           </a:ln>
         </p:spPr>
+        <p:txBody>
+          <a:bodyPr/>
+          <a:lstStyle/>
+          <a:p>
+            <a:endParaRPr lang="en-US"/>
+          </a:p>
+        </p:txBody>
       </p:sp>
       <p:sp>
         <p:nvSpPr>
@@ -5540,7 +5581,7 @@
           <a:bodyPr wrap="square" lIns="0" tIns="0" rIns="0" bIns="0" rtlCol="0" anchor="ctr"/>
           <a:lstStyle/>
           <a:p>
-            <a:pPr algn="ctr" indent="0" marL="0">
+            <a:pPr marL="0" indent="0" algn="ctr">
               <a:buNone/>
             </a:pPr>
             <a:r>
@@ -5574,6 +5615,7 @@
         <a:solidFill>
           <a:srgbClr val="F5F7FB"/>
         </a:solidFill>
+        <a:effectLst/>
       </p:bgPr>
     </p:bg>
     <p:spTree>
@@ -5614,6 +5656,13 @@
             <a:prstDash val="solid"/>
           </a:ln>
         </p:spPr>
+        <p:txBody>
+          <a:bodyPr/>
+          <a:lstStyle/>
+          <a:p>
+            <a:endParaRPr lang="en-US"/>
+          </a:p>
+        </p:txBody>
       </p:sp>
       <p:sp>
         <p:nvSpPr>
@@ -5636,11 +5685,11 @@
           <a:bodyPr wrap="square" lIns="0" tIns="0" rIns="0" bIns="0" rtlCol="0" anchor="ctr"/>
           <a:lstStyle/>
           <a:p>
-            <a:pPr indent="0" marL="0">
-              <a:buNone/>
-            </a:pPr>
-            <a:r>
-              <a:rPr lang="en-US" sz="1100" b="1" spc="150" kern="0" dirty="0">
+            <a:pPr marL="0" indent="0">
+              <a:buNone/>
+            </a:pPr>
+            <a:r>
+              <a:rPr lang="en-US" sz="1100" b="1" kern="0" spc="150" dirty="0">
                 <a:solidFill>
                   <a:srgbClr val="5B6C83"/>
                 </a:solidFill>
@@ -5675,7 +5724,7 @@
           <a:bodyPr wrap="square" lIns="0" tIns="0" rIns="0" bIns="0" rtlCol="0" anchor="ctr"/>
           <a:lstStyle/>
           <a:p>
-            <a:pPr indent="0" marL="0">
+            <a:pPr marL="0" indent="0">
               <a:buNone/>
             </a:pPr>
             <a:r>
@@ -5714,7 +5763,7 @@
           <a:bodyPr wrap="square" lIns="0" tIns="0" rIns="0" bIns="0" rtlCol="0" anchor="ctr"/>
           <a:lstStyle/>
           <a:p>
-            <a:pPr indent="0" marL="0">
+            <a:pPr marL="0" indent="0">
               <a:buNone/>
             </a:pPr>
             <a:r>
@@ -5753,7 +5802,7 @@
           <a:bodyPr wrap="square" lIns="0" tIns="0" rIns="0" bIns="0" rtlCol="0" anchor="ctr"/>
           <a:lstStyle/>
           <a:p>
-            <a:pPr indent="0" marL="0">
+            <a:pPr marL="0" indent="0">
               <a:buNone/>
             </a:pPr>
             <a:r>
@@ -5792,7 +5841,7 @@
           <a:bodyPr wrap="square" lIns="0" tIns="0" rIns="0" bIns="0" rtlCol="0" anchor="ctr"/>
           <a:lstStyle/>
           <a:p>
-            <a:pPr algn="r" indent="0" marL="0">
+            <a:pPr marL="0" indent="0" algn="r">
               <a:buNone/>
             </a:pPr>
             <a:r>
@@ -5836,6 +5885,13 @@
             <a:prstDash val="solid"/>
           </a:ln>
         </p:spPr>
+        <p:txBody>
+          <a:bodyPr/>
+          <a:lstStyle/>
+          <a:p>
+            <a:endParaRPr lang="en-US"/>
+          </a:p>
+        </p:txBody>
       </p:sp>
       <p:sp>
         <p:nvSpPr>
@@ -5858,7 +5914,7 @@
           <a:bodyPr wrap="square" lIns="0" tIns="0" rIns="0" bIns="0" rtlCol="0" anchor="ctr"/>
           <a:lstStyle/>
           <a:p>
-            <a:pPr indent="0" marL="0">
+            <a:pPr marL="0" indent="0">
               <a:buNone/>
             </a:pPr>
             <a:r>
@@ -5897,7 +5953,7 @@
           <a:bodyPr wrap="square" lIns="0" tIns="0" rIns="0" bIns="0" rtlCol="0" anchor="ctr"/>
           <a:lstStyle/>
           <a:p>
-            <a:pPr indent="0" marL="0">
+            <a:pPr marL="0" indent="0">
               <a:buNone/>
             </a:pPr>
             <a:r>
@@ -5914,7 +5970,7 @@
             <a:endParaRPr lang="en-US" sz="1800" dirty="0"/>
           </a:p>
           <a:p>
-            <a:pPr indent="0" marL="0">
+            <a:pPr marL="0" indent="0">
               <a:buNone/>
             </a:pPr>
             <a:r>
@@ -5931,7 +5987,7 @@
             <a:endParaRPr lang="en-US" sz="1800" dirty="0"/>
           </a:p>
           <a:p>
-            <a:pPr indent="0" marL="0">
+            <a:pPr marL="0" indent="0">
               <a:buNone/>
             </a:pPr>
             <a:r>
@@ -5975,6 +6031,13 @@
             <a:prstDash val="solid"/>
           </a:ln>
         </p:spPr>
+        <p:txBody>
+          <a:bodyPr/>
+          <a:lstStyle/>
+          <a:p>
+            <a:endParaRPr lang="en-US"/>
+          </a:p>
+        </p:txBody>
       </p:sp>
       <p:sp>
         <p:nvSpPr>
@@ -5997,7 +6060,7 @@
           <a:bodyPr wrap="square" lIns="0" tIns="0" rIns="0" bIns="0" rtlCol="0" anchor="ctr"/>
           <a:lstStyle/>
           <a:p>
-            <a:pPr indent="0" marL="0">
+            <a:pPr marL="0" indent="0">
               <a:buNone/>
             </a:pPr>
             <a:r>
@@ -6036,7 +6099,7 @@
           <a:bodyPr wrap="square" lIns="0" tIns="0" rIns="0" bIns="0" rtlCol="0" anchor="ctr"/>
           <a:lstStyle/>
           <a:p>
-            <a:pPr indent="0" marL="0">
+            <a:pPr marL="0" indent="0">
               <a:buNone/>
             </a:pPr>
             <a:r>
@@ -6053,7 +6116,7 @@
             <a:endParaRPr lang="en-US" sz="1700" dirty="0"/>
           </a:p>
           <a:p>
-            <a:pPr indent="0" marL="0">
+            <a:pPr marL="0" indent="0">
               <a:buNone/>
             </a:pPr>
             <a:r>
@@ -6070,7 +6133,7 @@
             <a:endParaRPr lang="en-US" sz="1700" dirty="0"/>
           </a:p>
           <a:p>
-            <a:pPr indent="0" marL="0">
+            <a:pPr marL="0" indent="0">
               <a:buNone/>
             </a:pPr>
             <a:r>
@@ -6114,6 +6177,13 @@
             <a:prstDash val="solid"/>
           </a:ln>
         </p:spPr>
+        <p:txBody>
+          <a:bodyPr/>
+          <a:lstStyle/>
+          <a:p>
+            <a:endParaRPr lang="en-US"/>
+          </a:p>
+        </p:txBody>
       </p:sp>
       <p:sp>
         <p:nvSpPr>
@@ -6136,7 +6206,7 @@
           <a:bodyPr wrap="square" lIns="0" tIns="0" rIns="0" bIns="0" rtlCol="0" anchor="ctr"/>
           <a:lstStyle/>
           <a:p>
-            <a:pPr indent="0" marL="0">
+            <a:pPr marL="0" indent="0">
               <a:buNone/>
             </a:pPr>
             <a:r>
@@ -6175,7 +6245,7 @@
           <a:bodyPr wrap="square" lIns="0" tIns="0" rIns="0" bIns="0" rtlCol="0" anchor="ctr"/>
           <a:lstStyle/>
           <a:p>
-            <a:pPr indent="0" marL="0">
+            <a:pPr marL="0" indent="0">
               <a:buNone/>
             </a:pPr>
             <a:r>
@@ -6192,7 +6262,7 @@
             <a:endParaRPr lang="en-US" sz="1700" dirty="0"/>
           </a:p>
           <a:p>
-            <a:pPr indent="0" marL="0">
+            <a:pPr marL="0" indent="0">
               <a:buNone/>
             </a:pPr>
             <a:r>
@@ -6209,7 +6279,7 @@
             <a:endParaRPr lang="en-US" sz="1700" dirty="0"/>
           </a:p>
           <a:p>
-            <a:pPr indent="0" marL="0">
+            <a:pPr marL="0" indent="0">
               <a:buNone/>
             </a:pPr>
             <a:r>
@@ -6250,6 +6320,13 @@
             <a:tailEnd type="triangle"/>
           </a:ln>
         </p:spPr>
+        <p:txBody>
+          <a:bodyPr/>
+          <a:lstStyle/>
+          <a:p>
+            <a:endParaRPr lang="en-US"/>
+          </a:p>
+        </p:txBody>
       </p:sp>
       <p:sp>
         <p:nvSpPr>
@@ -6272,7 +6349,7 @@
           <a:bodyPr wrap="square" lIns="0" tIns="0" rIns="0" bIns="0" rtlCol="0" anchor="ctr"/>
           <a:lstStyle/>
           <a:p>
-            <a:pPr algn="ctr" indent="0" marL="0">
+            <a:pPr marL="0" indent="0" algn="ctr">
               <a:buNone/>
             </a:pPr>
             <a:r>
@@ -6314,6 +6391,13 @@
             <a:tailEnd type="triangle"/>
           </a:ln>
         </p:spPr>
+        <p:txBody>
+          <a:bodyPr/>
+          <a:lstStyle/>
+          <a:p>
+            <a:endParaRPr lang="en-US"/>
+          </a:p>
+        </p:txBody>
       </p:sp>
       <p:sp>
         <p:nvSpPr>
@@ -6341,6 +6425,13 @@
             <a:prstDash val="solid"/>
           </a:ln>
         </p:spPr>
+        <p:txBody>
+          <a:bodyPr/>
+          <a:lstStyle/>
+          <a:p>
+            <a:endParaRPr lang="en-US"/>
+          </a:p>
+        </p:txBody>
       </p:sp>
       <p:sp>
         <p:nvSpPr>
@@ -6363,7 +6454,7 @@
           <a:bodyPr wrap="square" lIns="0" tIns="0" rIns="0" bIns="0" rtlCol="0" anchor="ctr"/>
           <a:lstStyle/>
           <a:p>
-            <a:pPr indent="0" marL="0">
+            <a:pPr marL="0" indent="0">
               <a:buNone/>
             </a:pPr>
             <a:r>
@@ -6402,7 +6493,7 @@
           <a:bodyPr wrap="square" lIns="0" tIns="0" rIns="0" bIns="0" rtlCol="0" anchor="ctr"/>
           <a:lstStyle/>
           <a:p>
-            <a:pPr indent="0" marL="0">
+            <a:pPr marL="0" indent="0">
               <a:buNone/>
             </a:pPr>
             <a:r>
@@ -6446,6 +6537,13 @@
             <a:prstDash val="solid"/>
           </a:ln>
         </p:spPr>
+        <p:txBody>
+          <a:bodyPr/>
+          <a:lstStyle/>
+          <a:p>
+            <a:endParaRPr lang="en-US"/>
+          </a:p>
+        </p:txBody>
       </p:sp>
       <p:sp>
         <p:nvSpPr>
@@ -6468,7 +6566,7 @@
           <a:bodyPr wrap="square" lIns="0" tIns="0" rIns="0" bIns="0" rtlCol="0" anchor="ctr"/>
           <a:lstStyle/>
           <a:p>
-            <a:pPr indent="0" marL="0">
+            <a:pPr marL="0" indent="0">
               <a:buNone/>
             </a:pPr>
             <a:r>
@@ -6507,7 +6605,7 @@
           <a:bodyPr wrap="square" lIns="0" tIns="0" rIns="0" bIns="0" rtlCol="0" anchor="ctr"/>
           <a:lstStyle/>
           <a:p>
-            <a:pPr indent="0" marL="0">
+            <a:pPr marL="0" indent="0">
               <a:buNone/>
             </a:pPr>
             <a:r>
@@ -6551,6 +6649,13 @@
             <a:prstDash val="solid"/>
           </a:ln>
         </p:spPr>
+        <p:txBody>
+          <a:bodyPr/>
+          <a:lstStyle/>
+          <a:p>
+            <a:endParaRPr lang="en-US"/>
+          </a:p>
+        </p:txBody>
       </p:sp>
       <p:sp>
         <p:nvSpPr>
@@ -6573,7 +6678,7 @@
           <a:bodyPr wrap="square" lIns="0" tIns="0" rIns="0" bIns="0" rtlCol="0" anchor="ctr"/>
           <a:lstStyle/>
           <a:p>
-            <a:pPr algn="ctr" indent="0" marL="0">
+            <a:pPr marL="0" indent="0" algn="ctr">
               <a:buNone/>
             </a:pPr>
             <a:r>
@@ -6607,6 +6712,7 @@
         <a:solidFill>
           <a:srgbClr val="F5F7FB"/>
         </a:solidFill>
+        <a:effectLst/>
       </p:bgPr>
     </p:bg>
     <p:spTree>
@@ -6647,6 +6753,13 @@
             <a:prstDash val="solid"/>
           </a:ln>
         </p:spPr>
+        <p:txBody>
+          <a:bodyPr/>
+          <a:lstStyle/>
+          <a:p>
+            <a:endParaRPr lang="en-US"/>
+          </a:p>
+        </p:txBody>
       </p:sp>
       <p:sp>
         <p:nvSpPr>
@@ -6669,11 +6782,11 @@
           <a:bodyPr wrap="square" lIns="0" tIns="0" rIns="0" bIns="0" rtlCol="0" anchor="ctr"/>
           <a:lstStyle/>
           <a:p>
-            <a:pPr indent="0" marL="0">
-              <a:buNone/>
-            </a:pPr>
-            <a:r>
-              <a:rPr lang="en-US" sz="1100" b="1" spc="150" kern="0" dirty="0">
+            <a:pPr marL="0" indent="0">
+              <a:buNone/>
+            </a:pPr>
+            <a:r>
+              <a:rPr lang="en-US" sz="1100" b="1" kern="0" spc="150" dirty="0">
                 <a:solidFill>
                   <a:srgbClr val="5B6C83"/>
                 </a:solidFill>
@@ -6708,7 +6821,7 @@
           <a:bodyPr wrap="square" lIns="0" tIns="0" rIns="0" bIns="0" rtlCol="0" anchor="ctr"/>
           <a:lstStyle/>
           <a:p>
-            <a:pPr indent="0" marL="0">
+            <a:pPr marL="0" indent="0">
               <a:buNone/>
             </a:pPr>
             <a:r>
@@ -6747,7 +6860,7 @@
           <a:bodyPr wrap="square" lIns="0" tIns="0" rIns="0" bIns="0" rtlCol="0" anchor="ctr"/>
           <a:lstStyle/>
           <a:p>
-            <a:pPr indent="0" marL="0">
+            <a:pPr marL="0" indent="0">
               <a:buNone/>
             </a:pPr>
             <a:r>
@@ -6786,7 +6899,7 @@
           <a:bodyPr wrap="square" lIns="0" tIns="0" rIns="0" bIns="0" rtlCol="0" anchor="ctr"/>
           <a:lstStyle/>
           <a:p>
-            <a:pPr indent="0" marL="0">
+            <a:pPr marL="0" indent="0">
               <a:buNone/>
             </a:pPr>
             <a:r>
@@ -6825,7 +6938,7 @@
           <a:bodyPr wrap="square" lIns="0" tIns="0" rIns="0" bIns="0" rtlCol="0" anchor="ctr"/>
           <a:lstStyle/>
           <a:p>
-            <a:pPr algn="r" indent="0" marL="0">
+            <a:pPr marL="0" indent="0" algn="r">
               <a:buNone/>
             </a:pPr>
             <a:r>
@@ -6869,6 +6982,13 @@
             <a:prstDash val="solid"/>
           </a:ln>
         </p:spPr>
+        <p:txBody>
+          <a:bodyPr/>
+          <a:lstStyle/>
+          <a:p>
+            <a:endParaRPr lang="en-US"/>
+          </a:p>
+        </p:txBody>
       </p:sp>
       <p:sp>
         <p:nvSpPr>
@@ -6891,7 +7011,7 @@
           <a:bodyPr wrap="square" lIns="0" tIns="0" rIns="0" bIns="0" rtlCol="0" anchor="ctr"/>
           <a:lstStyle/>
           <a:p>
-            <a:pPr indent="0" marL="0">
+            <a:pPr marL="0" indent="0">
               <a:buNone/>
             </a:pPr>
             <a:r>
@@ -6930,7 +7050,7 @@
           <a:bodyPr wrap="square" lIns="0" tIns="0" rIns="0" bIns="0" rtlCol="0" anchor="ctr"/>
           <a:lstStyle/>
           <a:p>
-            <a:pPr indent="0" marL="0">
+            <a:pPr marL="0" indent="0">
               <a:buNone/>
             </a:pPr>
             <a:r>
@@ -6969,7 +7089,7 @@
           <a:bodyPr wrap="square" lIns="0" tIns="0" rIns="0" bIns="0" rtlCol="0" anchor="ctr"/>
           <a:lstStyle/>
           <a:p>
-            <a:pPr indent="0" marL="0">
+            <a:pPr marL="0" indent="0">
               <a:buNone/>
             </a:pPr>
             <a:r>
@@ -7013,6 +7133,13 @@
             <a:prstDash val="solid"/>
           </a:ln>
         </p:spPr>
+        <p:txBody>
+          <a:bodyPr/>
+          <a:lstStyle/>
+          <a:p>
+            <a:endParaRPr lang="en-US"/>
+          </a:p>
+        </p:txBody>
       </p:sp>
       <p:sp>
         <p:nvSpPr>
@@ -7035,7 +7162,7 @@
           <a:bodyPr wrap="square" lIns="0" tIns="0" rIns="0" bIns="0" rtlCol="0" anchor="ctr"/>
           <a:lstStyle/>
           <a:p>
-            <a:pPr indent="0" marL="0">
+            <a:pPr marL="0" indent="0">
               <a:buNone/>
             </a:pPr>
             <a:r>
@@ -7074,7 +7201,7 @@
           <a:bodyPr wrap="square" lIns="0" tIns="0" rIns="0" bIns="0" rtlCol="0" anchor="ctr"/>
           <a:lstStyle/>
           <a:p>
-            <a:pPr indent="0" marL="0">
+            <a:pPr marL="0" indent="0">
               <a:buNone/>
             </a:pPr>
             <a:r>
@@ -7113,7 +7240,7 @@
           <a:bodyPr wrap="square" lIns="0" tIns="0" rIns="0" bIns="0" rtlCol="0" anchor="ctr"/>
           <a:lstStyle/>
           <a:p>
-            <a:pPr indent="0" marL="0">
+            <a:pPr marL="0" indent="0">
               <a:buNone/>
             </a:pPr>
             <a:r>
@@ -7157,6 +7284,13 @@
             <a:prstDash val="solid"/>
           </a:ln>
         </p:spPr>
+        <p:txBody>
+          <a:bodyPr/>
+          <a:lstStyle/>
+          <a:p>
+            <a:endParaRPr lang="en-US"/>
+          </a:p>
+        </p:txBody>
       </p:sp>
       <p:sp>
         <p:nvSpPr>
@@ -7179,7 +7313,7 @@
           <a:bodyPr wrap="square" lIns="0" tIns="0" rIns="0" bIns="0" rtlCol="0" anchor="ctr"/>
           <a:lstStyle/>
           <a:p>
-            <a:pPr indent="0" marL="0">
+            <a:pPr marL="0" indent="0">
               <a:buNone/>
             </a:pPr>
             <a:r>
@@ -7218,7 +7352,7 @@
           <a:bodyPr wrap="square" lIns="0" tIns="0" rIns="0" bIns="0" rtlCol="0" anchor="ctr"/>
           <a:lstStyle/>
           <a:p>
-            <a:pPr indent="0" marL="0">
+            <a:pPr marL="0" indent="0">
               <a:buNone/>
             </a:pPr>
             <a:r>
@@ -7257,7 +7391,7 @@
           <a:bodyPr wrap="square" lIns="0" tIns="0" rIns="0" bIns="0" rtlCol="0" anchor="ctr"/>
           <a:lstStyle/>
           <a:p>
-            <a:pPr indent="0" marL="0">
+            <a:pPr marL="0" indent="0">
               <a:buNone/>
             </a:pPr>
             <a:r>
@@ -7296,7 +7430,7 @@
           <a:bodyPr wrap="square" lIns="0" tIns="0" rIns="0" bIns="0" rtlCol="0" anchor="ctr"/>
           <a:lstStyle/>
           <a:p>
-            <a:pPr algn="ctr" indent="0" marL="0">
+            <a:pPr marL="0" indent="0" algn="ctr">
               <a:buNone/>
             </a:pPr>
             <a:r>
@@ -7311,6 +7445,4835 @@
               <a:t>No ROM chip. No Z80 emulation. No Pico memory-bus mastering.</a:t>
             </a:r>
             <a:endParaRPr lang="en-US" sz="2200" dirty="0"/>
+          </a:p>
+        </p:txBody>
+      </p:sp>
+    </p:spTree>
+  </p:cSld>
+  <p:clrMapOvr>
+    <a:masterClrMapping/>
+  </p:clrMapOvr>
+</p:sld>
+</file>
+
+<file path=ppt/slides/slide7.xml><?xml version="1.0" encoding="utf-8"?>
+<p:sld xmlns:a="http://schemas.openxmlformats.org/drawingml/2006/main" xmlns:r="http://schemas.openxmlformats.org/officeDocument/2006/relationships" xmlns:p="http://schemas.openxmlformats.org/presentationml/2006/main">
+  <p:cSld>
+    <p:bg>
+      <p:bgPr>
+        <a:solidFill>
+          <a:srgbClr val="FFFFFF"/>
+        </a:solidFill>
+        <a:effectLst/>
+      </p:bgPr>
+    </p:bg>
+    <p:spTree>
+      <p:nvGrpSpPr>
+        <p:cNvPr id="1" name=""/>
+        <p:cNvGrpSpPr/>
+        <p:nvPr/>
+      </p:nvGrpSpPr>
+      <p:grpSpPr>
+        <a:xfrm>
+          <a:off x="0" y="0"/>
+          <a:ext cx="0" cy="0"/>
+          <a:chOff x="0" y="0"/>
+          <a:chExt cx="0" cy="0"/>
+        </a:xfrm>
+      </p:grpSpPr>
+      <p:sp>
+        <p:nvSpPr>
+          <p:cNvPr id="2" name="Rectangle 1"/>
+          <p:cNvSpPr/>
+          <p:nvPr/>
+        </p:nvSpPr>
+        <p:spPr>
+          <a:xfrm>
+            <a:off x="0" y="0"/>
+            <a:ext cx="12192000" cy="64008"/>
+          </a:xfrm>
+          <a:prstGeom prst="rect">
+            <a:avLst/>
+          </a:prstGeom>
+          <a:solidFill>
+            <a:srgbClr val="172C46"/>
+          </a:solidFill>
+          <a:ln>
+            <a:noFill/>
+          </a:ln>
+        </p:spPr>
+        <p:style>
+          <a:lnRef idx="1">
+            <a:schemeClr val="accent1"/>
+          </a:lnRef>
+          <a:fillRef idx="3">
+            <a:schemeClr val="accent1"/>
+          </a:fillRef>
+          <a:effectRef idx="2">
+            <a:schemeClr val="accent1"/>
+          </a:effectRef>
+          <a:fontRef idx="minor">
+            <a:schemeClr val="lt1"/>
+          </a:fontRef>
+        </p:style>
+        <p:txBody>
+          <a:bodyPr rtlCol="0" anchor="ctr"/>
+          <a:lstStyle/>
+          <a:p>
+            <a:pPr algn="ctr"/>
+            <a:endParaRPr/>
+          </a:p>
+        </p:txBody>
+      </p:sp>
+      <p:sp>
+        <p:nvSpPr>
+          <p:cNvPr id="3" name="TextBox 2"/>
+          <p:cNvSpPr txBox="1"/>
+          <p:nvPr/>
+        </p:nvSpPr>
+        <p:spPr>
+          <a:xfrm>
+            <a:off x="411480" y="228600"/>
+            <a:ext cx="10058400" cy="256032"/>
+          </a:xfrm>
+          <a:prstGeom prst="rect">
+            <a:avLst/>
+          </a:prstGeom>
+          <a:noFill/>
+        </p:spPr>
+        <p:txBody>
+          <a:bodyPr wrap="square" lIns="0" tIns="0" rIns="0" bIns="0" anchor="ctr">
+            <a:spAutoFit/>
+          </a:bodyPr>
+          <a:lstStyle/>
+          <a:p>
+            <a:pPr>
+              <a:defRPr sz="1100" b="1">
+                <a:solidFill>
+                  <a:srgbClr val="172C46"/>
+                </a:solidFill>
+                <a:latin typeface="Arial"/>
+              </a:defRPr>
+            </a:pPr>
+            <a:r>
+              <a:t>Z80 ROMLESS SBC  /  DESIGN OVERVIEW</a:t>
+            </a:r>
+          </a:p>
+        </p:txBody>
+      </p:sp>
+      <p:sp>
+        <p:nvSpPr>
+          <p:cNvPr id="4" name="TextBox 3"/>
+          <p:cNvSpPr txBox="1"/>
+          <p:nvPr/>
+        </p:nvSpPr>
+        <p:spPr>
+          <a:xfrm>
+            <a:off x="411480" y="713232"/>
+            <a:ext cx="11338560" cy="594360"/>
+          </a:xfrm>
+          <a:prstGeom prst="rect">
+            <a:avLst/>
+          </a:prstGeom>
+          <a:noFill/>
+        </p:spPr>
+        <p:txBody>
+          <a:bodyPr wrap="square" lIns="0" tIns="0" rIns="0" bIns="0" anchor="ctr">
+            <a:spAutoFit/>
+          </a:bodyPr>
+          <a:lstStyle/>
+          <a:p>
+            <a:pPr>
+              <a:defRPr sz="3100" b="1">
+                <a:solidFill>
+                  <a:srgbClr val="172C46"/>
+                </a:solidFill>
+                <a:latin typeface="Arial"/>
+              </a:defRPr>
+            </a:pPr>
+            <a:r>
+              <a:t>The processors and memory</a:t>
+            </a:r>
+          </a:p>
+        </p:txBody>
+      </p:sp>
+      <p:sp>
+        <p:nvSpPr>
+          <p:cNvPr id="5" name="TextBox 4"/>
+          <p:cNvSpPr txBox="1"/>
+          <p:nvPr/>
+        </p:nvSpPr>
+        <p:spPr>
+          <a:xfrm>
+            <a:off x="438912" y="1362456"/>
+            <a:ext cx="11155680" cy="457200"/>
+          </a:xfrm>
+          <a:prstGeom prst="rect">
+            <a:avLst/>
+          </a:prstGeom>
+          <a:noFill/>
+        </p:spPr>
+        <p:txBody>
+          <a:bodyPr wrap="square" lIns="0" tIns="0" rIns="0" bIns="0" anchor="ctr">
+            <a:spAutoFit/>
+          </a:bodyPr>
+          <a:lstStyle/>
+          <a:p>
+            <a:pPr>
+              <a:defRPr sz="1700" b="0">
+                <a:solidFill>
+                  <a:srgbClr val="536273"/>
+                </a:solidFill>
+                <a:latin typeface="Arial"/>
+              </a:defRPr>
+            </a:pPr>
+            <a:r>
+              <a:t>Three devices do the work: the Z80 executes, SRAM stores, and the Pico orchestrates.</a:t>
+            </a:r>
+          </a:p>
+        </p:txBody>
+      </p:sp>
+      <p:sp>
+        <p:nvSpPr>
+          <p:cNvPr id="6" name="TextBox 5"/>
+          <p:cNvSpPr txBox="1"/>
+          <p:nvPr/>
+        </p:nvSpPr>
+        <p:spPr>
+          <a:xfrm>
+            <a:off x="411480" y="6510528"/>
+            <a:ext cx="10607040" cy="182880"/>
+          </a:xfrm>
+          <a:prstGeom prst="rect">
+            <a:avLst/>
+          </a:prstGeom>
+          <a:noFill/>
+        </p:spPr>
+        <p:txBody>
+          <a:bodyPr wrap="square" lIns="0" tIns="0" rIns="0" bIns="0" anchor="ctr">
+            <a:spAutoFit/>
+          </a:bodyPr>
+          <a:lstStyle/>
+          <a:p>
+            <a:pPr>
+              <a:defRPr sz="1000" b="0">
+                <a:solidFill>
+                  <a:srgbClr val="687385"/>
+                </a:solidFill>
+                <a:latin typeface="Arial"/>
+              </a:defRPr>
+            </a:pPr>
+            <a:r>
+              <a:t>Stage 10 implementation | Current breadboard architecture | 22 October 2026</a:t>
+            </a:r>
+          </a:p>
+        </p:txBody>
+      </p:sp>
+      <p:sp>
+        <p:nvSpPr>
+          <p:cNvPr id="7" name="TextBox 6"/>
+          <p:cNvSpPr txBox="1"/>
+          <p:nvPr/>
+        </p:nvSpPr>
+        <p:spPr>
+          <a:xfrm>
+            <a:off x="11292840" y="6473952"/>
+            <a:ext cx="457200" cy="274320"/>
+          </a:xfrm>
+          <a:prstGeom prst="rect">
+            <a:avLst/>
+          </a:prstGeom>
+          <a:noFill/>
+        </p:spPr>
+        <p:txBody>
+          <a:bodyPr wrap="square" lIns="0" tIns="0" rIns="0" bIns="0" anchor="ctr">
+            <a:spAutoFit/>
+          </a:bodyPr>
+          <a:lstStyle/>
+          <a:p>
+            <a:pPr>
+              <a:defRPr sz="1200" b="1">
+                <a:solidFill>
+                  <a:srgbClr val="172C46"/>
+                </a:solidFill>
+                <a:latin typeface="Arial"/>
+              </a:defRPr>
+            </a:pPr>
+            <a:r>
+              <a:t>07</a:t>
+            </a:r>
+          </a:p>
+        </p:txBody>
+      </p:sp>
+      <p:sp>
+        <p:nvSpPr>
+          <p:cNvPr id="8" name="Rectangle 7"/>
+          <p:cNvSpPr/>
+          <p:nvPr/>
+        </p:nvSpPr>
+        <p:spPr>
+          <a:xfrm>
+            <a:off x="438912" y="2176272"/>
+            <a:ext cx="3648456" cy="3054096"/>
+          </a:xfrm>
+          <a:prstGeom prst="rect">
+            <a:avLst/>
+          </a:prstGeom>
+          <a:solidFill>
+            <a:srgbClr val="E4F5EF"/>
+          </a:solidFill>
+          <a:ln>
+            <a:noFill/>
+          </a:ln>
+        </p:spPr>
+        <p:style>
+          <a:lnRef idx="1">
+            <a:schemeClr val="accent1"/>
+          </a:lnRef>
+          <a:fillRef idx="3">
+            <a:schemeClr val="accent1"/>
+          </a:fillRef>
+          <a:effectRef idx="2">
+            <a:schemeClr val="accent1"/>
+          </a:effectRef>
+          <a:fontRef idx="minor">
+            <a:schemeClr val="lt1"/>
+          </a:fontRef>
+        </p:style>
+        <p:txBody>
+          <a:bodyPr rtlCol="0" anchor="ctr"/>
+          <a:lstStyle/>
+          <a:p>
+            <a:pPr algn="ctr"/>
+            <a:endParaRPr/>
+          </a:p>
+        </p:txBody>
+      </p:sp>
+      <p:sp>
+        <p:nvSpPr>
+          <p:cNvPr id="9" name="TextBox 8"/>
+          <p:cNvSpPr txBox="1"/>
+          <p:nvPr/>
+        </p:nvSpPr>
+        <p:spPr>
+          <a:xfrm>
+            <a:off x="649224" y="2322576"/>
+            <a:ext cx="3227832" cy="201168"/>
+          </a:xfrm>
+          <a:prstGeom prst="rect">
+            <a:avLst/>
+          </a:prstGeom>
+          <a:noFill/>
+        </p:spPr>
+        <p:txBody>
+          <a:bodyPr wrap="square" lIns="0" tIns="0" rIns="0" bIns="0" anchor="ctr">
+            <a:spAutoFit/>
+          </a:bodyPr>
+          <a:lstStyle/>
+          <a:p>
+            <a:pPr>
+              <a:defRPr sz="1000" b="1">
+                <a:solidFill>
+                  <a:srgbClr val="536273"/>
+                </a:solidFill>
+                <a:latin typeface="Arial"/>
+              </a:defRPr>
+            </a:pPr>
+            <a:r>
+              <a:t>A1  /  CONTROLLER</a:t>
+            </a:r>
+          </a:p>
+        </p:txBody>
+      </p:sp>
+      <p:sp>
+        <p:nvSpPr>
+          <p:cNvPr id="10" name="TextBox 9"/>
+          <p:cNvSpPr txBox="1"/>
+          <p:nvPr/>
+        </p:nvSpPr>
+        <p:spPr>
+          <a:xfrm>
+            <a:off x="649224" y="2569464"/>
+            <a:ext cx="3227832" cy="365760"/>
+          </a:xfrm>
+          <a:prstGeom prst="rect">
+            <a:avLst/>
+          </a:prstGeom>
+          <a:noFill/>
+        </p:spPr>
+        <p:txBody>
+          <a:bodyPr wrap="square" lIns="0" tIns="0" rIns="0" bIns="0" anchor="ctr">
+            <a:spAutoFit/>
+          </a:bodyPr>
+          <a:lstStyle/>
+          <a:p>
+            <a:pPr>
+              <a:defRPr sz="2000" b="1">
+                <a:solidFill>
+                  <a:srgbClr val="172C46"/>
+                </a:solidFill>
+                <a:latin typeface="Arial"/>
+              </a:defRPr>
+            </a:pPr>
+            <a:r>
+              <a:t>Pico 2 W</a:t>
+            </a:r>
+          </a:p>
+        </p:txBody>
+      </p:sp>
+      <p:sp>
+        <p:nvSpPr>
+          <p:cNvPr id="11" name="TextBox 10"/>
+          <p:cNvSpPr txBox="1"/>
+          <p:nvPr/>
+        </p:nvSpPr>
+        <p:spPr>
+          <a:xfrm>
+            <a:off x="649224" y="2944368"/>
+            <a:ext cx="3227832" cy="246888"/>
+          </a:xfrm>
+          <a:prstGeom prst="rect">
+            <a:avLst/>
+          </a:prstGeom>
+          <a:noFill/>
+        </p:spPr>
+        <p:txBody>
+          <a:bodyPr wrap="square" lIns="0" tIns="0" rIns="0" bIns="0" anchor="ctr">
+            <a:spAutoFit/>
+          </a:bodyPr>
+          <a:lstStyle/>
+          <a:p>
+            <a:pPr>
+              <a:defRPr sz="1200" b="0">
+                <a:solidFill>
+                  <a:srgbClr val="536273"/>
+                </a:solidFill>
+                <a:latin typeface="Arial"/>
+              </a:defRPr>
+            </a:pPr>
+            <a:r>
+              <a:t>RP2350 dual-core module</a:t>
+            </a:r>
+          </a:p>
+        </p:txBody>
+      </p:sp>
+      <p:sp>
+        <p:nvSpPr>
+          <p:cNvPr id="12" name="TextBox 11"/>
+          <p:cNvSpPr txBox="1"/>
+          <p:nvPr/>
+        </p:nvSpPr>
+        <p:spPr>
+          <a:xfrm>
+            <a:off x="649224" y="3310127"/>
+            <a:ext cx="320040" cy="182880"/>
+          </a:xfrm>
+          <a:prstGeom prst="rect">
+            <a:avLst/>
+          </a:prstGeom>
+          <a:noFill/>
+        </p:spPr>
+        <p:txBody>
+          <a:bodyPr wrap="square" lIns="0" tIns="0" rIns="0" bIns="0" anchor="ctr">
+            <a:spAutoFit/>
+          </a:bodyPr>
+          <a:lstStyle/>
+          <a:p>
+            <a:pPr>
+              <a:defRPr sz="1000" b="1">
+                <a:solidFill>
+                  <a:srgbClr val="172C46"/>
+                </a:solidFill>
+                <a:latin typeface="Arial"/>
+              </a:defRPr>
+            </a:pPr>
+            <a:r>
+              <a:t>01</a:t>
+            </a:r>
+          </a:p>
+        </p:txBody>
+      </p:sp>
+      <p:sp>
+        <p:nvSpPr>
+          <p:cNvPr id="13" name="TextBox 12"/>
+          <p:cNvSpPr txBox="1"/>
+          <p:nvPr/>
+        </p:nvSpPr>
+        <p:spPr>
+          <a:xfrm>
+            <a:off x="996695" y="3300984"/>
+            <a:ext cx="2880360" cy="210312"/>
+          </a:xfrm>
+          <a:prstGeom prst="rect">
+            <a:avLst/>
+          </a:prstGeom>
+          <a:noFill/>
+        </p:spPr>
+        <p:txBody>
+          <a:bodyPr wrap="square" lIns="0" tIns="0" rIns="0" bIns="0" anchor="ctr">
+            <a:spAutoFit/>
+          </a:bodyPr>
+          <a:lstStyle/>
+          <a:p>
+            <a:pPr>
+              <a:defRPr sz="1300" b="1">
+                <a:solidFill>
+                  <a:srgbClr val="172C46"/>
+                </a:solidFill>
+                <a:latin typeface="Arial"/>
+              </a:defRPr>
+            </a:pPr>
+            <a:r>
+              <a:t>Core 0: Z80 control</a:t>
+            </a:r>
+          </a:p>
+        </p:txBody>
+      </p:sp>
+      <p:sp>
+        <p:nvSpPr>
+          <p:cNvPr id="14" name="TextBox 13"/>
+          <p:cNvSpPr txBox="1"/>
+          <p:nvPr/>
+        </p:nvSpPr>
+        <p:spPr>
+          <a:xfrm>
+            <a:off x="996695" y="3511296"/>
+            <a:ext cx="2880360" cy="411480"/>
+          </a:xfrm>
+          <a:prstGeom prst="rect">
+            <a:avLst/>
+          </a:prstGeom>
+          <a:noFill/>
+        </p:spPr>
+        <p:txBody>
+          <a:bodyPr wrap="square" lIns="0" tIns="0" rIns="0" bIns="0" anchor="ctr">
+            <a:spAutoFit/>
+          </a:bodyPr>
+          <a:lstStyle/>
+          <a:p>
+            <a:pPr>
+              <a:defRPr sz="1150" b="0">
+                <a:solidFill>
+                  <a:srgbClr val="24364B"/>
+                </a:solidFill>
+                <a:latin typeface="Arial"/>
+              </a:defRPr>
+            </a:pPr>
+            <a:r>
+              <a:t>Clocks and resets the CPU; traps I/O and injects/verifies the SRAM image.</a:t>
+            </a:r>
+          </a:p>
+        </p:txBody>
+      </p:sp>
+      <p:sp>
+        <p:nvSpPr>
+          <p:cNvPr id="15" name="TextBox 14"/>
+          <p:cNvSpPr txBox="1"/>
+          <p:nvPr/>
+        </p:nvSpPr>
+        <p:spPr>
+          <a:xfrm>
+            <a:off x="649224" y="3968496"/>
+            <a:ext cx="320040" cy="182880"/>
+          </a:xfrm>
+          <a:prstGeom prst="rect">
+            <a:avLst/>
+          </a:prstGeom>
+          <a:noFill/>
+        </p:spPr>
+        <p:txBody>
+          <a:bodyPr wrap="square" lIns="0" tIns="0" rIns="0" bIns="0" anchor="ctr">
+            <a:spAutoFit/>
+          </a:bodyPr>
+          <a:lstStyle/>
+          <a:p>
+            <a:pPr>
+              <a:defRPr sz="1000" b="1">
+                <a:solidFill>
+                  <a:srgbClr val="172C46"/>
+                </a:solidFill>
+                <a:latin typeface="Arial"/>
+              </a:defRPr>
+            </a:pPr>
+            <a:r>
+              <a:t>02</a:t>
+            </a:r>
+          </a:p>
+        </p:txBody>
+      </p:sp>
+      <p:sp>
+        <p:nvSpPr>
+          <p:cNvPr id="16" name="TextBox 15"/>
+          <p:cNvSpPr txBox="1"/>
+          <p:nvPr/>
+        </p:nvSpPr>
+        <p:spPr>
+          <a:xfrm>
+            <a:off x="996695" y="3959352"/>
+            <a:ext cx="2880360" cy="210312"/>
+          </a:xfrm>
+          <a:prstGeom prst="rect">
+            <a:avLst/>
+          </a:prstGeom>
+          <a:noFill/>
+        </p:spPr>
+        <p:txBody>
+          <a:bodyPr wrap="square" lIns="0" tIns="0" rIns="0" bIns="0" anchor="ctr">
+            <a:spAutoFit/>
+          </a:bodyPr>
+          <a:lstStyle/>
+          <a:p>
+            <a:pPr>
+              <a:defRPr sz="1300" b="1">
+                <a:solidFill>
+                  <a:srgbClr val="172C46"/>
+                </a:solidFill>
+                <a:latin typeface="Arial"/>
+              </a:defRPr>
+            </a:pPr>
+            <a:r>
+              <a:t>Core 1: external I/O</a:t>
+            </a:r>
+          </a:p>
+        </p:txBody>
+      </p:sp>
+      <p:sp>
+        <p:nvSpPr>
+          <p:cNvPr id="17" name="TextBox 16"/>
+          <p:cNvSpPr txBox="1"/>
+          <p:nvPr/>
+        </p:nvSpPr>
+        <p:spPr>
+          <a:xfrm>
+            <a:off x="996695" y="4169664"/>
+            <a:ext cx="2880360" cy="411480"/>
+          </a:xfrm>
+          <a:prstGeom prst="rect">
+            <a:avLst/>
+          </a:prstGeom>
+          <a:noFill/>
+        </p:spPr>
+        <p:txBody>
+          <a:bodyPr wrap="square" lIns="0" tIns="0" rIns="0" bIns="0" anchor="ctr">
+            <a:spAutoFit/>
+          </a:bodyPr>
+          <a:lstStyle/>
+          <a:p>
+            <a:pPr>
+              <a:defRPr sz="1150" b="0">
+                <a:solidFill>
+                  <a:srgbClr val="24364B"/>
+                </a:solidFill>
+                <a:latin typeface="Arial"/>
+              </a:defRPr>
+            </a:pPr>
+            <a:r>
+              <a:t>Owns USB, Wi-Fi, flash disks and asynchronous services.</a:t>
+            </a:r>
+          </a:p>
+        </p:txBody>
+      </p:sp>
+      <p:sp>
+        <p:nvSpPr>
+          <p:cNvPr id="18" name="TextBox 17"/>
+          <p:cNvSpPr txBox="1"/>
+          <p:nvPr/>
+        </p:nvSpPr>
+        <p:spPr>
+          <a:xfrm>
+            <a:off x="649224" y="4626864"/>
+            <a:ext cx="320040" cy="182880"/>
+          </a:xfrm>
+          <a:prstGeom prst="rect">
+            <a:avLst/>
+          </a:prstGeom>
+          <a:noFill/>
+        </p:spPr>
+        <p:txBody>
+          <a:bodyPr wrap="square" lIns="0" tIns="0" rIns="0" bIns="0" anchor="ctr">
+            <a:spAutoFit/>
+          </a:bodyPr>
+          <a:lstStyle/>
+          <a:p>
+            <a:pPr>
+              <a:defRPr sz="1000" b="1">
+                <a:solidFill>
+                  <a:srgbClr val="172C46"/>
+                </a:solidFill>
+                <a:latin typeface="Arial"/>
+              </a:defRPr>
+            </a:pPr>
+            <a:r>
+              <a:t>03</a:t>
+            </a:r>
+          </a:p>
+        </p:txBody>
+      </p:sp>
+      <p:sp>
+        <p:nvSpPr>
+          <p:cNvPr id="19" name="TextBox 18"/>
+          <p:cNvSpPr txBox="1"/>
+          <p:nvPr/>
+        </p:nvSpPr>
+        <p:spPr>
+          <a:xfrm>
+            <a:off x="996695" y="4617720"/>
+            <a:ext cx="2880360" cy="210312"/>
+          </a:xfrm>
+          <a:prstGeom prst="rect">
+            <a:avLst/>
+          </a:prstGeom>
+          <a:noFill/>
+        </p:spPr>
+        <p:txBody>
+          <a:bodyPr wrap="square" lIns="0" tIns="0" rIns="0" bIns="0" anchor="ctr">
+            <a:spAutoFit/>
+          </a:bodyPr>
+          <a:lstStyle/>
+          <a:p>
+            <a:pPr>
+              <a:defRPr sz="1300" b="1">
+                <a:solidFill>
+                  <a:srgbClr val="172C46"/>
+                </a:solidFill>
+                <a:latin typeface="Arial"/>
+              </a:defRPr>
+            </a:pPr>
+            <a:r>
+              <a:t>Supervisor, not CPU</a:t>
+            </a:r>
+          </a:p>
+        </p:txBody>
+      </p:sp>
+      <p:sp>
+        <p:nvSpPr>
+          <p:cNvPr id="20" name="TextBox 19"/>
+          <p:cNvSpPr txBox="1"/>
+          <p:nvPr/>
+        </p:nvSpPr>
+        <p:spPr>
+          <a:xfrm>
+            <a:off x="996695" y="4828032"/>
+            <a:ext cx="2880360" cy="411480"/>
+          </a:xfrm>
+          <a:prstGeom prst="rect">
+            <a:avLst/>
+          </a:prstGeom>
+          <a:noFill/>
+        </p:spPr>
+        <p:txBody>
+          <a:bodyPr wrap="square" lIns="0" tIns="0" rIns="0" bIns="0" anchor="ctr">
+            <a:spAutoFit/>
+          </a:bodyPr>
+          <a:lstStyle/>
+          <a:p>
+            <a:pPr>
+              <a:defRPr sz="1150" b="0">
+                <a:solidFill>
+                  <a:srgbClr val="24364B"/>
+                </a:solidFill>
+                <a:latin typeface="Arial"/>
+              </a:defRPr>
+            </a:pPr>
+            <a:r>
+              <a:t>Does not emulate the Z80 or drive A0-A15 / SRAM writes.</a:t>
+            </a:r>
+          </a:p>
+        </p:txBody>
+      </p:sp>
+      <p:sp>
+        <p:nvSpPr>
+          <p:cNvPr id="21" name="Rectangle 20"/>
+          <p:cNvSpPr/>
+          <p:nvPr/>
+        </p:nvSpPr>
+        <p:spPr>
+          <a:xfrm>
+            <a:off x="4261104" y="2176272"/>
+            <a:ext cx="3648456" cy="3054096"/>
+          </a:xfrm>
+          <a:prstGeom prst="rect">
+            <a:avLst/>
+          </a:prstGeom>
+          <a:solidFill>
+            <a:srgbClr val="F0E9FA"/>
+          </a:solidFill>
+          <a:ln>
+            <a:noFill/>
+          </a:ln>
+        </p:spPr>
+        <p:style>
+          <a:lnRef idx="1">
+            <a:schemeClr val="accent1"/>
+          </a:lnRef>
+          <a:fillRef idx="3">
+            <a:schemeClr val="accent1"/>
+          </a:fillRef>
+          <a:effectRef idx="2">
+            <a:schemeClr val="accent1"/>
+          </a:effectRef>
+          <a:fontRef idx="minor">
+            <a:schemeClr val="lt1"/>
+          </a:fontRef>
+        </p:style>
+        <p:txBody>
+          <a:bodyPr rtlCol="0" anchor="ctr"/>
+          <a:lstStyle/>
+          <a:p>
+            <a:pPr algn="ctr"/>
+            <a:endParaRPr/>
+          </a:p>
+        </p:txBody>
+      </p:sp>
+      <p:sp>
+        <p:nvSpPr>
+          <p:cNvPr id="22" name="TextBox 21"/>
+          <p:cNvSpPr txBox="1"/>
+          <p:nvPr/>
+        </p:nvSpPr>
+        <p:spPr>
+          <a:xfrm>
+            <a:off x="4471416" y="2322576"/>
+            <a:ext cx="3227832" cy="201168"/>
+          </a:xfrm>
+          <a:prstGeom prst="rect">
+            <a:avLst/>
+          </a:prstGeom>
+          <a:noFill/>
+        </p:spPr>
+        <p:txBody>
+          <a:bodyPr wrap="square" lIns="0" tIns="0" rIns="0" bIns="0" anchor="ctr">
+            <a:spAutoFit/>
+          </a:bodyPr>
+          <a:lstStyle/>
+          <a:p>
+            <a:pPr>
+              <a:defRPr sz="1000" b="1">
+                <a:solidFill>
+                  <a:srgbClr val="536273"/>
+                </a:solidFill>
+                <a:latin typeface="Arial"/>
+              </a:defRPr>
+            </a:pPr>
+            <a:r>
+              <a:t>U1  /  PROCESSOR</a:t>
+            </a:r>
+          </a:p>
+        </p:txBody>
+      </p:sp>
+      <p:sp>
+        <p:nvSpPr>
+          <p:cNvPr id="23" name="TextBox 22"/>
+          <p:cNvSpPr txBox="1"/>
+          <p:nvPr/>
+        </p:nvSpPr>
+        <p:spPr>
+          <a:xfrm>
+            <a:off x="4471416" y="2569464"/>
+            <a:ext cx="3227832" cy="365760"/>
+          </a:xfrm>
+          <a:prstGeom prst="rect">
+            <a:avLst/>
+          </a:prstGeom>
+          <a:noFill/>
+        </p:spPr>
+        <p:txBody>
+          <a:bodyPr wrap="square" lIns="0" tIns="0" rIns="0" bIns="0" anchor="ctr">
+            <a:spAutoFit/>
+          </a:bodyPr>
+          <a:lstStyle/>
+          <a:p>
+            <a:pPr>
+              <a:defRPr sz="2000" b="1">
+                <a:solidFill>
+                  <a:srgbClr val="172C46"/>
+                </a:solidFill>
+                <a:latin typeface="Arial"/>
+              </a:defRPr>
+            </a:pPr>
+            <a:r>
+              <a:t>Z80 CPU</a:t>
+            </a:r>
+          </a:p>
+        </p:txBody>
+      </p:sp>
+      <p:sp>
+        <p:nvSpPr>
+          <p:cNvPr id="24" name="TextBox 23"/>
+          <p:cNvSpPr txBox="1"/>
+          <p:nvPr/>
+        </p:nvSpPr>
+        <p:spPr>
+          <a:xfrm>
+            <a:off x="4471416" y="2944368"/>
+            <a:ext cx="3227832" cy="246888"/>
+          </a:xfrm>
+          <a:prstGeom prst="rect">
+            <a:avLst/>
+          </a:prstGeom>
+          <a:noFill/>
+        </p:spPr>
+        <p:txBody>
+          <a:bodyPr wrap="square" lIns="0" tIns="0" rIns="0" bIns="0" anchor="ctr">
+            <a:spAutoFit/>
+          </a:bodyPr>
+          <a:lstStyle/>
+          <a:p>
+            <a:pPr>
+              <a:defRPr sz="1200" b="0">
+                <a:solidFill>
+                  <a:srgbClr val="536273"/>
+                </a:solidFill>
+                <a:latin typeface="Arial"/>
+              </a:defRPr>
+            </a:pPr>
+            <a:r>
+              <a:t>Z84C0020PEC</a:t>
+            </a:r>
+          </a:p>
+        </p:txBody>
+      </p:sp>
+      <p:sp>
+        <p:nvSpPr>
+          <p:cNvPr id="25" name="TextBox 24"/>
+          <p:cNvSpPr txBox="1"/>
+          <p:nvPr/>
+        </p:nvSpPr>
+        <p:spPr>
+          <a:xfrm>
+            <a:off x="4471416" y="3310127"/>
+            <a:ext cx="320040" cy="182880"/>
+          </a:xfrm>
+          <a:prstGeom prst="rect">
+            <a:avLst/>
+          </a:prstGeom>
+          <a:noFill/>
+        </p:spPr>
+        <p:txBody>
+          <a:bodyPr wrap="square" lIns="0" tIns="0" rIns="0" bIns="0" anchor="ctr">
+            <a:spAutoFit/>
+          </a:bodyPr>
+          <a:lstStyle/>
+          <a:p>
+            <a:pPr>
+              <a:defRPr sz="1000" b="1">
+                <a:solidFill>
+                  <a:srgbClr val="172C46"/>
+                </a:solidFill>
+                <a:latin typeface="Arial"/>
+              </a:defRPr>
+            </a:pPr>
+            <a:r>
+              <a:t>01</a:t>
+            </a:r>
+          </a:p>
+        </p:txBody>
+      </p:sp>
+      <p:sp>
+        <p:nvSpPr>
+          <p:cNvPr id="26" name="TextBox 25"/>
+          <p:cNvSpPr txBox="1"/>
+          <p:nvPr/>
+        </p:nvSpPr>
+        <p:spPr>
+          <a:xfrm>
+            <a:off x="4818888" y="3300984"/>
+            <a:ext cx="2880360" cy="210312"/>
+          </a:xfrm>
+          <a:prstGeom prst="rect">
+            <a:avLst/>
+          </a:prstGeom>
+          <a:noFill/>
+        </p:spPr>
+        <p:txBody>
+          <a:bodyPr wrap="square" lIns="0" tIns="0" rIns="0" bIns="0" anchor="ctr">
+            <a:spAutoFit/>
+          </a:bodyPr>
+          <a:lstStyle/>
+          <a:p>
+            <a:pPr>
+              <a:defRPr sz="1300" b="1">
+                <a:solidFill>
+                  <a:srgbClr val="172C46"/>
+                </a:solidFill>
+                <a:latin typeface="Arial"/>
+              </a:defRPr>
+            </a:pPr>
+            <a:r>
+              <a:t>Executes the software</a:t>
+            </a:r>
+          </a:p>
+        </p:txBody>
+      </p:sp>
+      <p:sp>
+        <p:nvSpPr>
+          <p:cNvPr id="27" name="TextBox 26"/>
+          <p:cNvSpPr txBox="1"/>
+          <p:nvPr/>
+        </p:nvSpPr>
+        <p:spPr>
+          <a:xfrm>
+            <a:off x="4818888" y="3511296"/>
+            <a:ext cx="2880360" cy="411480"/>
+          </a:xfrm>
+          <a:prstGeom prst="rect">
+            <a:avLst/>
+          </a:prstGeom>
+          <a:noFill/>
+        </p:spPr>
+        <p:txBody>
+          <a:bodyPr wrap="square" lIns="0" tIns="0" rIns="0" bIns="0" anchor="ctr">
+            <a:spAutoFit/>
+          </a:bodyPr>
+          <a:lstStyle/>
+          <a:p>
+            <a:pPr>
+              <a:defRPr sz="1150" b="0">
+                <a:solidFill>
+                  <a:srgbClr val="24364B"/>
+                </a:solidFill>
+                <a:latin typeface="Arial"/>
+              </a:defRPr>
+            </a:pPr>
+            <a:r>
+              <a:t>Runs Z80 instructions, BIOS, CP/M and applications directly from SRAM.</a:t>
+            </a:r>
+          </a:p>
+        </p:txBody>
+      </p:sp>
+      <p:sp>
+        <p:nvSpPr>
+          <p:cNvPr id="28" name="TextBox 27"/>
+          <p:cNvSpPr txBox="1"/>
+          <p:nvPr/>
+        </p:nvSpPr>
+        <p:spPr>
+          <a:xfrm>
+            <a:off x="4471416" y="3968496"/>
+            <a:ext cx="320040" cy="182880"/>
+          </a:xfrm>
+          <a:prstGeom prst="rect">
+            <a:avLst/>
+          </a:prstGeom>
+          <a:noFill/>
+        </p:spPr>
+        <p:txBody>
+          <a:bodyPr wrap="square" lIns="0" tIns="0" rIns="0" bIns="0" anchor="ctr">
+            <a:spAutoFit/>
+          </a:bodyPr>
+          <a:lstStyle/>
+          <a:p>
+            <a:pPr>
+              <a:defRPr sz="1000" b="1">
+                <a:solidFill>
+                  <a:srgbClr val="172C46"/>
+                </a:solidFill>
+                <a:latin typeface="Arial"/>
+              </a:defRPr>
+            </a:pPr>
+            <a:r>
+              <a:t>02</a:t>
+            </a:r>
+          </a:p>
+        </p:txBody>
+      </p:sp>
+      <p:sp>
+        <p:nvSpPr>
+          <p:cNvPr id="29" name="TextBox 28"/>
+          <p:cNvSpPr txBox="1"/>
+          <p:nvPr/>
+        </p:nvSpPr>
+        <p:spPr>
+          <a:xfrm>
+            <a:off x="4818888" y="3959352"/>
+            <a:ext cx="2880360" cy="210312"/>
+          </a:xfrm>
+          <a:prstGeom prst="rect">
+            <a:avLst/>
+          </a:prstGeom>
+          <a:noFill/>
+        </p:spPr>
+        <p:txBody>
+          <a:bodyPr wrap="square" lIns="0" tIns="0" rIns="0" bIns="0" anchor="ctr">
+            <a:spAutoFit/>
+          </a:bodyPr>
+          <a:lstStyle/>
+          <a:p>
+            <a:pPr>
+              <a:defRPr sz="1300" b="1">
+                <a:solidFill>
+                  <a:srgbClr val="172C46"/>
+                </a:solidFill>
+                <a:latin typeface="Arial"/>
+              </a:defRPr>
+            </a:pPr>
+            <a:r>
+              <a:t>Owns memory addressing</a:t>
+            </a:r>
+          </a:p>
+        </p:txBody>
+      </p:sp>
+      <p:sp>
+        <p:nvSpPr>
+          <p:cNvPr id="30" name="TextBox 29"/>
+          <p:cNvSpPr txBox="1"/>
+          <p:nvPr/>
+        </p:nvSpPr>
+        <p:spPr>
+          <a:xfrm>
+            <a:off x="4818888" y="4169664"/>
+            <a:ext cx="2880360" cy="411480"/>
+          </a:xfrm>
+          <a:prstGeom prst="rect">
+            <a:avLst/>
+          </a:prstGeom>
+          <a:noFill/>
+        </p:spPr>
+        <p:txBody>
+          <a:bodyPr wrap="square" lIns="0" tIns="0" rIns="0" bIns="0" anchor="ctr">
+            <a:spAutoFit/>
+          </a:bodyPr>
+          <a:lstStyle/>
+          <a:p>
+            <a:pPr>
+              <a:defRPr sz="1150" b="0">
+                <a:solidFill>
+                  <a:srgbClr val="24364B"/>
+                </a:solidFill>
+                <a:latin typeface="Arial"/>
+              </a:defRPr>
+            </a:pPr>
+            <a:r>
+              <a:t>Alone drives A0-A15 and performs the actual SRAM read/write cycles.</a:t>
+            </a:r>
+          </a:p>
+        </p:txBody>
+      </p:sp>
+      <p:sp>
+        <p:nvSpPr>
+          <p:cNvPr id="31" name="TextBox 30"/>
+          <p:cNvSpPr txBox="1"/>
+          <p:nvPr/>
+        </p:nvSpPr>
+        <p:spPr>
+          <a:xfrm>
+            <a:off x="4471416" y="4626864"/>
+            <a:ext cx="320040" cy="182880"/>
+          </a:xfrm>
+          <a:prstGeom prst="rect">
+            <a:avLst/>
+          </a:prstGeom>
+          <a:noFill/>
+        </p:spPr>
+        <p:txBody>
+          <a:bodyPr wrap="square" lIns="0" tIns="0" rIns="0" bIns="0" anchor="ctr">
+            <a:spAutoFit/>
+          </a:bodyPr>
+          <a:lstStyle/>
+          <a:p>
+            <a:pPr>
+              <a:defRPr sz="1000" b="1">
+                <a:solidFill>
+                  <a:srgbClr val="172C46"/>
+                </a:solidFill>
+                <a:latin typeface="Arial"/>
+              </a:defRPr>
+            </a:pPr>
+            <a:r>
+              <a:t>03</a:t>
+            </a:r>
+          </a:p>
+        </p:txBody>
+      </p:sp>
+      <p:sp>
+        <p:nvSpPr>
+          <p:cNvPr id="32" name="TextBox 31"/>
+          <p:cNvSpPr txBox="1"/>
+          <p:nvPr/>
+        </p:nvSpPr>
+        <p:spPr>
+          <a:xfrm>
+            <a:off x="4818888" y="4617720"/>
+            <a:ext cx="2880360" cy="210312"/>
+          </a:xfrm>
+          <a:prstGeom prst="rect">
+            <a:avLst/>
+          </a:prstGeom>
+          <a:noFill/>
+        </p:spPr>
+        <p:txBody>
+          <a:bodyPr wrap="square" lIns="0" tIns="0" rIns="0" bIns="0" anchor="ctr">
+            <a:spAutoFit/>
+          </a:bodyPr>
+          <a:lstStyle/>
+          <a:p>
+            <a:pPr>
+              <a:defRPr sz="1300" b="1">
+                <a:solidFill>
+                  <a:srgbClr val="172C46"/>
+                </a:solidFill>
+                <a:latin typeface="Arial"/>
+              </a:defRPr>
+            </a:pPr>
+            <a:r>
+              <a:t>Loads itself by running</a:t>
+            </a:r>
+          </a:p>
+        </p:txBody>
+      </p:sp>
+      <p:sp>
+        <p:nvSpPr>
+          <p:cNvPr id="33" name="TextBox 32"/>
+          <p:cNvSpPr txBox="1"/>
+          <p:nvPr/>
+        </p:nvSpPr>
+        <p:spPr>
+          <a:xfrm>
+            <a:off x="4818888" y="4828032"/>
+            <a:ext cx="2880360" cy="411480"/>
+          </a:xfrm>
+          <a:prstGeom prst="rect">
+            <a:avLst/>
+          </a:prstGeom>
+          <a:noFill/>
+        </p:spPr>
+        <p:txBody>
+          <a:bodyPr wrap="square" lIns="0" tIns="0" rIns="0" bIns="0" anchor="ctr">
+            <a:spAutoFit/>
+          </a:bodyPr>
+          <a:lstStyle/>
+          <a:p>
+            <a:pPr>
+              <a:defRPr sz="1150" b="0">
+                <a:solidFill>
+                  <a:srgbClr val="24364B"/>
+                </a:solidFill>
+                <a:latin typeface="Arial"/>
+              </a:defRPr>
+            </a:pPr>
+            <a:r>
+              <a:t>Executes Pico-injected loader instructions, then starts from address zero.</a:t>
+            </a:r>
+          </a:p>
+        </p:txBody>
+      </p:sp>
+      <p:sp>
+        <p:nvSpPr>
+          <p:cNvPr id="34" name="Rectangle 33"/>
+          <p:cNvSpPr/>
+          <p:nvPr/>
+        </p:nvSpPr>
+        <p:spPr>
+          <a:xfrm>
+            <a:off x="8083296" y="2176272"/>
+            <a:ext cx="3648456" cy="3054096"/>
+          </a:xfrm>
+          <a:prstGeom prst="rect">
+            <a:avLst/>
+          </a:prstGeom>
+          <a:solidFill>
+            <a:srgbClr val="E8F0FF"/>
+          </a:solidFill>
+          <a:ln>
+            <a:noFill/>
+          </a:ln>
+        </p:spPr>
+        <p:style>
+          <a:lnRef idx="1">
+            <a:schemeClr val="accent1"/>
+          </a:lnRef>
+          <a:fillRef idx="3">
+            <a:schemeClr val="accent1"/>
+          </a:fillRef>
+          <a:effectRef idx="2">
+            <a:schemeClr val="accent1"/>
+          </a:effectRef>
+          <a:fontRef idx="minor">
+            <a:schemeClr val="lt1"/>
+          </a:fontRef>
+        </p:style>
+        <p:txBody>
+          <a:bodyPr rtlCol="0" anchor="ctr"/>
+          <a:lstStyle/>
+          <a:p>
+            <a:pPr algn="ctr"/>
+            <a:endParaRPr/>
+          </a:p>
+        </p:txBody>
+      </p:sp>
+      <p:sp>
+        <p:nvSpPr>
+          <p:cNvPr id="35" name="TextBox 34"/>
+          <p:cNvSpPr txBox="1"/>
+          <p:nvPr/>
+        </p:nvSpPr>
+        <p:spPr>
+          <a:xfrm>
+            <a:off x="8293608" y="2322576"/>
+            <a:ext cx="3227832" cy="201168"/>
+          </a:xfrm>
+          <a:prstGeom prst="rect">
+            <a:avLst/>
+          </a:prstGeom>
+          <a:noFill/>
+        </p:spPr>
+        <p:txBody>
+          <a:bodyPr wrap="square" lIns="0" tIns="0" rIns="0" bIns="0" anchor="ctr">
+            <a:spAutoFit/>
+          </a:bodyPr>
+          <a:lstStyle/>
+          <a:p>
+            <a:pPr>
+              <a:defRPr sz="1000" b="1">
+                <a:solidFill>
+                  <a:srgbClr val="536273"/>
+                </a:solidFill>
+                <a:latin typeface="Arial"/>
+              </a:defRPr>
+            </a:pPr>
+            <a:r>
+              <a:t>U2  /  WORKING MEMORY</a:t>
+            </a:r>
+          </a:p>
+        </p:txBody>
+      </p:sp>
+      <p:sp>
+        <p:nvSpPr>
+          <p:cNvPr id="36" name="TextBox 35"/>
+          <p:cNvSpPr txBox="1"/>
+          <p:nvPr/>
+        </p:nvSpPr>
+        <p:spPr>
+          <a:xfrm>
+            <a:off x="8293608" y="2569464"/>
+            <a:ext cx="3227832" cy="365760"/>
+          </a:xfrm>
+          <a:prstGeom prst="rect">
+            <a:avLst/>
+          </a:prstGeom>
+          <a:noFill/>
+        </p:spPr>
+        <p:txBody>
+          <a:bodyPr wrap="square" lIns="0" tIns="0" rIns="0" bIns="0" anchor="ctr">
+            <a:spAutoFit/>
+          </a:bodyPr>
+          <a:lstStyle/>
+          <a:p>
+            <a:pPr>
+              <a:defRPr sz="2000" b="1">
+                <a:solidFill>
+                  <a:srgbClr val="172C46"/>
+                </a:solidFill>
+                <a:latin typeface="Arial"/>
+              </a:defRPr>
+            </a:pPr>
+            <a:r>
+              <a:t>Static RAM</a:t>
+            </a:r>
+          </a:p>
+        </p:txBody>
+      </p:sp>
+      <p:sp>
+        <p:nvSpPr>
+          <p:cNvPr id="37" name="TextBox 36"/>
+          <p:cNvSpPr txBox="1"/>
+          <p:nvPr/>
+        </p:nvSpPr>
+        <p:spPr>
+          <a:xfrm>
+            <a:off x="8293608" y="2944368"/>
+            <a:ext cx="3227832" cy="246888"/>
+          </a:xfrm>
+          <a:prstGeom prst="rect">
+            <a:avLst/>
+          </a:prstGeom>
+          <a:noFill/>
+        </p:spPr>
+        <p:txBody>
+          <a:bodyPr wrap="square" lIns="0" tIns="0" rIns="0" bIns="0" anchor="ctr">
+            <a:spAutoFit/>
+          </a:bodyPr>
+          <a:lstStyle/>
+          <a:p>
+            <a:pPr>
+              <a:defRPr sz="1200" b="0">
+                <a:solidFill>
+                  <a:srgbClr val="536273"/>
+                </a:solidFill>
+                <a:latin typeface="Arial"/>
+              </a:defRPr>
+            </a:pPr>
+            <a:r>
+              <a:t>AS6C1008-55PCN</a:t>
+            </a:r>
+          </a:p>
+        </p:txBody>
+      </p:sp>
+      <p:sp>
+        <p:nvSpPr>
+          <p:cNvPr id="38" name="TextBox 37"/>
+          <p:cNvSpPr txBox="1"/>
+          <p:nvPr/>
+        </p:nvSpPr>
+        <p:spPr>
+          <a:xfrm>
+            <a:off x="8293608" y="3310127"/>
+            <a:ext cx="320040" cy="182880"/>
+          </a:xfrm>
+          <a:prstGeom prst="rect">
+            <a:avLst/>
+          </a:prstGeom>
+          <a:noFill/>
+        </p:spPr>
+        <p:txBody>
+          <a:bodyPr wrap="square" lIns="0" tIns="0" rIns="0" bIns="0" anchor="ctr">
+            <a:spAutoFit/>
+          </a:bodyPr>
+          <a:lstStyle/>
+          <a:p>
+            <a:pPr>
+              <a:defRPr sz="1000" b="1">
+                <a:solidFill>
+                  <a:srgbClr val="172C46"/>
+                </a:solidFill>
+                <a:latin typeface="Arial"/>
+              </a:defRPr>
+            </a:pPr>
+            <a:r>
+              <a:t>01</a:t>
+            </a:r>
+          </a:p>
+        </p:txBody>
+      </p:sp>
+      <p:sp>
+        <p:nvSpPr>
+          <p:cNvPr id="39" name="TextBox 38"/>
+          <p:cNvSpPr txBox="1"/>
+          <p:nvPr/>
+        </p:nvSpPr>
+        <p:spPr>
+          <a:xfrm>
+            <a:off x="8641080" y="3300984"/>
+            <a:ext cx="2880360" cy="210312"/>
+          </a:xfrm>
+          <a:prstGeom prst="rect">
+            <a:avLst/>
+          </a:prstGeom>
+          <a:noFill/>
+        </p:spPr>
+        <p:txBody>
+          <a:bodyPr wrap="square" lIns="0" tIns="0" rIns="0" bIns="0" anchor="ctr">
+            <a:spAutoFit/>
+          </a:bodyPr>
+          <a:lstStyle/>
+          <a:p>
+            <a:pPr>
+              <a:defRPr sz="1300" b="1">
+                <a:solidFill>
+                  <a:srgbClr val="172C46"/>
+                </a:solidFill>
+                <a:latin typeface="Arial"/>
+              </a:defRPr>
+            </a:pPr>
+            <a:r>
+              <a:t>1 Mbit storage</a:t>
+            </a:r>
+          </a:p>
+        </p:txBody>
+      </p:sp>
+      <p:sp>
+        <p:nvSpPr>
+          <p:cNvPr id="40" name="TextBox 39"/>
+          <p:cNvSpPr txBox="1"/>
+          <p:nvPr/>
+        </p:nvSpPr>
+        <p:spPr>
+          <a:xfrm>
+            <a:off x="8641080" y="3511296"/>
+            <a:ext cx="2880360" cy="411480"/>
+          </a:xfrm>
+          <a:prstGeom prst="rect">
+            <a:avLst/>
+          </a:prstGeom>
+          <a:noFill/>
+        </p:spPr>
+        <p:txBody>
+          <a:bodyPr wrap="square" lIns="0" tIns="0" rIns="0" bIns="0" anchor="ctr">
+            <a:spAutoFit/>
+          </a:bodyPr>
+          <a:lstStyle/>
+          <a:p>
+            <a:pPr>
+              <a:defRPr sz="1150" b="0">
+                <a:solidFill>
+                  <a:srgbClr val="24364B"/>
+                </a:solidFill>
+                <a:latin typeface="Arial"/>
+              </a:defRPr>
+            </a:pPr>
+            <a:r>
+              <a:t>128 KiB x 8 static RAM; retains data while powered.</a:t>
+            </a:r>
+          </a:p>
+        </p:txBody>
+      </p:sp>
+      <p:sp>
+        <p:nvSpPr>
+          <p:cNvPr id="41" name="TextBox 40"/>
+          <p:cNvSpPr txBox="1"/>
+          <p:nvPr/>
+        </p:nvSpPr>
+        <p:spPr>
+          <a:xfrm>
+            <a:off x="8293608" y="3968496"/>
+            <a:ext cx="320040" cy="182880"/>
+          </a:xfrm>
+          <a:prstGeom prst="rect">
+            <a:avLst/>
+          </a:prstGeom>
+          <a:noFill/>
+        </p:spPr>
+        <p:txBody>
+          <a:bodyPr wrap="square" lIns="0" tIns="0" rIns="0" bIns="0" anchor="ctr">
+            <a:spAutoFit/>
+          </a:bodyPr>
+          <a:lstStyle/>
+          <a:p>
+            <a:pPr>
+              <a:defRPr sz="1000" b="1">
+                <a:solidFill>
+                  <a:srgbClr val="172C46"/>
+                </a:solidFill>
+                <a:latin typeface="Arial"/>
+              </a:defRPr>
+            </a:pPr>
+            <a:r>
+              <a:t>02</a:t>
+            </a:r>
+          </a:p>
+        </p:txBody>
+      </p:sp>
+      <p:sp>
+        <p:nvSpPr>
+          <p:cNvPr id="42" name="TextBox 41"/>
+          <p:cNvSpPr txBox="1"/>
+          <p:nvPr/>
+        </p:nvSpPr>
+        <p:spPr>
+          <a:xfrm>
+            <a:off x="8641080" y="3959352"/>
+            <a:ext cx="2880360" cy="210312"/>
+          </a:xfrm>
+          <a:prstGeom prst="rect">
+            <a:avLst/>
+          </a:prstGeom>
+          <a:noFill/>
+        </p:spPr>
+        <p:txBody>
+          <a:bodyPr wrap="square" lIns="0" tIns="0" rIns="0" bIns="0" anchor="ctr">
+            <a:spAutoFit/>
+          </a:bodyPr>
+          <a:lstStyle/>
+          <a:p>
+            <a:pPr>
+              <a:defRPr sz="1300" b="1">
+                <a:solidFill>
+                  <a:srgbClr val="172C46"/>
+                </a:solidFill>
+                <a:latin typeface="Arial"/>
+              </a:defRPr>
+            </a:pPr>
+            <a:r>
+              <a:t>64 KiB address space</a:t>
+            </a:r>
+          </a:p>
+        </p:txBody>
+      </p:sp>
+      <p:sp>
+        <p:nvSpPr>
+          <p:cNvPr id="43" name="TextBox 42"/>
+          <p:cNvSpPr txBox="1"/>
+          <p:nvPr/>
+        </p:nvSpPr>
+        <p:spPr>
+          <a:xfrm>
+            <a:off x="8641080" y="4169664"/>
+            <a:ext cx="2880360" cy="411480"/>
+          </a:xfrm>
+          <a:prstGeom prst="rect">
+            <a:avLst/>
+          </a:prstGeom>
+          <a:noFill/>
+        </p:spPr>
+        <p:txBody>
+          <a:bodyPr wrap="square" lIns="0" tIns="0" rIns="0" bIns="0" anchor="ctr">
+            <a:spAutoFit/>
+          </a:bodyPr>
+          <a:lstStyle/>
+          <a:p>
+            <a:pPr>
+              <a:defRPr sz="1150" b="0">
+                <a:solidFill>
+                  <a:srgbClr val="24364B"/>
+                </a:solidFill>
+                <a:latin typeface="Arial"/>
+              </a:defRPr>
+            </a:pPr>
+            <a:r>
+              <a:t>A16 is tied LOW, so only the lower 64 KiB is used.</a:t>
+            </a:r>
+          </a:p>
+        </p:txBody>
+      </p:sp>
+      <p:sp>
+        <p:nvSpPr>
+          <p:cNvPr id="44" name="TextBox 43"/>
+          <p:cNvSpPr txBox="1"/>
+          <p:nvPr/>
+        </p:nvSpPr>
+        <p:spPr>
+          <a:xfrm>
+            <a:off x="8293608" y="4626864"/>
+            <a:ext cx="320040" cy="182880"/>
+          </a:xfrm>
+          <a:prstGeom prst="rect">
+            <a:avLst/>
+          </a:prstGeom>
+          <a:noFill/>
+        </p:spPr>
+        <p:txBody>
+          <a:bodyPr wrap="square" lIns="0" tIns="0" rIns="0" bIns="0" anchor="ctr">
+            <a:spAutoFit/>
+          </a:bodyPr>
+          <a:lstStyle/>
+          <a:p>
+            <a:pPr>
+              <a:defRPr sz="1000" b="1">
+                <a:solidFill>
+                  <a:srgbClr val="172C46"/>
+                </a:solidFill>
+                <a:latin typeface="Arial"/>
+              </a:defRPr>
+            </a:pPr>
+            <a:r>
+              <a:t>03</a:t>
+            </a:r>
+          </a:p>
+        </p:txBody>
+      </p:sp>
+      <p:sp>
+        <p:nvSpPr>
+          <p:cNvPr id="45" name="TextBox 44"/>
+          <p:cNvSpPr txBox="1"/>
+          <p:nvPr/>
+        </p:nvSpPr>
+        <p:spPr>
+          <a:xfrm>
+            <a:off x="8641080" y="4617720"/>
+            <a:ext cx="2880360" cy="210312"/>
+          </a:xfrm>
+          <a:prstGeom prst="rect">
+            <a:avLst/>
+          </a:prstGeom>
+          <a:noFill/>
+        </p:spPr>
+        <p:txBody>
+          <a:bodyPr wrap="square" lIns="0" tIns="0" rIns="0" bIns="0" anchor="ctr">
+            <a:spAutoFit/>
+          </a:bodyPr>
+          <a:lstStyle/>
+          <a:p>
+            <a:pPr>
+              <a:defRPr sz="1300" b="1">
+                <a:solidFill>
+                  <a:srgbClr val="172C46"/>
+                </a:solidFill>
+                <a:latin typeface="Arial"/>
+              </a:defRPr>
+            </a:pPr>
+            <a:r>
+              <a:t>Program memory</a:t>
+            </a:r>
+          </a:p>
+        </p:txBody>
+      </p:sp>
+      <p:sp>
+        <p:nvSpPr>
+          <p:cNvPr id="46" name="TextBox 45"/>
+          <p:cNvSpPr txBox="1"/>
+          <p:nvPr/>
+        </p:nvSpPr>
+        <p:spPr>
+          <a:xfrm>
+            <a:off x="8641080" y="4828032"/>
+            <a:ext cx="2880360" cy="411480"/>
+          </a:xfrm>
+          <a:prstGeom prst="rect">
+            <a:avLst/>
+          </a:prstGeom>
+          <a:noFill/>
+        </p:spPr>
+        <p:txBody>
+          <a:bodyPr wrap="square" lIns="0" tIns="0" rIns="0" bIns="0" anchor="ctr">
+            <a:spAutoFit/>
+          </a:bodyPr>
+          <a:lstStyle/>
+          <a:p>
+            <a:pPr>
+              <a:defRPr sz="1150" b="0">
+                <a:solidFill>
+                  <a:srgbClr val="24364B"/>
+                </a:solidFill>
+                <a:latin typeface="Arial"/>
+              </a:defRPr>
+            </a:pPr>
+            <a:r>
+              <a:t>Holds the running code, CP/M and working data; no ROM is fitted.</a:t>
+            </a:r>
+          </a:p>
+        </p:txBody>
+      </p:sp>
+      <p:sp>
+        <p:nvSpPr>
+          <p:cNvPr id="47" name="Rectangle 46"/>
+          <p:cNvSpPr/>
+          <p:nvPr/>
+        </p:nvSpPr>
+        <p:spPr>
+          <a:xfrm>
+            <a:off x="438912" y="5431536"/>
+            <a:ext cx="11292840" cy="685800"/>
+          </a:xfrm>
+          <a:prstGeom prst="rect">
+            <a:avLst/>
+          </a:prstGeom>
+          <a:solidFill>
+            <a:srgbClr val="FFF0DB"/>
+          </a:solidFill>
+          <a:ln>
+            <a:noFill/>
+          </a:ln>
+        </p:spPr>
+        <p:style>
+          <a:lnRef idx="1">
+            <a:schemeClr val="accent1"/>
+          </a:lnRef>
+          <a:fillRef idx="3">
+            <a:schemeClr val="accent1"/>
+          </a:fillRef>
+          <a:effectRef idx="2">
+            <a:schemeClr val="accent1"/>
+          </a:effectRef>
+          <a:fontRef idx="minor">
+            <a:schemeClr val="lt1"/>
+          </a:fontRef>
+        </p:style>
+        <p:txBody>
+          <a:bodyPr rtlCol="0" anchor="ctr"/>
+          <a:lstStyle/>
+          <a:p>
+            <a:pPr algn="ctr"/>
+            <a:endParaRPr/>
+          </a:p>
+        </p:txBody>
+      </p:sp>
+      <p:sp>
+        <p:nvSpPr>
+          <p:cNvPr id="48" name="TextBox 47"/>
+          <p:cNvSpPr txBox="1"/>
+          <p:nvPr/>
+        </p:nvSpPr>
+        <p:spPr>
+          <a:xfrm>
+            <a:off x="685800" y="5559552"/>
+            <a:ext cx="10789920" cy="393192"/>
+          </a:xfrm>
+          <a:prstGeom prst="rect">
+            <a:avLst/>
+          </a:prstGeom>
+          <a:noFill/>
+        </p:spPr>
+        <p:txBody>
+          <a:bodyPr wrap="square" lIns="0" tIns="0" rIns="0" bIns="0" anchor="ctr">
+            <a:spAutoFit/>
+          </a:bodyPr>
+          <a:lstStyle/>
+          <a:p>
+            <a:pPr>
+              <a:defRPr sz="1400" b="1">
+                <a:solidFill>
+                  <a:srgbClr val="172C46"/>
+                </a:solidFill>
+                <a:latin typeface="Arial"/>
+              </a:defRPr>
+            </a:pPr>
+            <a:r>
+              <a:t>At boot, the Pico supplies instructions; the Z80 itself writes and verifies its SRAM image.</a:t>
+            </a:r>
+          </a:p>
+        </p:txBody>
+      </p:sp>
+    </p:spTree>
+  </p:cSld>
+  <p:clrMapOvr>
+    <a:masterClrMapping/>
+  </p:clrMapOvr>
+</p:sld>
+</file>
+
+<file path=ppt/slides/slide8.xml><?xml version="1.0" encoding="utf-8"?>
+<p:sld xmlns:a="http://schemas.openxmlformats.org/drawingml/2006/main" xmlns:r="http://schemas.openxmlformats.org/officeDocument/2006/relationships" xmlns:p="http://schemas.openxmlformats.org/presentationml/2006/main">
+  <p:cSld>
+    <p:bg>
+      <p:bgPr>
+        <a:solidFill>
+          <a:srgbClr val="FFFFFF"/>
+        </a:solidFill>
+        <a:effectLst/>
+      </p:bgPr>
+    </p:bg>
+    <p:spTree>
+      <p:nvGrpSpPr>
+        <p:cNvPr id="1" name=""/>
+        <p:cNvGrpSpPr/>
+        <p:nvPr/>
+      </p:nvGrpSpPr>
+      <p:grpSpPr>
+        <a:xfrm>
+          <a:off x="0" y="0"/>
+          <a:ext cx="0" cy="0"/>
+          <a:chOff x="0" y="0"/>
+          <a:chExt cx="0" cy="0"/>
+        </a:xfrm>
+      </p:grpSpPr>
+      <p:sp>
+        <p:nvSpPr>
+          <p:cNvPr id="2" name="Rectangle 1"/>
+          <p:cNvSpPr/>
+          <p:nvPr/>
+        </p:nvSpPr>
+        <p:spPr>
+          <a:xfrm>
+            <a:off x="0" y="0"/>
+            <a:ext cx="12192000" cy="64008"/>
+          </a:xfrm>
+          <a:prstGeom prst="rect">
+            <a:avLst/>
+          </a:prstGeom>
+          <a:solidFill>
+            <a:srgbClr val="172C46"/>
+          </a:solidFill>
+          <a:ln>
+            <a:noFill/>
+          </a:ln>
+        </p:spPr>
+        <p:style>
+          <a:lnRef idx="1">
+            <a:schemeClr val="accent1"/>
+          </a:lnRef>
+          <a:fillRef idx="3">
+            <a:schemeClr val="accent1"/>
+          </a:fillRef>
+          <a:effectRef idx="2">
+            <a:schemeClr val="accent1"/>
+          </a:effectRef>
+          <a:fontRef idx="minor">
+            <a:schemeClr val="lt1"/>
+          </a:fontRef>
+        </p:style>
+        <p:txBody>
+          <a:bodyPr rtlCol="0" anchor="ctr"/>
+          <a:lstStyle/>
+          <a:p>
+            <a:pPr algn="ctr"/>
+            <a:endParaRPr/>
+          </a:p>
+        </p:txBody>
+      </p:sp>
+      <p:sp>
+        <p:nvSpPr>
+          <p:cNvPr id="3" name="TextBox 2"/>
+          <p:cNvSpPr txBox="1"/>
+          <p:nvPr/>
+        </p:nvSpPr>
+        <p:spPr>
+          <a:xfrm>
+            <a:off x="411480" y="228600"/>
+            <a:ext cx="10058400" cy="256032"/>
+          </a:xfrm>
+          <a:prstGeom prst="rect">
+            <a:avLst/>
+          </a:prstGeom>
+          <a:noFill/>
+        </p:spPr>
+        <p:txBody>
+          <a:bodyPr wrap="square" lIns="0" tIns="0" rIns="0" bIns="0" anchor="ctr">
+            <a:spAutoFit/>
+          </a:bodyPr>
+          <a:lstStyle/>
+          <a:p>
+            <a:pPr>
+              <a:defRPr sz="1100" b="1">
+                <a:solidFill>
+                  <a:srgbClr val="172C46"/>
+                </a:solidFill>
+                <a:latin typeface="Arial"/>
+              </a:defRPr>
+            </a:pPr>
+            <a:r>
+              <a:t>Z80 ROMLESS SBC  /  DESIGN OVERVIEW</a:t>
+            </a:r>
+          </a:p>
+        </p:txBody>
+      </p:sp>
+      <p:sp>
+        <p:nvSpPr>
+          <p:cNvPr id="4" name="TextBox 3"/>
+          <p:cNvSpPr txBox="1"/>
+          <p:nvPr/>
+        </p:nvSpPr>
+        <p:spPr>
+          <a:xfrm>
+            <a:off x="411480" y="713232"/>
+            <a:ext cx="11338560" cy="594360"/>
+          </a:xfrm>
+          <a:prstGeom prst="rect">
+            <a:avLst/>
+          </a:prstGeom>
+          <a:noFill/>
+        </p:spPr>
+        <p:txBody>
+          <a:bodyPr wrap="square" lIns="0" tIns="0" rIns="0" bIns="0" anchor="ctr">
+            <a:spAutoFit/>
+          </a:bodyPr>
+          <a:lstStyle/>
+          <a:p>
+            <a:pPr>
+              <a:defRPr sz="3100" b="1">
+                <a:solidFill>
+                  <a:srgbClr val="172C46"/>
+                </a:solidFill>
+                <a:latin typeface="Arial"/>
+              </a:defRPr>
+            </a:pPr>
+            <a:r>
+              <a:t>Fixed logic makes the bus behave</a:t>
+            </a:r>
+          </a:p>
+        </p:txBody>
+      </p:sp>
+      <p:sp>
+        <p:nvSpPr>
+          <p:cNvPr id="5" name="TextBox 4"/>
+          <p:cNvSpPr txBox="1"/>
+          <p:nvPr/>
+        </p:nvSpPr>
+        <p:spPr>
+          <a:xfrm>
+            <a:off x="438912" y="1362456"/>
+            <a:ext cx="11155680" cy="457200"/>
+          </a:xfrm>
+          <a:prstGeom prst="rect">
+            <a:avLst/>
+          </a:prstGeom>
+          <a:noFill/>
+        </p:spPr>
+        <p:txBody>
+          <a:bodyPr wrap="square" lIns="0" tIns="0" rIns="0" bIns="0" anchor="ctr">
+            <a:spAutoFit/>
+          </a:bodyPr>
+          <a:lstStyle/>
+          <a:p>
+            <a:pPr>
+              <a:defRPr sz="1700" b="0">
+                <a:solidFill>
+                  <a:srgbClr val="536273"/>
+                </a:solidFill>
+                <a:latin typeface="Arial"/>
+              </a:defRPr>
+            </a:pPr>
+            <a:r>
+              <a:t>Two simple 5 V logic ICs shape safe clock, memory and I/O control signals.</a:t>
+            </a:r>
+          </a:p>
+        </p:txBody>
+      </p:sp>
+      <p:sp>
+        <p:nvSpPr>
+          <p:cNvPr id="6" name="TextBox 5"/>
+          <p:cNvSpPr txBox="1"/>
+          <p:nvPr/>
+        </p:nvSpPr>
+        <p:spPr>
+          <a:xfrm>
+            <a:off x="411480" y="6510528"/>
+            <a:ext cx="10607040" cy="182880"/>
+          </a:xfrm>
+          <a:prstGeom prst="rect">
+            <a:avLst/>
+          </a:prstGeom>
+          <a:noFill/>
+        </p:spPr>
+        <p:txBody>
+          <a:bodyPr wrap="square" lIns="0" tIns="0" rIns="0" bIns="0" anchor="ctr">
+            <a:spAutoFit/>
+          </a:bodyPr>
+          <a:lstStyle/>
+          <a:p>
+            <a:pPr>
+              <a:defRPr sz="1000" b="0">
+                <a:solidFill>
+                  <a:srgbClr val="687385"/>
+                </a:solidFill>
+                <a:latin typeface="Arial"/>
+              </a:defRPr>
+            </a:pPr>
+            <a:r>
+              <a:t>Stage 10 implementation | Current breadboard architecture | 22 October 2026</a:t>
+            </a:r>
+          </a:p>
+        </p:txBody>
+      </p:sp>
+      <p:sp>
+        <p:nvSpPr>
+          <p:cNvPr id="7" name="TextBox 6"/>
+          <p:cNvSpPr txBox="1"/>
+          <p:nvPr/>
+        </p:nvSpPr>
+        <p:spPr>
+          <a:xfrm>
+            <a:off x="11292840" y="6473952"/>
+            <a:ext cx="457200" cy="274320"/>
+          </a:xfrm>
+          <a:prstGeom prst="rect">
+            <a:avLst/>
+          </a:prstGeom>
+          <a:noFill/>
+        </p:spPr>
+        <p:txBody>
+          <a:bodyPr wrap="square" lIns="0" tIns="0" rIns="0" bIns="0" anchor="ctr">
+            <a:spAutoFit/>
+          </a:bodyPr>
+          <a:lstStyle/>
+          <a:p>
+            <a:pPr>
+              <a:defRPr sz="1200" b="1">
+                <a:solidFill>
+                  <a:srgbClr val="172C46"/>
+                </a:solidFill>
+                <a:latin typeface="Arial"/>
+              </a:defRPr>
+            </a:pPr>
+            <a:r>
+              <a:t>08</a:t>
+            </a:r>
+          </a:p>
+        </p:txBody>
+      </p:sp>
+      <p:sp>
+        <p:nvSpPr>
+          <p:cNvPr id="8" name="Rectangle 7"/>
+          <p:cNvSpPr/>
+          <p:nvPr/>
+        </p:nvSpPr>
+        <p:spPr>
+          <a:xfrm>
+            <a:off x="438912" y="2176272"/>
+            <a:ext cx="5559552" cy="3054096"/>
+          </a:xfrm>
+          <a:prstGeom prst="rect">
+            <a:avLst/>
+          </a:prstGeom>
+          <a:solidFill>
+            <a:srgbClr val="F0E9FA"/>
+          </a:solidFill>
+          <a:ln>
+            <a:noFill/>
+          </a:ln>
+        </p:spPr>
+        <p:style>
+          <a:lnRef idx="1">
+            <a:schemeClr val="accent1"/>
+          </a:lnRef>
+          <a:fillRef idx="3">
+            <a:schemeClr val="accent1"/>
+          </a:fillRef>
+          <a:effectRef idx="2">
+            <a:schemeClr val="accent1"/>
+          </a:effectRef>
+          <a:fontRef idx="minor">
+            <a:schemeClr val="lt1"/>
+          </a:fontRef>
+        </p:style>
+        <p:txBody>
+          <a:bodyPr rtlCol="0" anchor="ctr"/>
+          <a:lstStyle/>
+          <a:p>
+            <a:pPr algn="ctr"/>
+            <a:endParaRPr/>
+          </a:p>
+        </p:txBody>
+      </p:sp>
+      <p:sp>
+        <p:nvSpPr>
+          <p:cNvPr id="9" name="TextBox 8"/>
+          <p:cNvSpPr txBox="1"/>
+          <p:nvPr/>
+        </p:nvSpPr>
+        <p:spPr>
+          <a:xfrm>
+            <a:off x="649224" y="2322576"/>
+            <a:ext cx="5138928" cy="201168"/>
+          </a:xfrm>
+          <a:prstGeom prst="rect">
+            <a:avLst/>
+          </a:prstGeom>
+          <a:noFill/>
+        </p:spPr>
+        <p:txBody>
+          <a:bodyPr wrap="square" lIns="0" tIns="0" rIns="0" bIns="0" anchor="ctr">
+            <a:spAutoFit/>
+          </a:bodyPr>
+          <a:lstStyle/>
+          <a:p>
+            <a:pPr>
+              <a:defRPr sz="1000" b="1">
+                <a:solidFill>
+                  <a:srgbClr val="536273"/>
+                </a:solidFill>
+                <a:latin typeface="Arial"/>
+              </a:defRPr>
+            </a:pPr>
+            <a:r>
+              <a:t>U3  /  FIXED LOGIC</a:t>
+            </a:r>
+          </a:p>
+        </p:txBody>
+      </p:sp>
+      <p:sp>
+        <p:nvSpPr>
+          <p:cNvPr id="10" name="TextBox 9"/>
+          <p:cNvSpPr txBox="1"/>
+          <p:nvPr/>
+        </p:nvSpPr>
+        <p:spPr>
+          <a:xfrm>
+            <a:off x="649224" y="2569464"/>
+            <a:ext cx="5138928" cy="365760"/>
+          </a:xfrm>
+          <a:prstGeom prst="rect">
+            <a:avLst/>
+          </a:prstGeom>
+          <a:noFill/>
+        </p:spPr>
+        <p:txBody>
+          <a:bodyPr wrap="square" lIns="0" tIns="0" rIns="0" bIns="0" anchor="ctr">
+            <a:spAutoFit/>
+          </a:bodyPr>
+          <a:lstStyle/>
+          <a:p>
+            <a:pPr>
+              <a:defRPr sz="2000" b="1">
+                <a:solidFill>
+                  <a:srgbClr val="172C46"/>
+                </a:solidFill>
+                <a:latin typeface="Arial"/>
+              </a:defRPr>
+            </a:pPr>
+            <a:r>
+              <a:t>Quad OR gate</a:t>
+            </a:r>
+          </a:p>
+        </p:txBody>
+      </p:sp>
+      <p:sp>
+        <p:nvSpPr>
+          <p:cNvPr id="11" name="TextBox 10"/>
+          <p:cNvSpPr txBox="1"/>
+          <p:nvPr/>
+        </p:nvSpPr>
+        <p:spPr>
+          <a:xfrm>
+            <a:off x="649224" y="2944368"/>
+            <a:ext cx="5138928" cy="246888"/>
+          </a:xfrm>
+          <a:prstGeom prst="rect">
+            <a:avLst/>
+          </a:prstGeom>
+          <a:noFill/>
+        </p:spPr>
+        <p:txBody>
+          <a:bodyPr wrap="square" lIns="0" tIns="0" rIns="0" bIns="0" anchor="ctr">
+            <a:spAutoFit/>
+          </a:bodyPr>
+          <a:lstStyle/>
+          <a:p>
+            <a:pPr>
+              <a:defRPr sz="1200" b="0">
+                <a:solidFill>
+                  <a:srgbClr val="536273"/>
+                </a:solidFill>
+                <a:latin typeface="Arial"/>
+              </a:defRPr>
+            </a:pPr>
+            <a:r>
+              <a:t>SN74HCT32N</a:t>
+            </a:r>
+          </a:p>
+        </p:txBody>
+      </p:sp>
+      <p:sp>
+        <p:nvSpPr>
+          <p:cNvPr id="12" name="TextBox 11"/>
+          <p:cNvSpPr txBox="1"/>
+          <p:nvPr/>
+        </p:nvSpPr>
+        <p:spPr>
+          <a:xfrm>
+            <a:off x="649224" y="3310127"/>
+            <a:ext cx="320040" cy="182880"/>
+          </a:xfrm>
+          <a:prstGeom prst="rect">
+            <a:avLst/>
+          </a:prstGeom>
+          <a:noFill/>
+        </p:spPr>
+        <p:txBody>
+          <a:bodyPr wrap="square" lIns="0" tIns="0" rIns="0" bIns="0" anchor="ctr">
+            <a:spAutoFit/>
+          </a:bodyPr>
+          <a:lstStyle/>
+          <a:p>
+            <a:pPr>
+              <a:defRPr sz="1000" b="1">
+                <a:solidFill>
+                  <a:srgbClr val="172C46"/>
+                </a:solidFill>
+                <a:latin typeface="Arial"/>
+              </a:defRPr>
+            </a:pPr>
+            <a:r>
+              <a:t>01</a:t>
+            </a:r>
+          </a:p>
+        </p:txBody>
+      </p:sp>
+      <p:sp>
+        <p:nvSpPr>
+          <p:cNvPr id="13" name="TextBox 12"/>
+          <p:cNvSpPr txBox="1"/>
+          <p:nvPr/>
+        </p:nvSpPr>
+        <p:spPr>
+          <a:xfrm>
+            <a:off x="996695" y="3300984"/>
+            <a:ext cx="4791456" cy="210312"/>
+          </a:xfrm>
+          <a:prstGeom prst="rect">
+            <a:avLst/>
+          </a:prstGeom>
+          <a:noFill/>
+        </p:spPr>
+        <p:txBody>
+          <a:bodyPr wrap="square" lIns="0" tIns="0" rIns="0" bIns="0" anchor="ctr">
+            <a:spAutoFit/>
+          </a:bodyPr>
+          <a:lstStyle/>
+          <a:p>
+            <a:pPr>
+              <a:defRPr sz="1300" b="1">
+                <a:solidFill>
+                  <a:srgbClr val="172C46"/>
+                </a:solidFill>
+                <a:latin typeface="Arial"/>
+              </a:defRPr>
+            </a:pPr>
+            <a:r>
+              <a:t>Three gates are used</a:t>
+            </a:r>
+          </a:p>
+        </p:txBody>
+      </p:sp>
+      <p:sp>
+        <p:nvSpPr>
+          <p:cNvPr id="14" name="TextBox 13"/>
+          <p:cNvSpPr txBox="1"/>
+          <p:nvPr/>
+        </p:nvSpPr>
+        <p:spPr>
+          <a:xfrm>
+            <a:off x="996695" y="3511296"/>
+            <a:ext cx="4791456" cy="411480"/>
+          </a:xfrm>
+          <a:prstGeom prst="rect">
+            <a:avLst/>
+          </a:prstGeom>
+          <a:noFill/>
+        </p:spPr>
+        <p:txBody>
+          <a:bodyPr wrap="square" lIns="0" tIns="0" rIns="0" bIns="0" anchor="ctr">
+            <a:spAutoFit/>
+          </a:bodyPr>
+          <a:lstStyle/>
+          <a:p>
+            <a:pPr>
+              <a:defRPr sz="1150" b="0">
+                <a:solidFill>
+                  <a:srgbClr val="24364B"/>
+                </a:solidFill>
+                <a:latin typeface="Arial"/>
+              </a:defRPr>
+            </a:pPr>
+            <a:r>
+              <a:t>Fixed combinational logic; the fourth gate is unused.</a:t>
+            </a:r>
+          </a:p>
+        </p:txBody>
+      </p:sp>
+      <p:sp>
+        <p:nvSpPr>
+          <p:cNvPr id="15" name="TextBox 14"/>
+          <p:cNvSpPr txBox="1"/>
+          <p:nvPr/>
+        </p:nvSpPr>
+        <p:spPr>
+          <a:xfrm>
+            <a:off x="649224" y="3968496"/>
+            <a:ext cx="320040" cy="182880"/>
+          </a:xfrm>
+          <a:prstGeom prst="rect">
+            <a:avLst/>
+          </a:prstGeom>
+          <a:noFill/>
+        </p:spPr>
+        <p:txBody>
+          <a:bodyPr wrap="square" lIns="0" tIns="0" rIns="0" bIns="0" anchor="ctr">
+            <a:spAutoFit/>
+          </a:bodyPr>
+          <a:lstStyle/>
+          <a:p>
+            <a:pPr>
+              <a:defRPr sz="1000" b="1">
+                <a:solidFill>
+                  <a:srgbClr val="172C46"/>
+                </a:solidFill>
+                <a:latin typeface="Arial"/>
+              </a:defRPr>
+            </a:pPr>
+            <a:r>
+              <a:t>02</a:t>
+            </a:r>
+          </a:p>
+        </p:txBody>
+      </p:sp>
+      <p:sp>
+        <p:nvSpPr>
+          <p:cNvPr id="16" name="TextBox 15"/>
+          <p:cNvSpPr txBox="1"/>
+          <p:nvPr/>
+        </p:nvSpPr>
+        <p:spPr>
+          <a:xfrm>
+            <a:off x="996695" y="3959352"/>
+            <a:ext cx="4791456" cy="210312"/>
+          </a:xfrm>
+          <a:prstGeom prst="rect">
+            <a:avLst/>
+          </a:prstGeom>
+          <a:noFill/>
+        </p:spPr>
+        <p:txBody>
+          <a:bodyPr wrap="square" lIns="0" tIns="0" rIns="0" bIns="0" anchor="ctr">
+            <a:spAutoFit/>
+          </a:bodyPr>
+          <a:lstStyle/>
+          <a:p>
+            <a:pPr>
+              <a:defRPr sz="1300" b="1">
+                <a:solidFill>
+                  <a:srgbClr val="172C46"/>
+                </a:solidFill>
+                <a:latin typeface="Arial"/>
+              </a:defRPr>
+            </a:pPr>
+            <a:r>
+              <a:t>Wait and SRAM reads</a:t>
+            </a:r>
+          </a:p>
+        </p:txBody>
+      </p:sp>
+      <p:sp>
+        <p:nvSpPr>
+          <p:cNvPr id="17" name="TextBox 16"/>
+          <p:cNvSpPr txBox="1"/>
+          <p:nvPr/>
+        </p:nvSpPr>
+        <p:spPr>
+          <a:xfrm>
+            <a:off x="996695" y="4169664"/>
+            <a:ext cx="4791456" cy="411480"/>
+          </a:xfrm>
+          <a:prstGeom prst="rect">
+            <a:avLst/>
+          </a:prstGeom>
+          <a:noFill/>
+        </p:spPr>
+        <p:txBody>
+          <a:bodyPr wrap="square" lIns="0" tIns="0" rIns="0" bIns="0" anchor="ctr">
+            <a:spAutoFit/>
+          </a:bodyPr>
+          <a:lstStyle/>
+          <a:p>
+            <a:pPr>
+              <a:defRPr sz="1150" b="0">
+                <a:solidFill>
+                  <a:srgbClr val="24364B"/>
+                </a:solidFill>
+                <a:latin typeface="Arial"/>
+              </a:defRPr>
+            </a:pPr>
+            <a:r>
+              <a:t>Combines IORQ# / IO_RELEASE for WAIT# and RD# / boot inhibit for SRAM OE#.</a:t>
+            </a:r>
+          </a:p>
+        </p:txBody>
+      </p:sp>
+      <p:sp>
+        <p:nvSpPr>
+          <p:cNvPr id="18" name="TextBox 17"/>
+          <p:cNvSpPr txBox="1"/>
+          <p:nvPr/>
+        </p:nvSpPr>
+        <p:spPr>
+          <a:xfrm>
+            <a:off x="649224" y="4626864"/>
+            <a:ext cx="320040" cy="182880"/>
+          </a:xfrm>
+          <a:prstGeom prst="rect">
+            <a:avLst/>
+          </a:prstGeom>
+          <a:noFill/>
+        </p:spPr>
+        <p:txBody>
+          <a:bodyPr wrap="square" lIns="0" tIns="0" rIns="0" bIns="0" anchor="ctr">
+            <a:spAutoFit/>
+          </a:bodyPr>
+          <a:lstStyle/>
+          <a:p>
+            <a:pPr>
+              <a:defRPr sz="1000" b="1">
+                <a:solidFill>
+                  <a:srgbClr val="172C46"/>
+                </a:solidFill>
+                <a:latin typeface="Arial"/>
+              </a:defRPr>
+            </a:pPr>
+            <a:r>
+              <a:t>03</a:t>
+            </a:r>
+          </a:p>
+        </p:txBody>
+      </p:sp>
+      <p:sp>
+        <p:nvSpPr>
+          <p:cNvPr id="19" name="TextBox 18"/>
+          <p:cNvSpPr txBox="1"/>
+          <p:nvPr/>
+        </p:nvSpPr>
+        <p:spPr>
+          <a:xfrm>
+            <a:off x="996695" y="4617720"/>
+            <a:ext cx="4791456" cy="210312"/>
+          </a:xfrm>
+          <a:prstGeom prst="rect">
+            <a:avLst/>
+          </a:prstGeom>
+          <a:noFill/>
+        </p:spPr>
+        <p:txBody>
+          <a:bodyPr wrap="square" lIns="0" tIns="0" rIns="0" bIns="0" anchor="ctr">
+            <a:spAutoFit/>
+          </a:bodyPr>
+          <a:lstStyle/>
+          <a:p>
+            <a:pPr>
+              <a:defRPr sz="1300" b="1">
+                <a:solidFill>
+                  <a:srgbClr val="172C46"/>
+                </a:solidFill>
+                <a:latin typeface="Arial"/>
+              </a:defRPr>
+            </a:pPr>
+            <a:r>
+              <a:t>Data-path enable</a:t>
+            </a:r>
+          </a:p>
+        </p:txBody>
+      </p:sp>
+      <p:sp>
+        <p:nvSpPr>
+          <p:cNvPr id="20" name="TextBox 19"/>
+          <p:cNvSpPr txBox="1"/>
+          <p:nvPr/>
+        </p:nvSpPr>
+        <p:spPr>
+          <a:xfrm>
+            <a:off x="996695" y="4828032"/>
+            <a:ext cx="4791456" cy="411480"/>
+          </a:xfrm>
+          <a:prstGeom prst="rect">
+            <a:avLst/>
+          </a:prstGeom>
+          <a:noFill/>
+        </p:spPr>
+        <p:txBody>
+          <a:bodyPr wrap="square" lIns="0" tIns="0" rIns="0" bIns="0" anchor="ctr">
+            <a:spAutoFit/>
+          </a:bodyPr>
+          <a:lstStyle/>
+          <a:p>
+            <a:pPr>
+              <a:defRPr sz="1150" b="0">
+                <a:solidFill>
+                  <a:srgbClr val="24364B"/>
+                </a:solidFill>
+                <a:latin typeface="Arial"/>
+              </a:defRPr>
+            </a:pPr>
+            <a:r>
+              <a:t>Combines RD# with the Pico request to control DATA_UP_OE#; no software or programming.</a:t>
+            </a:r>
+          </a:p>
+        </p:txBody>
+      </p:sp>
+      <p:sp>
+        <p:nvSpPr>
+          <p:cNvPr id="21" name="Rectangle 20"/>
+          <p:cNvSpPr/>
+          <p:nvPr/>
+        </p:nvSpPr>
+        <p:spPr>
+          <a:xfrm>
+            <a:off x="6172200" y="2176272"/>
+            <a:ext cx="5559552" cy="3054096"/>
+          </a:xfrm>
+          <a:prstGeom prst="rect">
+            <a:avLst/>
+          </a:prstGeom>
+          <a:solidFill>
+            <a:srgbClr val="E8F0FF"/>
+          </a:solidFill>
+          <a:ln>
+            <a:noFill/>
+          </a:ln>
+        </p:spPr>
+        <p:style>
+          <a:lnRef idx="1">
+            <a:schemeClr val="accent1"/>
+          </a:lnRef>
+          <a:fillRef idx="3">
+            <a:schemeClr val="accent1"/>
+          </a:fillRef>
+          <a:effectRef idx="2">
+            <a:schemeClr val="accent1"/>
+          </a:effectRef>
+          <a:fontRef idx="minor">
+            <a:schemeClr val="lt1"/>
+          </a:fontRef>
+        </p:style>
+        <p:txBody>
+          <a:bodyPr rtlCol="0" anchor="ctr"/>
+          <a:lstStyle/>
+          <a:p>
+            <a:pPr algn="ctr"/>
+            <a:endParaRPr/>
+          </a:p>
+        </p:txBody>
+      </p:sp>
+      <p:sp>
+        <p:nvSpPr>
+          <p:cNvPr id="22" name="TextBox 21"/>
+          <p:cNvSpPr txBox="1"/>
+          <p:nvPr/>
+        </p:nvSpPr>
+        <p:spPr>
+          <a:xfrm>
+            <a:off x="6382512" y="2322576"/>
+            <a:ext cx="5138928" cy="201168"/>
+          </a:xfrm>
+          <a:prstGeom prst="rect">
+            <a:avLst/>
+          </a:prstGeom>
+          <a:noFill/>
+        </p:spPr>
+        <p:txBody>
+          <a:bodyPr wrap="square" lIns="0" tIns="0" rIns="0" bIns="0" anchor="ctr">
+            <a:spAutoFit/>
+          </a:bodyPr>
+          <a:lstStyle/>
+          <a:p>
+            <a:pPr>
+              <a:defRPr sz="1000" b="1">
+                <a:solidFill>
+                  <a:srgbClr val="536273"/>
+                </a:solidFill>
+                <a:latin typeface="Arial"/>
+              </a:defRPr>
+            </a:pPr>
+            <a:r>
+              <a:t>U4  /  CLOCK AND CONTROL BUFFER</a:t>
+            </a:r>
+          </a:p>
+        </p:txBody>
+      </p:sp>
+      <p:sp>
+        <p:nvSpPr>
+          <p:cNvPr id="23" name="TextBox 22"/>
+          <p:cNvSpPr txBox="1"/>
+          <p:nvPr/>
+        </p:nvSpPr>
+        <p:spPr>
+          <a:xfrm>
+            <a:off x="6382512" y="2569464"/>
+            <a:ext cx="5138928" cy="365760"/>
+          </a:xfrm>
+          <a:prstGeom prst="rect">
+            <a:avLst/>
+          </a:prstGeom>
+          <a:noFill/>
+        </p:spPr>
+        <p:txBody>
+          <a:bodyPr wrap="square" lIns="0" tIns="0" rIns="0" bIns="0" anchor="ctr">
+            <a:spAutoFit/>
+          </a:bodyPr>
+          <a:lstStyle/>
+          <a:p>
+            <a:pPr>
+              <a:defRPr sz="2000" b="1">
+                <a:solidFill>
+                  <a:srgbClr val="172C46"/>
+                </a:solidFill>
+                <a:latin typeface="Arial"/>
+              </a:defRPr>
+            </a:pPr>
+            <a:r>
+              <a:t>Octal buffer</a:t>
+            </a:r>
+          </a:p>
+        </p:txBody>
+      </p:sp>
+      <p:sp>
+        <p:nvSpPr>
+          <p:cNvPr id="24" name="TextBox 23"/>
+          <p:cNvSpPr txBox="1"/>
+          <p:nvPr/>
+        </p:nvSpPr>
+        <p:spPr>
+          <a:xfrm>
+            <a:off x="6382512" y="2944368"/>
+            <a:ext cx="5138928" cy="246888"/>
+          </a:xfrm>
+          <a:prstGeom prst="rect">
+            <a:avLst/>
+          </a:prstGeom>
+          <a:noFill/>
+        </p:spPr>
+        <p:txBody>
+          <a:bodyPr wrap="square" lIns="0" tIns="0" rIns="0" bIns="0" anchor="ctr">
+            <a:spAutoFit/>
+          </a:bodyPr>
+          <a:lstStyle/>
+          <a:p>
+            <a:pPr>
+              <a:defRPr sz="1200" b="0">
+                <a:solidFill>
+                  <a:srgbClr val="536273"/>
+                </a:solidFill>
+                <a:latin typeface="Arial"/>
+              </a:defRPr>
+            </a:pPr>
+            <a:r>
+              <a:t>SN74AHCT244N</a:t>
+            </a:r>
+          </a:p>
+        </p:txBody>
+      </p:sp>
+      <p:sp>
+        <p:nvSpPr>
+          <p:cNvPr id="25" name="TextBox 24"/>
+          <p:cNvSpPr txBox="1"/>
+          <p:nvPr/>
+        </p:nvSpPr>
+        <p:spPr>
+          <a:xfrm>
+            <a:off x="6382512" y="3310127"/>
+            <a:ext cx="320040" cy="182880"/>
+          </a:xfrm>
+          <a:prstGeom prst="rect">
+            <a:avLst/>
+          </a:prstGeom>
+          <a:noFill/>
+        </p:spPr>
+        <p:txBody>
+          <a:bodyPr wrap="square" lIns="0" tIns="0" rIns="0" bIns="0" anchor="ctr">
+            <a:spAutoFit/>
+          </a:bodyPr>
+          <a:lstStyle/>
+          <a:p>
+            <a:pPr>
+              <a:defRPr sz="1000" b="1">
+                <a:solidFill>
+                  <a:srgbClr val="172C46"/>
+                </a:solidFill>
+                <a:latin typeface="Arial"/>
+              </a:defRPr>
+            </a:pPr>
+            <a:r>
+              <a:t>01</a:t>
+            </a:r>
+          </a:p>
+        </p:txBody>
+      </p:sp>
+      <p:sp>
+        <p:nvSpPr>
+          <p:cNvPr id="26" name="TextBox 25"/>
+          <p:cNvSpPr txBox="1"/>
+          <p:nvPr/>
+        </p:nvSpPr>
+        <p:spPr>
+          <a:xfrm>
+            <a:off x="6729984" y="3300984"/>
+            <a:ext cx="4791456" cy="210312"/>
+          </a:xfrm>
+          <a:prstGeom prst="rect">
+            <a:avLst/>
+          </a:prstGeom>
+          <a:noFill/>
+        </p:spPr>
+        <p:txBody>
+          <a:bodyPr wrap="square" lIns="0" tIns="0" rIns="0" bIns="0" anchor="ctr">
+            <a:spAutoFit/>
+          </a:bodyPr>
+          <a:lstStyle/>
+          <a:p>
+            <a:pPr>
+              <a:defRPr sz="1300" b="1">
+                <a:solidFill>
+                  <a:srgbClr val="172C46"/>
+                </a:solidFill>
+                <a:latin typeface="Arial"/>
+              </a:defRPr>
+            </a:pPr>
+            <a:r>
+              <a:t>3.3 V to 5 V logic</a:t>
+            </a:r>
+          </a:p>
+        </p:txBody>
+      </p:sp>
+      <p:sp>
+        <p:nvSpPr>
+          <p:cNvPr id="27" name="TextBox 26"/>
+          <p:cNvSpPr txBox="1"/>
+          <p:nvPr/>
+        </p:nvSpPr>
+        <p:spPr>
+          <a:xfrm>
+            <a:off x="6729984" y="3511296"/>
+            <a:ext cx="4791456" cy="411480"/>
+          </a:xfrm>
+          <a:prstGeom prst="rect">
+            <a:avLst/>
+          </a:prstGeom>
+          <a:noFill/>
+        </p:spPr>
+        <p:txBody>
+          <a:bodyPr wrap="square" lIns="0" tIns="0" rIns="0" bIns="0" anchor="ctr">
+            <a:spAutoFit/>
+          </a:bodyPr>
+          <a:lstStyle/>
+          <a:p>
+            <a:pPr>
+              <a:defRPr sz="1150" b="0">
+                <a:solidFill>
+                  <a:srgbClr val="24364B"/>
+                </a:solidFill>
+                <a:latin typeface="Arial"/>
+              </a:defRPr>
+            </a:pPr>
+            <a:r>
+              <a:t>AHCT inputs recognize Pico and Z80 TTL levels; outputs drive 5 V logic.</a:t>
+            </a:r>
+          </a:p>
+        </p:txBody>
+      </p:sp>
+      <p:sp>
+        <p:nvSpPr>
+          <p:cNvPr id="28" name="TextBox 27"/>
+          <p:cNvSpPr txBox="1"/>
+          <p:nvPr/>
+        </p:nvSpPr>
+        <p:spPr>
+          <a:xfrm>
+            <a:off x="6382512" y="3968496"/>
+            <a:ext cx="320040" cy="182880"/>
+          </a:xfrm>
+          <a:prstGeom prst="rect">
+            <a:avLst/>
+          </a:prstGeom>
+          <a:noFill/>
+        </p:spPr>
+        <p:txBody>
+          <a:bodyPr wrap="square" lIns="0" tIns="0" rIns="0" bIns="0" anchor="ctr">
+            <a:spAutoFit/>
+          </a:bodyPr>
+          <a:lstStyle/>
+          <a:p>
+            <a:pPr>
+              <a:defRPr sz="1000" b="1">
+                <a:solidFill>
+                  <a:srgbClr val="172C46"/>
+                </a:solidFill>
+                <a:latin typeface="Arial"/>
+              </a:defRPr>
+            </a:pPr>
+            <a:r>
+              <a:t>02</a:t>
+            </a:r>
+          </a:p>
+        </p:txBody>
+      </p:sp>
+      <p:sp>
+        <p:nvSpPr>
+          <p:cNvPr id="29" name="TextBox 28"/>
+          <p:cNvSpPr txBox="1"/>
+          <p:nvPr/>
+        </p:nvSpPr>
+        <p:spPr>
+          <a:xfrm>
+            <a:off x="6729984" y="3959352"/>
+            <a:ext cx="4791456" cy="210312"/>
+          </a:xfrm>
+          <a:prstGeom prst="rect">
+            <a:avLst/>
+          </a:prstGeom>
+          <a:noFill/>
+        </p:spPr>
+        <p:txBody>
+          <a:bodyPr wrap="square" lIns="0" tIns="0" rIns="0" bIns="0" anchor="ctr">
+            <a:spAutoFit/>
+          </a:bodyPr>
+          <a:lstStyle/>
+          <a:p>
+            <a:pPr>
+              <a:defRPr sz="1300" b="1">
+                <a:solidFill>
+                  <a:srgbClr val="172C46"/>
+                </a:solidFill>
+                <a:latin typeface="Arial"/>
+              </a:defRPr>
+            </a:pPr>
+            <a:r>
+              <a:t>Clock and bus request</a:t>
+            </a:r>
+          </a:p>
+        </p:txBody>
+      </p:sp>
+      <p:sp>
+        <p:nvSpPr>
+          <p:cNvPr id="30" name="TextBox 29"/>
+          <p:cNvSpPr txBox="1"/>
+          <p:nvPr/>
+        </p:nvSpPr>
+        <p:spPr>
+          <a:xfrm>
+            <a:off x="6729984" y="4169664"/>
+            <a:ext cx="4791456" cy="411480"/>
+          </a:xfrm>
+          <a:prstGeom prst="rect">
+            <a:avLst/>
+          </a:prstGeom>
+          <a:noFill/>
+        </p:spPr>
+        <p:txBody>
+          <a:bodyPr wrap="square" lIns="0" tIns="0" rIns="0" bIns="0" anchor="ctr">
+            <a:spAutoFit/>
+          </a:bodyPr>
+          <a:lstStyle/>
+          <a:p>
+            <a:pPr>
+              <a:defRPr sz="1150" b="0">
+                <a:solidFill>
+                  <a:srgbClr val="24364B"/>
+                </a:solidFill>
+                <a:latin typeface="Arial"/>
+              </a:defRPr>
+            </a:pPr>
+            <a:r>
+              <a:t>Buffers Pico clock and BUSREQ# to the Z80.</a:t>
+            </a:r>
+          </a:p>
+        </p:txBody>
+      </p:sp>
+      <p:sp>
+        <p:nvSpPr>
+          <p:cNvPr id="31" name="TextBox 30"/>
+          <p:cNvSpPr txBox="1"/>
+          <p:nvPr/>
+        </p:nvSpPr>
+        <p:spPr>
+          <a:xfrm>
+            <a:off x="6382512" y="4626864"/>
+            <a:ext cx="320040" cy="182880"/>
+          </a:xfrm>
+          <a:prstGeom prst="rect">
+            <a:avLst/>
+          </a:prstGeom>
+          <a:noFill/>
+        </p:spPr>
+        <p:txBody>
+          <a:bodyPr wrap="square" lIns="0" tIns="0" rIns="0" bIns="0" anchor="ctr">
+            <a:spAutoFit/>
+          </a:bodyPr>
+          <a:lstStyle/>
+          <a:p>
+            <a:pPr>
+              <a:defRPr sz="1000" b="1">
+                <a:solidFill>
+                  <a:srgbClr val="172C46"/>
+                </a:solidFill>
+                <a:latin typeface="Arial"/>
+              </a:defRPr>
+            </a:pPr>
+            <a:r>
+              <a:t>03</a:t>
+            </a:r>
+          </a:p>
+        </p:txBody>
+      </p:sp>
+      <p:sp>
+        <p:nvSpPr>
+          <p:cNvPr id="32" name="TextBox 31"/>
+          <p:cNvSpPr txBox="1"/>
+          <p:nvPr/>
+        </p:nvSpPr>
+        <p:spPr>
+          <a:xfrm>
+            <a:off x="6729984" y="4617720"/>
+            <a:ext cx="4791456" cy="210312"/>
+          </a:xfrm>
+          <a:prstGeom prst="rect">
+            <a:avLst/>
+          </a:prstGeom>
+          <a:noFill/>
+        </p:spPr>
+        <p:txBody>
+          <a:bodyPr wrap="square" lIns="0" tIns="0" rIns="0" bIns="0" anchor="ctr">
+            <a:spAutoFit/>
+          </a:bodyPr>
+          <a:lstStyle/>
+          <a:p>
+            <a:pPr>
+              <a:defRPr sz="1300" b="1">
+                <a:solidFill>
+                  <a:srgbClr val="172C46"/>
+                </a:solidFill>
+                <a:latin typeface="Arial"/>
+              </a:defRPr>
+            </a:pPr>
+            <a:r>
+              <a:t>Memory controls</a:t>
+            </a:r>
+          </a:p>
+        </p:txBody>
+      </p:sp>
+      <p:sp>
+        <p:nvSpPr>
+          <p:cNvPr id="33" name="TextBox 32"/>
+          <p:cNvSpPr txBox="1"/>
+          <p:nvPr/>
+        </p:nvSpPr>
+        <p:spPr>
+          <a:xfrm>
+            <a:off x="6729984" y="4828032"/>
+            <a:ext cx="4791456" cy="411480"/>
+          </a:xfrm>
+          <a:prstGeom prst="rect">
+            <a:avLst/>
+          </a:prstGeom>
+          <a:noFill/>
+        </p:spPr>
+        <p:txBody>
+          <a:bodyPr wrap="square" lIns="0" tIns="0" rIns="0" bIns="0" anchor="ctr">
+            <a:spAutoFit/>
+          </a:bodyPr>
+          <a:lstStyle/>
+          <a:p>
+            <a:pPr>
+              <a:defRPr sz="1150" b="0">
+                <a:solidFill>
+                  <a:srgbClr val="24364B"/>
+                </a:solidFill>
+                <a:latin typeface="Arial"/>
+              </a:defRPr>
+            </a:pPr>
+            <a:r>
+              <a:t>Buffers MREQ#, WR# and RD# so SRAM CMOS control inputs receive valid levels.</a:t>
+            </a:r>
+          </a:p>
+        </p:txBody>
+      </p:sp>
+      <p:sp>
+        <p:nvSpPr>
+          <p:cNvPr id="34" name="Rectangle 33"/>
+          <p:cNvSpPr/>
+          <p:nvPr/>
+        </p:nvSpPr>
+        <p:spPr>
+          <a:xfrm>
+            <a:off x="438912" y="5431536"/>
+            <a:ext cx="11292840" cy="685800"/>
+          </a:xfrm>
+          <a:prstGeom prst="rect">
+            <a:avLst/>
+          </a:prstGeom>
+          <a:solidFill>
+            <a:srgbClr val="FFF0DB"/>
+          </a:solidFill>
+          <a:ln>
+            <a:noFill/>
+          </a:ln>
+        </p:spPr>
+        <p:style>
+          <a:lnRef idx="1">
+            <a:schemeClr val="accent1"/>
+          </a:lnRef>
+          <a:fillRef idx="3">
+            <a:schemeClr val="accent1"/>
+          </a:fillRef>
+          <a:effectRef idx="2">
+            <a:schemeClr val="accent1"/>
+          </a:effectRef>
+          <a:fontRef idx="minor">
+            <a:schemeClr val="lt1"/>
+          </a:fontRef>
+        </p:style>
+        <p:txBody>
+          <a:bodyPr rtlCol="0" anchor="ctr"/>
+          <a:lstStyle/>
+          <a:p>
+            <a:pPr algn="ctr"/>
+            <a:endParaRPr/>
+          </a:p>
+        </p:txBody>
+      </p:sp>
+      <p:sp>
+        <p:nvSpPr>
+          <p:cNvPr id="35" name="TextBox 34"/>
+          <p:cNvSpPr txBox="1"/>
+          <p:nvPr/>
+        </p:nvSpPr>
+        <p:spPr>
+          <a:xfrm>
+            <a:off x="685800" y="5559552"/>
+            <a:ext cx="10789920" cy="393192"/>
+          </a:xfrm>
+          <a:prstGeom prst="rect">
+            <a:avLst/>
+          </a:prstGeom>
+          <a:noFill/>
+        </p:spPr>
+        <p:txBody>
+          <a:bodyPr wrap="square" lIns="0" tIns="0" rIns="0" bIns="0" anchor="ctr">
+            <a:spAutoFit/>
+          </a:bodyPr>
+          <a:lstStyle/>
+          <a:p>
+            <a:pPr>
+              <a:defRPr sz="1400" b="1">
+                <a:solidFill>
+                  <a:srgbClr val="172C46"/>
+                </a:solidFill>
+                <a:latin typeface="Arial"/>
+              </a:defRPr>
+            </a:pPr>
+            <a:r>
+              <a:t>U4 provides drive and level translation; U3 makes the fixed active-low control decisions.</a:t>
+            </a:r>
+          </a:p>
+        </p:txBody>
+      </p:sp>
+    </p:spTree>
+  </p:cSld>
+  <p:clrMapOvr>
+    <a:masterClrMapping/>
+  </p:clrMapOvr>
+</p:sld>
+</file>
+
+<file path=ppt/slides/slide9.xml><?xml version="1.0" encoding="utf-8"?>
+<p:sld xmlns:a="http://schemas.openxmlformats.org/drawingml/2006/main" xmlns:r="http://schemas.openxmlformats.org/officeDocument/2006/relationships" xmlns:p="http://schemas.openxmlformats.org/presentationml/2006/main">
+  <p:cSld>
+    <p:bg>
+      <p:bgPr>
+        <a:solidFill>
+          <a:srgbClr val="FFFFFF"/>
+        </a:solidFill>
+        <a:effectLst/>
+      </p:bgPr>
+    </p:bg>
+    <p:spTree>
+      <p:nvGrpSpPr>
+        <p:cNvPr id="1" name=""/>
+        <p:cNvGrpSpPr/>
+        <p:nvPr/>
+      </p:nvGrpSpPr>
+      <p:grpSpPr>
+        <a:xfrm>
+          <a:off x="0" y="0"/>
+          <a:ext cx="0" cy="0"/>
+          <a:chOff x="0" y="0"/>
+          <a:chExt cx="0" cy="0"/>
+        </a:xfrm>
+      </p:grpSpPr>
+      <p:sp>
+        <p:nvSpPr>
+          <p:cNvPr id="2" name="Rectangle 1"/>
+          <p:cNvSpPr/>
+          <p:nvPr/>
+        </p:nvSpPr>
+        <p:spPr>
+          <a:xfrm>
+            <a:off x="0" y="0"/>
+            <a:ext cx="12192000" cy="64008"/>
+          </a:xfrm>
+          <a:prstGeom prst="rect">
+            <a:avLst/>
+          </a:prstGeom>
+          <a:solidFill>
+            <a:srgbClr val="172C46"/>
+          </a:solidFill>
+          <a:ln>
+            <a:noFill/>
+          </a:ln>
+        </p:spPr>
+        <p:style>
+          <a:lnRef idx="1">
+            <a:schemeClr val="accent1"/>
+          </a:lnRef>
+          <a:fillRef idx="3">
+            <a:schemeClr val="accent1"/>
+          </a:fillRef>
+          <a:effectRef idx="2">
+            <a:schemeClr val="accent1"/>
+          </a:effectRef>
+          <a:fontRef idx="minor">
+            <a:schemeClr val="lt1"/>
+          </a:fontRef>
+        </p:style>
+        <p:txBody>
+          <a:bodyPr rtlCol="0" anchor="ctr"/>
+          <a:lstStyle/>
+          <a:p>
+            <a:pPr algn="ctr"/>
+            <a:endParaRPr/>
+          </a:p>
+        </p:txBody>
+      </p:sp>
+      <p:sp>
+        <p:nvSpPr>
+          <p:cNvPr id="3" name="TextBox 2"/>
+          <p:cNvSpPr txBox="1"/>
+          <p:nvPr/>
+        </p:nvSpPr>
+        <p:spPr>
+          <a:xfrm>
+            <a:off x="411480" y="228600"/>
+            <a:ext cx="10058400" cy="256032"/>
+          </a:xfrm>
+          <a:prstGeom prst="rect">
+            <a:avLst/>
+          </a:prstGeom>
+          <a:noFill/>
+        </p:spPr>
+        <p:txBody>
+          <a:bodyPr wrap="square" lIns="0" tIns="0" rIns="0" bIns="0" anchor="ctr">
+            <a:spAutoFit/>
+          </a:bodyPr>
+          <a:lstStyle/>
+          <a:p>
+            <a:pPr>
+              <a:defRPr sz="1100" b="1">
+                <a:solidFill>
+                  <a:srgbClr val="172C46"/>
+                </a:solidFill>
+                <a:latin typeface="Arial"/>
+              </a:defRPr>
+            </a:pPr>
+            <a:r>
+              <a:t>Z80 ROMLESS SBC  /  DESIGN OVERVIEW</a:t>
+            </a:r>
+          </a:p>
+        </p:txBody>
+      </p:sp>
+      <p:sp>
+        <p:nvSpPr>
+          <p:cNvPr id="4" name="TextBox 3"/>
+          <p:cNvSpPr txBox="1"/>
+          <p:nvPr/>
+        </p:nvSpPr>
+        <p:spPr>
+          <a:xfrm>
+            <a:off x="411480" y="713232"/>
+            <a:ext cx="11338560" cy="594360"/>
+          </a:xfrm>
+          <a:prstGeom prst="rect">
+            <a:avLst/>
+          </a:prstGeom>
+          <a:noFill/>
+        </p:spPr>
+        <p:txBody>
+          <a:bodyPr wrap="square" lIns="0" tIns="0" rIns="0" bIns="0" anchor="ctr">
+            <a:spAutoFit/>
+          </a:bodyPr>
+          <a:lstStyle/>
+          <a:p>
+            <a:pPr>
+              <a:defRPr sz="3100" b="1">
+                <a:solidFill>
+                  <a:srgbClr val="172C46"/>
+                </a:solidFill>
+                <a:latin typeface="Arial"/>
+              </a:defRPr>
+            </a:pPr>
+            <a:r>
+              <a:t>Bus interfaces: one direction, one purpose</a:t>
+            </a:r>
+          </a:p>
+        </p:txBody>
+      </p:sp>
+      <p:sp>
+        <p:nvSpPr>
+          <p:cNvPr id="5" name="TextBox 4"/>
+          <p:cNvSpPr txBox="1"/>
+          <p:nvPr/>
+        </p:nvSpPr>
+        <p:spPr>
+          <a:xfrm>
+            <a:off x="438912" y="1362456"/>
+            <a:ext cx="11155680" cy="457200"/>
+          </a:xfrm>
+          <a:prstGeom prst="rect">
+            <a:avLst/>
+          </a:prstGeom>
+          <a:noFill/>
+        </p:spPr>
+        <p:txBody>
+          <a:bodyPr wrap="square" lIns="0" tIns="0" rIns="0" bIns="0" anchor="ctr">
+            <a:spAutoFit/>
+          </a:bodyPr>
+          <a:lstStyle/>
+          <a:p>
+            <a:pPr>
+              <a:defRPr sz="1700" b="0">
+                <a:solidFill>
+                  <a:srgbClr val="536273"/>
+                </a:solidFill>
+                <a:latin typeface="Arial"/>
+              </a:defRPr>
+            </a:pPr>
+            <a:r>
+              <a:t>The three bus-interface chips keep 5 V signals away from Pico GPIOs and isolate data drivers.</a:t>
+            </a:r>
+          </a:p>
+        </p:txBody>
+      </p:sp>
+      <p:sp>
+        <p:nvSpPr>
+          <p:cNvPr id="6" name="TextBox 5"/>
+          <p:cNvSpPr txBox="1"/>
+          <p:nvPr/>
+        </p:nvSpPr>
+        <p:spPr>
+          <a:xfrm>
+            <a:off x="411480" y="6510528"/>
+            <a:ext cx="10607040" cy="182880"/>
+          </a:xfrm>
+          <a:prstGeom prst="rect">
+            <a:avLst/>
+          </a:prstGeom>
+          <a:noFill/>
+        </p:spPr>
+        <p:txBody>
+          <a:bodyPr wrap="square" lIns="0" tIns="0" rIns="0" bIns="0" anchor="ctr">
+            <a:spAutoFit/>
+          </a:bodyPr>
+          <a:lstStyle/>
+          <a:p>
+            <a:pPr>
+              <a:defRPr sz="1000" b="0">
+                <a:solidFill>
+                  <a:srgbClr val="687385"/>
+                </a:solidFill>
+                <a:latin typeface="Arial"/>
+              </a:defRPr>
+            </a:pPr>
+            <a:r>
+              <a:t>Stage 10 implementation | Current breadboard architecture | 22 October 2026</a:t>
+            </a:r>
+          </a:p>
+        </p:txBody>
+      </p:sp>
+      <p:sp>
+        <p:nvSpPr>
+          <p:cNvPr id="7" name="TextBox 6"/>
+          <p:cNvSpPr txBox="1"/>
+          <p:nvPr/>
+        </p:nvSpPr>
+        <p:spPr>
+          <a:xfrm>
+            <a:off x="11292840" y="6473952"/>
+            <a:ext cx="457200" cy="274320"/>
+          </a:xfrm>
+          <a:prstGeom prst="rect">
+            <a:avLst/>
+          </a:prstGeom>
+          <a:noFill/>
+        </p:spPr>
+        <p:txBody>
+          <a:bodyPr wrap="square" lIns="0" tIns="0" rIns="0" bIns="0" anchor="ctr">
+            <a:spAutoFit/>
+          </a:bodyPr>
+          <a:lstStyle/>
+          <a:p>
+            <a:pPr>
+              <a:defRPr sz="1200" b="1">
+                <a:solidFill>
+                  <a:srgbClr val="172C46"/>
+                </a:solidFill>
+                <a:latin typeface="Arial"/>
+              </a:defRPr>
+            </a:pPr>
+            <a:r>
+              <a:t>09</a:t>
+            </a:r>
+          </a:p>
+        </p:txBody>
+      </p:sp>
+      <p:sp>
+        <p:nvSpPr>
+          <p:cNvPr id="8" name="Rectangle 7"/>
+          <p:cNvSpPr/>
+          <p:nvPr/>
+        </p:nvSpPr>
+        <p:spPr>
+          <a:xfrm>
+            <a:off x="438912" y="2176272"/>
+            <a:ext cx="3648456" cy="3054096"/>
+          </a:xfrm>
+          <a:prstGeom prst="rect">
+            <a:avLst/>
+          </a:prstGeom>
+          <a:solidFill>
+            <a:srgbClr val="E8F0FF"/>
+          </a:solidFill>
+          <a:ln>
+            <a:noFill/>
+          </a:ln>
+        </p:spPr>
+        <p:style>
+          <a:lnRef idx="1">
+            <a:schemeClr val="accent1"/>
+          </a:lnRef>
+          <a:fillRef idx="3">
+            <a:schemeClr val="accent1"/>
+          </a:fillRef>
+          <a:effectRef idx="2">
+            <a:schemeClr val="accent1"/>
+          </a:effectRef>
+          <a:fontRef idx="minor">
+            <a:schemeClr val="lt1"/>
+          </a:fontRef>
+        </p:style>
+        <p:txBody>
+          <a:bodyPr rtlCol="0" anchor="ctr"/>
+          <a:lstStyle/>
+          <a:p>
+            <a:pPr algn="ctr"/>
+            <a:endParaRPr/>
+          </a:p>
+        </p:txBody>
+      </p:sp>
+      <p:sp>
+        <p:nvSpPr>
+          <p:cNvPr id="9" name="TextBox 8"/>
+          <p:cNvSpPr txBox="1"/>
+          <p:nvPr/>
+        </p:nvSpPr>
+        <p:spPr>
+          <a:xfrm>
+            <a:off x="649224" y="2322576"/>
+            <a:ext cx="3227832" cy="201168"/>
+          </a:xfrm>
+          <a:prstGeom prst="rect">
+            <a:avLst/>
+          </a:prstGeom>
+          <a:noFill/>
+        </p:spPr>
+        <p:txBody>
+          <a:bodyPr wrap="square" lIns="0" tIns="0" rIns="0" bIns="0" anchor="ctr">
+            <a:spAutoFit/>
+          </a:bodyPr>
+          <a:lstStyle/>
+          <a:p>
+            <a:pPr>
+              <a:defRPr sz="1000" b="1">
+                <a:solidFill>
+                  <a:srgbClr val="536273"/>
+                </a:solidFill>
+                <a:latin typeface="Arial"/>
+              </a:defRPr>
+            </a:pPr>
+            <a:r>
+              <a:t>U7  /  5 V MONITOR TO PICO</a:t>
+            </a:r>
+          </a:p>
+        </p:txBody>
+      </p:sp>
+      <p:sp>
+        <p:nvSpPr>
+          <p:cNvPr id="10" name="TextBox 9"/>
+          <p:cNvSpPr txBox="1"/>
+          <p:nvPr/>
+        </p:nvSpPr>
+        <p:spPr>
+          <a:xfrm>
+            <a:off x="649224" y="2569464"/>
+            <a:ext cx="3227832" cy="365760"/>
+          </a:xfrm>
+          <a:prstGeom prst="rect">
+            <a:avLst/>
+          </a:prstGeom>
+          <a:noFill/>
+        </p:spPr>
+        <p:txBody>
+          <a:bodyPr wrap="square" lIns="0" tIns="0" rIns="0" bIns="0" anchor="ctr">
+            <a:spAutoFit/>
+          </a:bodyPr>
+          <a:lstStyle/>
+          <a:p>
+            <a:pPr>
+              <a:defRPr sz="2000" b="1">
+                <a:solidFill>
+                  <a:srgbClr val="172C46"/>
+                </a:solidFill>
+                <a:latin typeface="Arial"/>
+              </a:defRPr>
+            </a:pPr>
+            <a:r>
+              <a:t>Octal input buffer</a:t>
+            </a:r>
+          </a:p>
+        </p:txBody>
+      </p:sp>
+      <p:sp>
+        <p:nvSpPr>
+          <p:cNvPr id="11" name="TextBox 10"/>
+          <p:cNvSpPr txBox="1"/>
+          <p:nvPr/>
+        </p:nvSpPr>
+        <p:spPr>
+          <a:xfrm>
+            <a:off x="649224" y="2944368"/>
+            <a:ext cx="3227832" cy="246888"/>
+          </a:xfrm>
+          <a:prstGeom prst="rect">
+            <a:avLst/>
+          </a:prstGeom>
+          <a:noFill/>
+        </p:spPr>
+        <p:txBody>
+          <a:bodyPr wrap="square" lIns="0" tIns="0" rIns="0" bIns="0" anchor="ctr">
+            <a:spAutoFit/>
+          </a:bodyPr>
+          <a:lstStyle/>
+          <a:p>
+            <a:pPr>
+              <a:defRPr sz="1200" b="0">
+                <a:solidFill>
+                  <a:srgbClr val="536273"/>
+                </a:solidFill>
+                <a:latin typeface="Arial"/>
+              </a:defRPr>
+            </a:pPr>
+            <a:r>
+              <a:t>SN74LVC244AN</a:t>
+            </a:r>
+          </a:p>
+        </p:txBody>
+      </p:sp>
+      <p:sp>
+        <p:nvSpPr>
+          <p:cNvPr id="12" name="TextBox 11"/>
+          <p:cNvSpPr txBox="1"/>
+          <p:nvPr/>
+        </p:nvSpPr>
+        <p:spPr>
+          <a:xfrm>
+            <a:off x="649224" y="3310127"/>
+            <a:ext cx="320040" cy="182880"/>
+          </a:xfrm>
+          <a:prstGeom prst="rect">
+            <a:avLst/>
+          </a:prstGeom>
+          <a:noFill/>
+        </p:spPr>
+        <p:txBody>
+          <a:bodyPr wrap="square" lIns="0" tIns="0" rIns="0" bIns="0" anchor="ctr">
+            <a:spAutoFit/>
+          </a:bodyPr>
+          <a:lstStyle/>
+          <a:p>
+            <a:pPr>
+              <a:defRPr sz="1000" b="1">
+                <a:solidFill>
+                  <a:srgbClr val="172C46"/>
+                </a:solidFill>
+                <a:latin typeface="Arial"/>
+              </a:defRPr>
+            </a:pPr>
+            <a:r>
+              <a:t>01</a:t>
+            </a:r>
+          </a:p>
+        </p:txBody>
+      </p:sp>
+      <p:sp>
+        <p:nvSpPr>
+          <p:cNvPr id="13" name="TextBox 12"/>
+          <p:cNvSpPr txBox="1"/>
+          <p:nvPr/>
+        </p:nvSpPr>
+        <p:spPr>
+          <a:xfrm>
+            <a:off x="996695" y="3300984"/>
+            <a:ext cx="2880360" cy="210312"/>
+          </a:xfrm>
+          <a:prstGeom prst="rect">
+            <a:avLst/>
+          </a:prstGeom>
+          <a:noFill/>
+        </p:spPr>
+        <p:txBody>
+          <a:bodyPr wrap="square" lIns="0" tIns="0" rIns="0" bIns="0" anchor="ctr">
+            <a:spAutoFit/>
+          </a:bodyPr>
+          <a:lstStyle/>
+          <a:p>
+            <a:pPr>
+              <a:defRPr sz="1300" b="1">
+                <a:solidFill>
+                  <a:srgbClr val="172C46"/>
+                </a:solidFill>
+                <a:latin typeface="Arial"/>
+              </a:defRPr>
+            </a:pPr>
+            <a:r>
+              <a:t>Eight monitored signals</a:t>
+            </a:r>
+          </a:p>
+        </p:txBody>
+      </p:sp>
+      <p:sp>
+        <p:nvSpPr>
+          <p:cNvPr id="14" name="TextBox 13"/>
+          <p:cNvSpPr txBox="1"/>
+          <p:nvPr/>
+        </p:nvSpPr>
+        <p:spPr>
+          <a:xfrm>
+            <a:off x="996695" y="3511296"/>
+            <a:ext cx="2880360" cy="411480"/>
+          </a:xfrm>
+          <a:prstGeom prst="rect">
+            <a:avLst/>
+          </a:prstGeom>
+          <a:noFill/>
+        </p:spPr>
+        <p:txBody>
+          <a:bodyPr wrap="square" lIns="0" tIns="0" rIns="0" bIns="0" anchor="ctr">
+            <a:spAutoFit/>
+          </a:bodyPr>
+          <a:lstStyle/>
+          <a:p>
+            <a:pPr>
+              <a:defRPr sz="1150" b="0">
+                <a:solidFill>
+                  <a:srgbClr val="24364B"/>
+                </a:solidFill>
+                <a:latin typeface="Arial"/>
+              </a:defRPr>
+            </a:pPr>
+            <a:r>
+              <a:t>BUSACK#, IORQ#, RD#, WR#, A0-A2 and A4.</a:t>
+            </a:r>
+          </a:p>
+        </p:txBody>
+      </p:sp>
+      <p:sp>
+        <p:nvSpPr>
+          <p:cNvPr id="15" name="TextBox 14"/>
+          <p:cNvSpPr txBox="1"/>
+          <p:nvPr/>
+        </p:nvSpPr>
+        <p:spPr>
+          <a:xfrm>
+            <a:off x="649224" y="3968496"/>
+            <a:ext cx="320040" cy="182880"/>
+          </a:xfrm>
+          <a:prstGeom prst="rect">
+            <a:avLst/>
+          </a:prstGeom>
+          <a:noFill/>
+        </p:spPr>
+        <p:txBody>
+          <a:bodyPr wrap="square" lIns="0" tIns="0" rIns="0" bIns="0" anchor="ctr">
+            <a:spAutoFit/>
+          </a:bodyPr>
+          <a:lstStyle/>
+          <a:p>
+            <a:pPr>
+              <a:defRPr sz="1000" b="1">
+                <a:solidFill>
+                  <a:srgbClr val="172C46"/>
+                </a:solidFill>
+                <a:latin typeface="Arial"/>
+              </a:defRPr>
+            </a:pPr>
+            <a:r>
+              <a:t>02</a:t>
+            </a:r>
+          </a:p>
+        </p:txBody>
+      </p:sp>
+      <p:sp>
+        <p:nvSpPr>
+          <p:cNvPr id="16" name="TextBox 15"/>
+          <p:cNvSpPr txBox="1"/>
+          <p:nvPr/>
+        </p:nvSpPr>
+        <p:spPr>
+          <a:xfrm>
+            <a:off x="996695" y="3959352"/>
+            <a:ext cx="2880360" cy="210312"/>
+          </a:xfrm>
+          <a:prstGeom prst="rect">
+            <a:avLst/>
+          </a:prstGeom>
+          <a:noFill/>
+        </p:spPr>
+        <p:txBody>
+          <a:bodyPr wrap="square" lIns="0" tIns="0" rIns="0" bIns="0" anchor="ctr">
+            <a:spAutoFit/>
+          </a:bodyPr>
+          <a:lstStyle/>
+          <a:p>
+            <a:pPr>
+              <a:defRPr sz="1300" b="1">
+                <a:solidFill>
+                  <a:srgbClr val="172C46"/>
+                </a:solidFill>
+                <a:latin typeface="Arial"/>
+              </a:defRPr>
+            </a:pPr>
+            <a:r>
+              <a:t>5 V tolerant input</a:t>
+            </a:r>
+          </a:p>
+        </p:txBody>
+      </p:sp>
+      <p:sp>
+        <p:nvSpPr>
+          <p:cNvPr id="17" name="TextBox 16"/>
+          <p:cNvSpPr txBox="1"/>
+          <p:nvPr/>
+        </p:nvSpPr>
+        <p:spPr>
+          <a:xfrm>
+            <a:off x="996695" y="4169664"/>
+            <a:ext cx="2880360" cy="411480"/>
+          </a:xfrm>
+          <a:prstGeom prst="rect">
+            <a:avLst/>
+          </a:prstGeom>
+          <a:noFill/>
+        </p:spPr>
+        <p:txBody>
+          <a:bodyPr wrap="square" lIns="0" tIns="0" rIns="0" bIns="0" anchor="ctr">
+            <a:spAutoFit/>
+          </a:bodyPr>
+          <a:lstStyle/>
+          <a:p>
+            <a:pPr>
+              <a:defRPr sz="1150" b="0">
+                <a:solidFill>
+                  <a:srgbClr val="24364B"/>
+                </a:solidFill>
+                <a:latin typeface="Arial"/>
+              </a:defRPr>
+            </a:pPr>
+            <a:r>
+              <a:t>Runs at 3.3 V and presents safe logic levels to the Pico.</a:t>
+            </a:r>
+          </a:p>
+        </p:txBody>
+      </p:sp>
+      <p:sp>
+        <p:nvSpPr>
+          <p:cNvPr id="18" name="TextBox 17"/>
+          <p:cNvSpPr txBox="1"/>
+          <p:nvPr/>
+        </p:nvSpPr>
+        <p:spPr>
+          <a:xfrm>
+            <a:off x="649224" y="4626864"/>
+            <a:ext cx="320040" cy="182880"/>
+          </a:xfrm>
+          <a:prstGeom prst="rect">
+            <a:avLst/>
+          </a:prstGeom>
+          <a:noFill/>
+        </p:spPr>
+        <p:txBody>
+          <a:bodyPr wrap="square" lIns="0" tIns="0" rIns="0" bIns="0" anchor="ctr">
+            <a:spAutoFit/>
+          </a:bodyPr>
+          <a:lstStyle/>
+          <a:p>
+            <a:pPr>
+              <a:defRPr sz="1000" b="1">
+                <a:solidFill>
+                  <a:srgbClr val="172C46"/>
+                </a:solidFill>
+                <a:latin typeface="Arial"/>
+              </a:defRPr>
+            </a:pPr>
+            <a:r>
+              <a:t>03</a:t>
+            </a:r>
+          </a:p>
+        </p:txBody>
+      </p:sp>
+      <p:sp>
+        <p:nvSpPr>
+          <p:cNvPr id="19" name="TextBox 18"/>
+          <p:cNvSpPr txBox="1"/>
+          <p:nvPr/>
+        </p:nvSpPr>
+        <p:spPr>
+          <a:xfrm>
+            <a:off x="996695" y="4617720"/>
+            <a:ext cx="2880360" cy="210312"/>
+          </a:xfrm>
+          <a:prstGeom prst="rect">
+            <a:avLst/>
+          </a:prstGeom>
+          <a:noFill/>
+        </p:spPr>
+        <p:txBody>
+          <a:bodyPr wrap="square" lIns="0" tIns="0" rIns="0" bIns="0" anchor="ctr">
+            <a:spAutoFit/>
+          </a:bodyPr>
+          <a:lstStyle/>
+          <a:p>
+            <a:pPr>
+              <a:defRPr sz="1300" b="1">
+                <a:solidFill>
+                  <a:srgbClr val="172C46"/>
+                </a:solidFill>
+                <a:latin typeface="Arial"/>
+              </a:defRPr>
+            </a:pPr>
+            <a:r>
+              <a:t>GPIO protection</a:t>
+            </a:r>
+          </a:p>
+        </p:txBody>
+      </p:sp>
+      <p:sp>
+        <p:nvSpPr>
+          <p:cNvPr id="20" name="TextBox 19"/>
+          <p:cNvSpPr txBox="1"/>
+          <p:nvPr/>
+        </p:nvSpPr>
+        <p:spPr>
+          <a:xfrm>
+            <a:off x="996695" y="4828032"/>
+            <a:ext cx="2880360" cy="411480"/>
+          </a:xfrm>
+          <a:prstGeom prst="rect">
+            <a:avLst/>
+          </a:prstGeom>
+          <a:noFill/>
+        </p:spPr>
+        <p:txBody>
+          <a:bodyPr wrap="square" lIns="0" tIns="0" rIns="0" bIns="0" anchor="ctr">
+            <a:spAutoFit/>
+          </a:bodyPr>
+          <a:lstStyle/>
+          <a:p>
+            <a:pPr>
+              <a:defRPr sz="1150" b="0">
+                <a:solidFill>
+                  <a:srgbClr val="24364B"/>
+                </a:solidFill>
+                <a:latin typeface="Arial"/>
+              </a:defRPr>
+            </a:pPr>
+            <a:r>
+              <a:t>All monitored CPU signals pass through U7 before reaching Pico pins.</a:t>
+            </a:r>
+          </a:p>
+        </p:txBody>
+      </p:sp>
+      <p:sp>
+        <p:nvSpPr>
+          <p:cNvPr id="21" name="Rectangle 20"/>
+          <p:cNvSpPr/>
+          <p:nvPr/>
+        </p:nvSpPr>
+        <p:spPr>
+          <a:xfrm>
+            <a:off x="4261104" y="2176272"/>
+            <a:ext cx="3648456" cy="3054096"/>
+          </a:xfrm>
+          <a:prstGeom prst="rect">
+            <a:avLst/>
+          </a:prstGeom>
+          <a:solidFill>
+            <a:srgbClr val="E4F5EF"/>
+          </a:solidFill>
+          <a:ln>
+            <a:noFill/>
+          </a:ln>
+        </p:spPr>
+        <p:style>
+          <a:lnRef idx="1">
+            <a:schemeClr val="accent1"/>
+          </a:lnRef>
+          <a:fillRef idx="3">
+            <a:schemeClr val="accent1"/>
+          </a:fillRef>
+          <a:effectRef idx="2">
+            <a:schemeClr val="accent1"/>
+          </a:effectRef>
+          <a:fontRef idx="minor">
+            <a:schemeClr val="lt1"/>
+          </a:fontRef>
+        </p:style>
+        <p:txBody>
+          <a:bodyPr rtlCol="0" anchor="ctr"/>
+          <a:lstStyle/>
+          <a:p>
+            <a:pPr algn="ctr"/>
+            <a:endParaRPr/>
+          </a:p>
+        </p:txBody>
+      </p:sp>
+      <p:sp>
+        <p:nvSpPr>
+          <p:cNvPr id="22" name="TextBox 21"/>
+          <p:cNvSpPr txBox="1"/>
+          <p:nvPr/>
+        </p:nvSpPr>
+        <p:spPr>
+          <a:xfrm>
+            <a:off x="4471416" y="2322576"/>
+            <a:ext cx="3227832" cy="201168"/>
+          </a:xfrm>
+          <a:prstGeom prst="rect">
+            <a:avLst/>
+          </a:prstGeom>
+          <a:noFill/>
+        </p:spPr>
+        <p:txBody>
+          <a:bodyPr wrap="square" lIns="0" tIns="0" rIns="0" bIns="0" anchor="ctr">
+            <a:spAutoFit/>
+          </a:bodyPr>
+          <a:lstStyle/>
+          <a:p>
+            <a:pPr>
+              <a:defRPr sz="1000" b="1">
+                <a:solidFill>
+                  <a:srgbClr val="536273"/>
+                </a:solidFill>
+                <a:latin typeface="Arial"/>
+              </a:defRPr>
+            </a:pPr>
+            <a:r>
+              <a:t>U9  /  PICO TO Z80 DATA</a:t>
+            </a:r>
+          </a:p>
+        </p:txBody>
+      </p:sp>
+      <p:sp>
+        <p:nvSpPr>
+          <p:cNvPr id="23" name="TextBox 22"/>
+          <p:cNvSpPr txBox="1"/>
+          <p:nvPr/>
+        </p:nvSpPr>
+        <p:spPr>
+          <a:xfrm>
+            <a:off x="4471416" y="2598456"/>
+            <a:ext cx="3401568" cy="307777"/>
+          </a:xfrm>
+          <a:prstGeom prst="rect">
+            <a:avLst/>
+          </a:prstGeom>
+          <a:noFill/>
+        </p:spPr>
+        <p:txBody>
+          <a:bodyPr wrap="square" lIns="0" tIns="0" rIns="0" bIns="0" anchor="ctr">
+            <a:spAutoFit/>
+          </a:bodyPr>
+          <a:lstStyle/>
+          <a:p>
+            <a:pPr>
+              <a:defRPr sz="2000" b="1">
+                <a:solidFill>
+                  <a:srgbClr val="172C46"/>
+                </a:solidFill>
+                <a:latin typeface="Arial"/>
+              </a:defRPr>
+            </a:pPr>
+            <a:r>
+              <a:rPr dirty="0"/>
+              <a:t>Fixed-direction</a:t>
+            </a:r>
+            <a:r>
+              <a:rPr lang="en-AU" dirty="0"/>
+              <a:t> </a:t>
+            </a:r>
+            <a:r>
+              <a:rPr dirty="0"/>
+              <a:t>transceiver</a:t>
+            </a:r>
+          </a:p>
+        </p:txBody>
+      </p:sp>
+      <p:sp>
+        <p:nvSpPr>
+          <p:cNvPr id="24" name="TextBox 23"/>
+          <p:cNvSpPr txBox="1"/>
+          <p:nvPr/>
+        </p:nvSpPr>
+        <p:spPr>
+          <a:xfrm>
+            <a:off x="4471416" y="2944368"/>
+            <a:ext cx="3227832" cy="246888"/>
+          </a:xfrm>
+          <a:prstGeom prst="rect">
+            <a:avLst/>
+          </a:prstGeom>
+          <a:noFill/>
+        </p:spPr>
+        <p:txBody>
+          <a:bodyPr wrap="square" lIns="0" tIns="0" rIns="0" bIns="0" anchor="ctr">
+            <a:spAutoFit/>
+          </a:bodyPr>
+          <a:lstStyle/>
+          <a:p>
+            <a:pPr>
+              <a:defRPr sz="1200" b="0">
+                <a:solidFill>
+                  <a:srgbClr val="536273"/>
+                </a:solidFill>
+                <a:latin typeface="Arial"/>
+              </a:defRPr>
+            </a:pPr>
+            <a:r>
+              <a:t>SN74AHCT245N</a:t>
+            </a:r>
+          </a:p>
+        </p:txBody>
+      </p:sp>
+      <p:sp>
+        <p:nvSpPr>
+          <p:cNvPr id="25" name="TextBox 24"/>
+          <p:cNvSpPr txBox="1"/>
+          <p:nvPr/>
+        </p:nvSpPr>
+        <p:spPr>
+          <a:xfrm>
+            <a:off x="4471416" y="3310127"/>
+            <a:ext cx="320040" cy="182880"/>
+          </a:xfrm>
+          <a:prstGeom prst="rect">
+            <a:avLst/>
+          </a:prstGeom>
+          <a:noFill/>
+        </p:spPr>
+        <p:txBody>
+          <a:bodyPr wrap="square" lIns="0" tIns="0" rIns="0" bIns="0" anchor="ctr">
+            <a:spAutoFit/>
+          </a:bodyPr>
+          <a:lstStyle/>
+          <a:p>
+            <a:pPr>
+              <a:defRPr sz="1000" b="1">
+                <a:solidFill>
+                  <a:srgbClr val="172C46"/>
+                </a:solidFill>
+                <a:latin typeface="Arial"/>
+              </a:defRPr>
+            </a:pPr>
+            <a:r>
+              <a:t>01</a:t>
+            </a:r>
+          </a:p>
+        </p:txBody>
+      </p:sp>
+      <p:sp>
+        <p:nvSpPr>
+          <p:cNvPr id="26" name="TextBox 25"/>
+          <p:cNvSpPr txBox="1"/>
+          <p:nvPr/>
+        </p:nvSpPr>
+        <p:spPr>
+          <a:xfrm>
+            <a:off x="4818888" y="3300984"/>
+            <a:ext cx="2880360" cy="210312"/>
+          </a:xfrm>
+          <a:prstGeom prst="rect">
+            <a:avLst/>
+          </a:prstGeom>
+          <a:noFill/>
+        </p:spPr>
+        <p:txBody>
+          <a:bodyPr wrap="square" lIns="0" tIns="0" rIns="0" bIns="0" anchor="ctr">
+            <a:spAutoFit/>
+          </a:bodyPr>
+          <a:lstStyle/>
+          <a:p>
+            <a:pPr>
+              <a:defRPr sz="1300" b="1">
+                <a:solidFill>
+                  <a:srgbClr val="172C46"/>
+                </a:solidFill>
+                <a:latin typeface="Arial"/>
+              </a:defRPr>
+            </a:pPr>
+            <a:r>
+              <a:t>Drives D0-D7 toward CPU</a:t>
+            </a:r>
+          </a:p>
+        </p:txBody>
+      </p:sp>
+      <p:sp>
+        <p:nvSpPr>
+          <p:cNvPr id="27" name="TextBox 26"/>
+          <p:cNvSpPr txBox="1"/>
+          <p:nvPr/>
+        </p:nvSpPr>
+        <p:spPr>
+          <a:xfrm>
+            <a:off x="4818888" y="3511296"/>
+            <a:ext cx="2880360" cy="411480"/>
+          </a:xfrm>
+          <a:prstGeom prst="rect">
+            <a:avLst/>
+          </a:prstGeom>
+          <a:noFill/>
+        </p:spPr>
+        <p:txBody>
+          <a:bodyPr wrap="square" lIns="0" tIns="0" rIns="0" bIns="0" anchor="ctr">
+            <a:spAutoFit/>
+          </a:bodyPr>
+          <a:lstStyle/>
+          <a:p>
+            <a:pPr>
+              <a:defRPr sz="1150" b="0">
+                <a:solidFill>
+                  <a:srgbClr val="24364B"/>
+                </a:solidFill>
+                <a:latin typeface="Arial"/>
+              </a:defRPr>
+            </a:pPr>
+            <a:r>
+              <a:t>Carries injected loader bytes and Pico-supplied I/O read data onto the 5 V bus.</a:t>
+            </a:r>
+          </a:p>
+        </p:txBody>
+      </p:sp>
+      <p:sp>
+        <p:nvSpPr>
+          <p:cNvPr id="28" name="TextBox 27"/>
+          <p:cNvSpPr txBox="1"/>
+          <p:nvPr/>
+        </p:nvSpPr>
+        <p:spPr>
+          <a:xfrm>
+            <a:off x="4471416" y="3968496"/>
+            <a:ext cx="320040" cy="182880"/>
+          </a:xfrm>
+          <a:prstGeom prst="rect">
+            <a:avLst/>
+          </a:prstGeom>
+          <a:noFill/>
+        </p:spPr>
+        <p:txBody>
+          <a:bodyPr wrap="square" lIns="0" tIns="0" rIns="0" bIns="0" anchor="ctr">
+            <a:spAutoFit/>
+          </a:bodyPr>
+          <a:lstStyle/>
+          <a:p>
+            <a:pPr>
+              <a:defRPr sz="1000" b="1">
+                <a:solidFill>
+                  <a:srgbClr val="172C46"/>
+                </a:solidFill>
+                <a:latin typeface="Arial"/>
+              </a:defRPr>
+            </a:pPr>
+            <a:r>
+              <a:t>02</a:t>
+            </a:r>
+          </a:p>
+        </p:txBody>
+      </p:sp>
+      <p:sp>
+        <p:nvSpPr>
+          <p:cNvPr id="29" name="TextBox 28"/>
+          <p:cNvSpPr txBox="1"/>
+          <p:nvPr/>
+        </p:nvSpPr>
+        <p:spPr>
+          <a:xfrm>
+            <a:off x="4818888" y="3959352"/>
+            <a:ext cx="2880360" cy="210312"/>
+          </a:xfrm>
+          <a:prstGeom prst="rect">
+            <a:avLst/>
+          </a:prstGeom>
+          <a:noFill/>
+        </p:spPr>
+        <p:txBody>
+          <a:bodyPr wrap="square" lIns="0" tIns="0" rIns="0" bIns="0" anchor="ctr">
+            <a:spAutoFit/>
+          </a:bodyPr>
+          <a:lstStyle/>
+          <a:p>
+            <a:pPr>
+              <a:defRPr sz="1300" b="1">
+                <a:solidFill>
+                  <a:srgbClr val="172C46"/>
+                </a:solidFill>
+                <a:latin typeface="Arial"/>
+              </a:defRPr>
+            </a:pPr>
+            <a:r>
+              <a:t>A-to-B direction</a:t>
+            </a:r>
+          </a:p>
+        </p:txBody>
+      </p:sp>
+      <p:sp>
+        <p:nvSpPr>
+          <p:cNvPr id="30" name="TextBox 29"/>
+          <p:cNvSpPr txBox="1"/>
+          <p:nvPr/>
+        </p:nvSpPr>
+        <p:spPr>
+          <a:xfrm>
+            <a:off x="4818888" y="4169664"/>
+            <a:ext cx="2880360" cy="411480"/>
+          </a:xfrm>
+          <a:prstGeom prst="rect">
+            <a:avLst/>
+          </a:prstGeom>
+          <a:noFill/>
+        </p:spPr>
+        <p:txBody>
+          <a:bodyPr wrap="square" lIns="0" tIns="0" rIns="0" bIns="0" anchor="ctr">
+            <a:spAutoFit/>
+          </a:bodyPr>
+          <a:lstStyle/>
+          <a:p>
+            <a:pPr>
+              <a:defRPr sz="1150" b="0">
+                <a:solidFill>
+                  <a:srgbClr val="24364B"/>
+                </a:solidFill>
+                <a:latin typeface="Arial"/>
+              </a:defRPr>
+            </a:pPr>
+            <a:r>
+              <a:t>Direction pin is fixed; the Pico never takes over the address bus.</a:t>
+            </a:r>
+          </a:p>
+        </p:txBody>
+      </p:sp>
+      <p:sp>
+        <p:nvSpPr>
+          <p:cNvPr id="31" name="TextBox 30"/>
+          <p:cNvSpPr txBox="1"/>
+          <p:nvPr/>
+        </p:nvSpPr>
+        <p:spPr>
+          <a:xfrm>
+            <a:off x="4471416" y="4626864"/>
+            <a:ext cx="320040" cy="182880"/>
+          </a:xfrm>
+          <a:prstGeom prst="rect">
+            <a:avLst/>
+          </a:prstGeom>
+          <a:noFill/>
+        </p:spPr>
+        <p:txBody>
+          <a:bodyPr wrap="square" lIns="0" tIns="0" rIns="0" bIns="0" anchor="ctr">
+            <a:spAutoFit/>
+          </a:bodyPr>
+          <a:lstStyle/>
+          <a:p>
+            <a:pPr>
+              <a:defRPr sz="1000" b="1">
+                <a:solidFill>
+                  <a:srgbClr val="172C46"/>
+                </a:solidFill>
+                <a:latin typeface="Arial"/>
+              </a:defRPr>
+            </a:pPr>
+            <a:r>
+              <a:t>03</a:t>
+            </a:r>
+          </a:p>
+        </p:txBody>
+      </p:sp>
+      <p:sp>
+        <p:nvSpPr>
+          <p:cNvPr id="32" name="TextBox 31"/>
+          <p:cNvSpPr txBox="1"/>
+          <p:nvPr/>
+        </p:nvSpPr>
+        <p:spPr>
+          <a:xfrm>
+            <a:off x="4818888" y="4617720"/>
+            <a:ext cx="2880360" cy="210312"/>
+          </a:xfrm>
+          <a:prstGeom prst="rect">
+            <a:avLst/>
+          </a:prstGeom>
+          <a:noFill/>
+        </p:spPr>
+        <p:txBody>
+          <a:bodyPr wrap="square" lIns="0" tIns="0" rIns="0" bIns="0" anchor="ctr">
+            <a:spAutoFit/>
+          </a:bodyPr>
+          <a:lstStyle/>
+          <a:p>
+            <a:pPr>
+              <a:defRPr sz="1300" b="1">
+                <a:solidFill>
+                  <a:srgbClr val="172C46"/>
+                </a:solidFill>
+                <a:latin typeface="Arial"/>
+              </a:defRPr>
+            </a:pPr>
+            <a:r>
+              <a:t>Controlled enable</a:t>
+            </a:r>
+          </a:p>
+        </p:txBody>
+      </p:sp>
+      <p:sp>
+        <p:nvSpPr>
+          <p:cNvPr id="33" name="TextBox 32"/>
+          <p:cNvSpPr txBox="1"/>
+          <p:nvPr/>
+        </p:nvSpPr>
+        <p:spPr>
+          <a:xfrm>
+            <a:off x="4818888" y="4828032"/>
+            <a:ext cx="2880360" cy="411480"/>
+          </a:xfrm>
+          <a:prstGeom prst="rect">
+            <a:avLst/>
+          </a:prstGeom>
+          <a:noFill/>
+        </p:spPr>
+        <p:txBody>
+          <a:bodyPr wrap="square" lIns="0" tIns="0" rIns="0" bIns="0" anchor="ctr">
+            <a:spAutoFit/>
+          </a:bodyPr>
+          <a:lstStyle/>
+          <a:p>
+            <a:pPr>
+              <a:defRPr sz="1150" b="0">
+                <a:solidFill>
+                  <a:srgbClr val="24364B"/>
+                </a:solidFill>
+                <a:latin typeface="Arial"/>
+              </a:defRPr>
+            </a:pPr>
+            <a:r>
+              <a:t>U3 enables the path only for valid Z80 read cycles.</a:t>
+            </a:r>
+          </a:p>
+        </p:txBody>
+      </p:sp>
+      <p:sp>
+        <p:nvSpPr>
+          <p:cNvPr id="34" name="Rectangle 33"/>
+          <p:cNvSpPr/>
+          <p:nvPr/>
+        </p:nvSpPr>
+        <p:spPr>
+          <a:xfrm>
+            <a:off x="8083296" y="2176272"/>
+            <a:ext cx="3648456" cy="3054096"/>
+          </a:xfrm>
+          <a:prstGeom prst="rect">
+            <a:avLst/>
+          </a:prstGeom>
+          <a:solidFill>
+            <a:srgbClr val="F0E9FA"/>
+          </a:solidFill>
+          <a:ln>
+            <a:noFill/>
+          </a:ln>
+        </p:spPr>
+        <p:style>
+          <a:lnRef idx="1">
+            <a:schemeClr val="accent1"/>
+          </a:lnRef>
+          <a:fillRef idx="3">
+            <a:schemeClr val="accent1"/>
+          </a:fillRef>
+          <a:effectRef idx="2">
+            <a:schemeClr val="accent1"/>
+          </a:effectRef>
+          <a:fontRef idx="minor">
+            <a:schemeClr val="lt1"/>
+          </a:fontRef>
+        </p:style>
+        <p:txBody>
+          <a:bodyPr rtlCol="0" anchor="ctr"/>
+          <a:lstStyle/>
+          <a:p>
+            <a:pPr algn="ctr"/>
+            <a:endParaRPr/>
+          </a:p>
+        </p:txBody>
+      </p:sp>
+      <p:sp>
+        <p:nvSpPr>
+          <p:cNvPr id="35" name="TextBox 34"/>
+          <p:cNvSpPr txBox="1"/>
+          <p:nvPr/>
+        </p:nvSpPr>
+        <p:spPr>
+          <a:xfrm>
+            <a:off x="8293608" y="2322576"/>
+            <a:ext cx="3227832" cy="201168"/>
+          </a:xfrm>
+          <a:prstGeom prst="rect">
+            <a:avLst/>
+          </a:prstGeom>
+          <a:noFill/>
+        </p:spPr>
+        <p:txBody>
+          <a:bodyPr wrap="square" lIns="0" tIns="0" rIns="0" bIns="0" anchor="ctr">
+            <a:spAutoFit/>
+          </a:bodyPr>
+          <a:lstStyle/>
+          <a:p>
+            <a:pPr>
+              <a:defRPr sz="1000" b="1">
+                <a:solidFill>
+                  <a:srgbClr val="536273"/>
+                </a:solidFill>
+                <a:latin typeface="Arial"/>
+              </a:defRPr>
+            </a:pPr>
+            <a:r>
+              <a:t>U10  /  Z80 TO PICO DATA</a:t>
+            </a:r>
+          </a:p>
+        </p:txBody>
+      </p:sp>
+      <p:sp>
+        <p:nvSpPr>
+          <p:cNvPr id="36" name="TextBox 35"/>
+          <p:cNvSpPr txBox="1"/>
+          <p:nvPr/>
+        </p:nvSpPr>
+        <p:spPr>
+          <a:xfrm>
+            <a:off x="8293608" y="2598455"/>
+            <a:ext cx="3300984" cy="307777"/>
+          </a:xfrm>
+          <a:prstGeom prst="rect">
+            <a:avLst/>
+          </a:prstGeom>
+          <a:noFill/>
+        </p:spPr>
+        <p:txBody>
+          <a:bodyPr wrap="square" lIns="0" tIns="0" rIns="0" bIns="0" anchor="ctr">
+            <a:spAutoFit/>
+          </a:bodyPr>
+          <a:lstStyle/>
+          <a:p>
+            <a:pPr>
+              <a:defRPr sz="2000" b="1">
+                <a:solidFill>
+                  <a:srgbClr val="172C46"/>
+                </a:solidFill>
+                <a:latin typeface="Arial"/>
+              </a:defRPr>
+            </a:pPr>
+            <a:r>
+              <a:rPr dirty="0"/>
+              <a:t>Fixed-direction transceiver</a:t>
+            </a:r>
+          </a:p>
+        </p:txBody>
+      </p:sp>
+      <p:sp>
+        <p:nvSpPr>
+          <p:cNvPr id="37" name="TextBox 36"/>
+          <p:cNvSpPr txBox="1"/>
+          <p:nvPr/>
+        </p:nvSpPr>
+        <p:spPr>
+          <a:xfrm>
+            <a:off x="8293608" y="2944368"/>
+            <a:ext cx="3227832" cy="246888"/>
+          </a:xfrm>
+          <a:prstGeom prst="rect">
+            <a:avLst/>
+          </a:prstGeom>
+          <a:noFill/>
+        </p:spPr>
+        <p:txBody>
+          <a:bodyPr wrap="square" lIns="0" tIns="0" rIns="0" bIns="0" anchor="ctr">
+            <a:spAutoFit/>
+          </a:bodyPr>
+          <a:lstStyle/>
+          <a:p>
+            <a:pPr>
+              <a:defRPr sz="1200" b="0">
+                <a:solidFill>
+                  <a:srgbClr val="536273"/>
+                </a:solidFill>
+                <a:latin typeface="Arial"/>
+              </a:defRPr>
+            </a:pPr>
+            <a:r>
+              <a:t>SN74LVC245AN</a:t>
+            </a:r>
+          </a:p>
+        </p:txBody>
+      </p:sp>
+      <p:sp>
+        <p:nvSpPr>
+          <p:cNvPr id="38" name="TextBox 37"/>
+          <p:cNvSpPr txBox="1"/>
+          <p:nvPr/>
+        </p:nvSpPr>
+        <p:spPr>
+          <a:xfrm>
+            <a:off x="8293608" y="3310127"/>
+            <a:ext cx="320040" cy="182880"/>
+          </a:xfrm>
+          <a:prstGeom prst="rect">
+            <a:avLst/>
+          </a:prstGeom>
+          <a:noFill/>
+        </p:spPr>
+        <p:txBody>
+          <a:bodyPr wrap="square" lIns="0" tIns="0" rIns="0" bIns="0" anchor="ctr">
+            <a:spAutoFit/>
+          </a:bodyPr>
+          <a:lstStyle/>
+          <a:p>
+            <a:pPr>
+              <a:defRPr sz="1000" b="1">
+                <a:solidFill>
+                  <a:srgbClr val="172C46"/>
+                </a:solidFill>
+                <a:latin typeface="Arial"/>
+              </a:defRPr>
+            </a:pPr>
+            <a:r>
+              <a:t>01</a:t>
+            </a:r>
+          </a:p>
+        </p:txBody>
+      </p:sp>
+      <p:sp>
+        <p:nvSpPr>
+          <p:cNvPr id="39" name="TextBox 38"/>
+          <p:cNvSpPr txBox="1"/>
+          <p:nvPr/>
+        </p:nvSpPr>
+        <p:spPr>
+          <a:xfrm>
+            <a:off x="8641080" y="3300984"/>
+            <a:ext cx="2880360" cy="210312"/>
+          </a:xfrm>
+          <a:prstGeom prst="rect">
+            <a:avLst/>
+          </a:prstGeom>
+          <a:noFill/>
+        </p:spPr>
+        <p:txBody>
+          <a:bodyPr wrap="square" lIns="0" tIns="0" rIns="0" bIns="0" anchor="ctr">
+            <a:spAutoFit/>
+          </a:bodyPr>
+          <a:lstStyle/>
+          <a:p>
+            <a:pPr>
+              <a:defRPr sz="1300" b="1">
+                <a:solidFill>
+                  <a:srgbClr val="172C46"/>
+                </a:solidFill>
+                <a:latin typeface="Arial"/>
+              </a:defRPr>
+            </a:pPr>
+            <a:r>
+              <a:t>Reads D0-D7 toward Pico</a:t>
+            </a:r>
+          </a:p>
+        </p:txBody>
+      </p:sp>
+      <p:sp>
+        <p:nvSpPr>
+          <p:cNvPr id="40" name="TextBox 39"/>
+          <p:cNvSpPr txBox="1"/>
+          <p:nvPr/>
+        </p:nvSpPr>
+        <p:spPr>
+          <a:xfrm>
+            <a:off x="8641080" y="3511296"/>
+            <a:ext cx="2880360" cy="411480"/>
+          </a:xfrm>
+          <a:prstGeom prst="rect">
+            <a:avLst/>
+          </a:prstGeom>
+          <a:noFill/>
+        </p:spPr>
+        <p:txBody>
+          <a:bodyPr wrap="square" lIns="0" tIns="0" rIns="0" bIns="0" anchor="ctr">
+            <a:spAutoFit/>
+          </a:bodyPr>
+          <a:lstStyle/>
+          <a:p>
+            <a:pPr>
+              <a:defRPr sz="1150" b="0">
+                <a:solidFill>
+                  <a:srgbClr val="24364B"/>
+                </a:solidFill>
+                <a:latin typeface="Arial"/>
+              </a:defRPr>
+            </a:pPr>
+            <a:r>
+              <a:t>Captures Z80/SRAM data for verification and I/O reads.</a:t>
+            </a:r>
+          </a:p>
+        </p:txBody>
+      </p:sp>
+      <p:sp>
+        <p:nvSpPr>
+          <p:cNvPr id="41" name="TextBox 40"/>
+          <p:cNvSpPr txBox="1"/>
+          <p:nvPr/>
+        </p:nvSpPr>
+        <p:spPr>
+          <a:xfrm>
+            <a:off x="8293608" y="3968496"/>
+            <a:ext cx="320040" cy="182880"/>
+          </a:xfrm>
+          <a:prstGeom prst="rect">
+            <a:avLst/>
+          </a:prstGeom>
+          <a:noFill/>
+        </p:spPr>
+        <p:txBody>
+          <a:bodyPr wrap="square" lIns="0" tIns="0" rIns="0" bIns="0" anchor="ctr">
+            <a:spAutoFit/>
+          </a:bodyPr>
+          <a:lstStyle/>
+          <a:p>
+            <a:pPr>
+              <a:defRPr sz="1000" b="1">
+                <a:solidFill>
+                  <a:srgbClr val="172C46"/>
+                </a:solidFill>
+                <a:latin typeface="Arial"/>
+              </a:defRPr>
+            </a:pPr>
+            <a:r>
+              <a:t>02</a:t>
+            </a:r>
+          </a:p>
+        </p:txBody>
+      </p:sp>
+      <p:sp>
+        <p:nvSpPr>
+          <p:cNvPr id="42" name="TextBox 41"/>
+          <p:cNvSpPr txBox="1"/>
+          <p:nvPr/>
+        </p:nvSpPr>
+        <p:spPr>
+          <a:xfrm>
+            <a:off x="8641080" y="3959352"/>
+            <a:ext cx="2880360" cy="210312"/>
+          </a:xfrm>
+          <a:prstGeom prst="rect">
+            <a:avLst/>
+          </a:prstGeom>
+          <a:noFill/>
+        </p:spPr>
+        <p:txBody>
+          <a:bodyPr wrap="square" lIns="0" tIns="0" rIns="0" bIns="0" anchor="ctr">
+            <a:spAutoFit/>
+          </a:bodyPr>
+          <a:lstStyle/>
+          <a:p>
+            <a:pPr>
+              <a:defRPr sz="1300" b="1">
+                <a:solidFill>
+                  <a:srgbClr val="172C46"/>
+                </a:solidFill>
+                <a:latin typeface="Arial"/>
+              </a:defRPr>
+            </a:pPr>
+            <a:r>
+              <a:t>5 V to 3.3 V</a:t>
+            </a:r>
+          </a:p>
+        </p:txBody>
+      </p:sp>
+      <p:sp>
+        <p:nvSpPr>
+          <p:cNvPr id="43" name="TextBox 42"/>
+          <p:cNvSpPr txBox="1"/>
+          <p:nvPr/>
+        </p:nvSpPr>
+        <p:spPr>
+          <a:xfrm>
+            <a:off x="8641080" y="4169664"/>
+            <a:ext cx="2880360" cy="411480"/>
+          </a:xfrm>
+          <a:prstGeom prst="rect">
+            <a:avLst/>
+          </a:prstGeom>
+          <a:noFill/>
+        </p:spPr>
+        <p:txBody>
+          <a:bodyPr wrap="square" lIns="0" tIns="0" rIns="0" bIns="0" anchor="ctr">
+            <a:spAutoFit/>
+          </a:bodyPr>
+          <a:lstStyle/>
+          <a:p>
+            <a:pPr>
+              <a:defRPr sz="1150" b="0">
+                <a:solidFill>
+                  <a:srgbClr val="24364B"/>
+                </a:solidFill>
+                <a:latin typeface="Arial"/>
+              </a:defRPr>
+            </a:pPr>
+            <a:r>
+              <a:t>LVC inputs tolerate the 5 V bus and translate data for Pico GPIOs.</a:t>
+            </a:r>
+          </a:p>
+        </p:txBody>
+      </p:sp>
+      <p:sp>
+        <p:nvSpPr>
+          <p:cNvPr id="44" name="TextBox 43"/>
+          <p:cNvSpPr txBox="1"/>
+          <p:nvPr/>
+        </p:nvSpPr>
+        <p:spPr>
+          <a:xfrm>
+            <a:off x="8293608" y="4626864"/>
+            <a:ext cx="320040" cy="182880"/>
+          </a:xfrm>
+          <a:prstGeom prst="rect">
+            <a:avLst/>
+          </a:prstGeom>
+          <a:noFill/>
+        </p:spPr>
+        <p:txBody>
+          <a:bodyPr wrap="square" lIns="0" tIns="0" rIns="0" bIns="0" anchor="ctr">
+            <a:spAutoFit/>
+          </a:bodyPr>
+          <a:lstStyle/>
+          <a:p>
+            <a:pPr>
+              <a:defRPr sz="1000" b="1">
+                <a:solidFill>
+                  <a:srgbClr val="172C46"/>
+                </a:solidFill>
+                <a:latin typeface="Arial"/>
+              </a:defRPr>
+            </a:pPr>
+            <a:r>
+              <a:t>03</a:t>
+            </a:r>
+          </a:p>
+        </p:txBody>
+      </p:sp>
+      <p:sp>
+        <p:nvSpPr>
+          <p:cNvPr id="45" name="TextBox 44"/>
+          <p:cNvSpPr txBox="1"/>
+          <p:nvPr/>
+        </p:nvSpPr>
+        <p:spPr>
+          <a:xfrm>
+            <a:off x="8641080" y="4617720"/>
+            <a:ext cx="2880360" cy="210312"/>
+          </a:xfrm>
+          <a:prstGeom prst="rect">
+            <a:avLst/>
+          </a:prstGeom>
+          <a:noFill/>
+        </p:spPr>
+        <p:txBody>
+          <a:bodyPr wrap="square" lIns="0" tIns="0" rIns="0" bIns="0" anchor="ctr">
+            <a:spAutoFit/>
+          </a:bodyPr>
+          <a:lstStyle/>
+          <a:p>
+            <a:pPr>
+              <a:defRPr sz="1300" b="1">
+                <a:solidFill>
+                  <a:srgbClr val="172C46"/>
+                </a:solidFill>
+                <a:latin typeface="Arial"/>
+              </a:defRPr>
+            </a:pPr>
+            <a:r>
+              <a:t>Separate output enable</a:t>
+            </a:r>
+          </a:p>
+        </p:txBody>
+      </p:sp>
+      <p:sp>
+        <p:nvSpPr>
+          <p:cNvPr id="46" name="TextBox 45"/>
+          <p:cNvSpPr txBox="1"/>
+          <p:nvPr/>
+        </p:nvSpPr>
+        <p:spPr>
+          <a:xfrm>
+            <a:off x="8641080" y="4828032"/>
+            <a:ext cx="2880360" cy="411480"/>
+          </a:xfrm>
+          <a:prstGeom prst="rect">
+            <a:avLst/>
+          </a:prstGeom>
+          <a:noFill/>
+        </p:spPr>
+        <p:txBody>
+          <a:bodyPr wrap="square" lIns="0" tIns="0" rIns="0" bIns="0" anchor="ctr">
+            <a:spAutoFit/>
+          </a:bodyPr>
+          <a:lstStyle/>
+          <a:p>
+            <a:pPr>
+              <a:defRPr sz="1150" b="0">
+                <a:solidFill>
+                  <a:srgbClr val="24364B"/>
+                </a:solidFill>
+                <a:latin typeface="Arial"/>
+              </a:defRPr>
+            </a:pPr>
+            <a:r>
+              <a:t>GP7 controls the path; keep it off whenever U9 drives the data bus.</a:t>
+            </a:r>
+          </a:p>
+        </p:txBody>
+      </p:sp>
+      <p:sp>
+        <p:nvSpPr>
+          <p:cNvPr id="47" name="Rectangle 46"/>
+          <p:cNvSpPr/>
+          <p:nvPr/>
+        </p:nvSpPr>
+        <p:spPr>
+          <a:xfrm>
+            <a:off x="438912" y="5431536"/>
+            <a:ext cx="11292840" cy="685800"/>
+          </a:xfrm>
+          <a:prstGeom prst="rect">
+            <a:avLst/>
+          </a:prstGeom>
+          <a:solidFill>
+            <a:srgbClr val="FFF0DB"/>
+          </a:solidFill>
+          <a:ln>
+            <a:noFill/>
+          </a:ln>
+        </p:spPr>
+        <p:style>
+          <a:lnRef idx="1">
+            <a:schemeClr val="accent1"/>
+          </a:lnRef>
+          <a:fillRef idx="3">
+            <a:schemeClr val="accent1"/>
+          </a:fillRef>
+          <a:effectRef idx="2">
+            <a:schemeClr val="accent1"/>
+          </a:effectRef>
+          <a:fontRef idx="minor">
+            <a:schemeClr val="lt1"/>
+          </a:fontRef>
+        </p:style>
+        <p:txBody>
+          <a:bodyPr rtlCol="0" anchor="ctr"/>
+          <a:lstStyle/>
+          <a:p>
+            <a:pPr algn="ctr"/>
+            <a:endParaRPr/>
+          </a:p>
+        </p:txBody>
+      </p:sp>
+      <p:sp>
+        <p:nvSpPr>
+          <p:cNvPr id="48" name="TextBox 47"/>
+          <p:cNvSpPr txBox="1"/>
+          <p:nvPr/>
+        </p:nvSpPr>
+        <p:spPr>
+          <a:xfrm>
+            <a:off x="685800" y="5559552"/>
+            <a:ext cx="10789920" cy="393192"/>
+          </a:xfrm>
+          <a:prstGeom prst="rect">
+            <a:avLst/>
+          </a:prstGeom>
+          <a:noFill/>
+        </p:spPr>
+        <p:txBody>
+          <a:bodyPr wrap="square" lIns="0" tIns="0" rIns="0" bIns="0" anchor="ctr">
+            <a:spAutoFit/>
+          </a:bodyPr>
+          <a:lstStyle/>
+          <a:p>
+            <a:pPr>
+              <a:defRPr sz="1400" b="1">
+                <a:solidFill>
+                  <a:srgbClr val="172C46"/>
+                </a:solidFill>
+                <a:latin typeface="Arial"/>
+              </a:defRPr>
+            </a:pPr>
+            <a:r>
+              <a:t>Active inventory: Pico 2 W plus U1, U2, U3, U4, U7, U9 and U10. U5/U6/U8 are not fitted; D1 is a diode.</a:t>
+            </a:r>
           </a:p>
         </p:txBody>
       </p:sp>
@@ -7615,4 +12578,319 @@
     </a:ext>
   </a:extLst>
 </a:theme>
+</file>
+
+<file path=ppt/theme/theme2.xml><?xml version="1.0" encoding="utf-8"?>
+<a:theme xmlns:a="http://schemas.openxmlformats.org/drawingml/2006/main" name="Office Theme">
+  <a:themeElements>
+    <a:clrScheme name="Office">
+      <a:dk1>
+        <a:sysClr val="windowText" lastClr="000000"/>
+      </a:dk1>
+      <a:lt1>
+        <a:sysClr val="window" lastClr="FFFFFF"/>
+      </a:lt1>
+      <a:dk2>
+        <a:srgbClr val="0E2841"/>
+      </a:dk2>
+      <a:lt2>
+        <a:srgbClr val="E8E8E8"/>
+      </a:lt2>
+      <a:accent1>
+        <a:srgbClr val="156082"/>
+      </a:accent1>
+      <a:accent2>
+        <a:srgbClr val="E97132"/>
+      </a:accent2>
+      <a:accent3>
+        <a:srgbClr val="196B24"/>
+      </a:accent3>
+      <a:accent4>
+        <a:srgbClr val="0F9ED5"/>
+      </a:accent4>
+      <a:accent5>
+        <a:srgbClr val="A02B93"/>
+      </a:accent5>
+      <a:accent6>
+        <a:srgbClr val="4EA72E"/>
+      </a:accent6>
+      <a:hlink>
+        <a:srgbClr val="467886"/>
+      </a:hlink>
+      <a:folHlink>
+        <a:srgbClr val="96607D"/>
+      </a:folHlink>
+    </a:clrScheme>
+    <a:fontScheme name="Office">
+      <a:majorFont>
+        <a:latin typeface="Aptos Display" panose="02110004020202020204"/>
+        <a:ea typeface=""/>
+        <a:cs typeface=""/>
+        <a:font script="Jpan" typeface="游ゴシック Light"/>
+        <a:font script="Hang" typeface="맑은 고딕"/>
+        <a:font script="Hans" typeface="等线 Light"/>
+        <a:font script="Hant" typeface="新細明體"/>
+        <a:font script="Arab" typeface="Times New Roman"/>
+        <a:font script="Hebr" typeface="Times New Roman"/>
+        <a:font script="Thai" typeface="Angsana New"/>
+        <a:font script="Ethi" typeface="Nyala"/>
+        <a:font script="Beng" typeface="Vrinda"/>
+        <a:font script="Gujr" typeface="Shruti"/>
+        <a:font script="Khmr" typeface="MoolBoran"/>
+        <a:font script="Knda" typeface="Tunga"/>
+        <a:font script="Guru" typeface="Raavi"/>
+        <a:font script="Cans" typeface="Euphemia"/>
+        <a:font script="Cher" typeface="Plantagenet Cherokee"/>
+        <a:font script="Yiii" typeface="Microsoft Yi Baiti"/>
+        <a:font script="Tibt" typeface="Microsoft Himalaya"/>
+        <a:font script="Thaa" typeface="MV Boli"/>
+        <a:font script="Deva" typeface="Mangal"/>
+        <a:font script="Telu" typeface="Gautami"/>
+        <a:font script="Taml" typeface="Latha"/>
+        <a:font script="Syrc" typeface="Estrangelo Edessa"/>
+        <a:font script="Orya" typeface="Kalinga"/>
+        <a:font script="Mlym" typeface="Kartika"/>
+        <a:font script="Laoo" typeface="DokChampa"/>
+        <a:font script="Sinh" typeface="Iskoola Pota"/>
+        <a:font script="Mong" typeface="Mongolian Baiti"/>
+        <a:font script="Viet" typeface="Times New Roman"/>
+        <a:font script="Uigh" typeface="Microsoft Uighur"/>
+        <a:font script="Geor" typeface="Sylfaen"/>
+        <a:font script="Armn" typeface="Arial"/>
+        <a:font script="Bugi" typeface="Leelawadee UI"/>
+        <a:font script="Bopo" typeface="Microsoft JhengHei"/>
+        <a:font script="Java" typeface="Javanese Text"/>
+        <a:font script="Lisu" typeface="Segoe UI"/>
+        <a:font script="Mymr" typeface="Myanmar Text"/>
+        <a:font script="Nkoo" typeface="Ebrima"/>
+        <a:font script="Olck" typeface="Nirmala UI"/>
+        <a:font script="Osma" typeface="Ebrima"/>
+        <a:font script="Phag" typeface="Phagspa"/>
+        <a:font script="Syrn" typeface="Estrangelo Edessa"/>
+        <a:font script="Syrj" typeface="Estrangelo Edessa"/>
+        <a:font script="Syre" typeface="Estrangelo Edessa"/>
+        <a:font script="Sora" typeface="Nirmala UI"/>
+        <a:font script="Tale" typeface="Microsoft Tai Le"/>
+        <a:font script="Talu" typeface="Microsoft New Tai Lue"/>
+        <a:font script="Tfng" typeface="Ebrima"/>
+      </a:majorFont>
+      <a:minorFont>
+        <a:latin typeface="Aptos" panose="02110004020202020204"/>
+        <a:ea typeface=""/>
+        <a:cs typeface=""/>
+        <a:font script="Jpan" typeface="游ゴシック"/>
+        <a:font script="Hang" typeface="맑은 고딕"/>
+        <a:font script="Hans" typeface="等线"/>
+        <a:font script="Hant" typeface="新細明體"/>
+        <a:font script="Arab" typeface="Arial"/>
+        <a:font script="Hebr" typeface="Arial"/>
+        <a:font script="Thai" typeface="Cordia New"/>
+        <a:font script="Ethi" typeface="Nyala"/>
+        <a:font script="Beng" typeface="Vrinda"/>
+        <a:font script="Gujr" typeface="Shruti"/>
+        <a:font script="Khmr" typeface="DaunPenh"/>
+        <a:font script="Knda" typeface="Tunga"/>
+        <a:font script="Guru" typeface="Raavi"/>
+        <a:font script="Cans" typeface="Euphemia"/>
+        <a:font script="Cher" typeface="Plantagenet Cherokee"/>
+        <a:font script="Yiii" typeface="Microsoft Yi Baiti"/>
+        <a:font script="Tibt" typeface="Microsoft Himalaya"/>
+        <a:font script="Thaa" typeface="MV Boli"/>
+        <a:font script="Deva" typeface="Mangal"/>
+        <a:font script="Telu" typeface="Gautami"/>
+        <a:font script="Taml" typeface="Latha"/>
+        <a:font script="Syrc" typeface="Estrangelo Edessa"/>
+        <a:font script="Orya" typeface="Kalinga"/>
+        <a:font script="Mlym" typeface="Kartika"/>
+        <a:font script="Laoo" typeface="DokChampa"/>
+        <a:font script="Sinh" typeface="Iskoola Pota"/>
+        <a:font script="Mong" typeface="Mongolian Baiti"/>
+        <a:font script="Viet" typeface="Arial"/>
+        <a:font script="Uigh" typeface="Microsoft Uighur"/>
+        <a:font script="Geor" typeface="Sylfaen"/>
+        <a:font script="Armn" typeface="Arial"/>
+        <a:font script="Bugi" typeface="Leelawadee UI"/>
+        <a:font script="Bopo" typeface="Microsoft JhengHei"/>
+        <a:font script="Java" typeface="Javanese Text"/>
+        <a:font script="Lisu" typeface="Segoe UI"/>
+        <a:font script="Mymr" typeface="Myanmar Text"/>
+        <a:font script="Nkoo" typeface="Ebrima"/>
+        <a:font script="Olck" typeface="Nirmala UI"/>
+        <a:font script="Osma" typeface="Ebrima"/>
+        <a:font script="Phag" typeface="Phagspa"/>
+        <a:font script="Syrn" typeface="Estrangelo Edessa"/>
+        <a:font script="Syrj" typeface="Estrangelo Edessa"/>
+        <a:font script="Syre" typeface="Estrangelo Edessa"/>
+        <a:font script="Sora" typeface="Nirmala UI"/>
+        <a:font script="Tale" typeface="Microsoft Tai Le"/>
+        <a:font script="Talu" typeface="Microsoft New Tai Lue"/>
+        <a:font script="Tfng" typeface="Ebrima"/>
+      </a:minorFont>
+    </a:fontScheme>
+    <a:fmtScheme name="Office">
+      <a:fillStyleLst>
+        <a:solidFill>
+          <a:schemeClr val="phClr"/>
+        </a:solidFill>
+        <a:gradFill rotWithShape="1">
+          <a:gsLst>
+            <a:gs pos="0">
+              <a:schemeClr val="phClr">
+                <a:lumMod val="110000"/>
+                <a:satMod val="105000"/>
+                <a:tint val="67000"/>
+              </a:schemeClr>
+            </a:gs>
+            <a:gs pos="50000">
+              <a:schemeClr val="phClr">
+                <a:lumMod val="105000"/>
+                <a:satMod val="103000"/>
+                <a:tint val="73000"/>
+              </a:schemeClr>
+            </a:gs>
+            <a:gs pos="100000">
+              <a:schemeClr val="phClr">
+                <a:lumMod val="105000"/>
+                <a:satMod val="109000"/>
+                <a:tint val="81000"/>
+              </a:schemeClr>
+            </a:gs>
+          </a:gsLst>
+          <a:lin ang="5400000" scaled="0"/>
+        </a:gradFill>
+        <a:gradFill rotWithShape="1">
+          <a:gsLst>
+            <a:gs pos="0">
+              <a:schemeClr val="phClr">
+                <a:satMod val="103000"/>
+                <a:lumMod val="102000"/>
+                <a:tint val="94000"/>
+              </a:schemeClr>
+            </a:gs>
+            <a:gs pos="50000">
+              <a:schemeClr val="phClr">
+                <a:satMod val="110000"/>
+                <a:lumMod val="100000"/>
+                <a:shade val="100000"/>
+              </a:schemeClr>
+            </a:gs>
+            <a:gs pos="100000">
+              <a:schemeClr val="phClr">
+                <a:lumMod val="99000"/>
+                <a:satMod val="120000"/>
+                <a:shade val="78000"/>
+              </a:schemeClr>
+            </a:gs>
+          </a:gsLst>
+          <a:lin ang="5400000" scaled="0"/>
+        </a:gradFill>
+      </a:fillStyleLst>
+      <a:lnStyleLst>
+        <a:ln w="12700" cap="flat" cmpd="sng" algn="ctr">
+          <a:solidFill>
+            <a:schemeClr val="phClr"/>
+          </a:solidFill>
+          <a:prstDash val="solid"/>
+          <a:miter lim="800000"/>
+        </a:ln>
+        <a:ln w="19050" cap="flat" cmpd="sng" algn="ctr">
+          <a:solidFill>
+            <a:schemeClr val="phClr"/>
+          </a:solidFill>
+          <a:prstDash val="solid"/>
+          <a:miter lim="800000"/>
+        </a:ln>
+        <a:ln w="25400" cap="flat" cmpd="sng" algn="ctr">
+          <a:solidFill>
+            <a:schemeClr val="phClr"/>
+          </a:solidFill>
+          <a:prstDash val="solid"/>
+          <a:miter lim="800000"/>
+        </a:ln>
+      </a:lnStyleLst>
+      <a:effectStyleLst>
+        <a:effectStyle>
+          <a:effectLst/>
+        </a:effectStyle>
+        <a:effectStyle>
+          <a:effectLst/>
+        </a:effectStyle>
+        <a:effectStyle>
+          <a:effectLst>
+            <a:outerShdw blurRad="57150" dist="19050" dir="5400000" algn="ctr" rotWithShape="0">
+              <a:srgbClr val="000000">
+                <a:alpha val="63000"/>
+              </a:srgbClr>
+            </a:outerShdw>
+          </a:effectLst>
+        </a:effectStyle>
+      </a:effectStyleLst>
+      <a:bgFillStyleLst>
+        <a:solidFill>
+          <a:schemeClr val="phClr"/>
+        </a:solidFill>
+        <a:solidFill>
+          <a:schemeClr val="phClr">
+            <a:tint val="95000"/>
+            <a:satMod val="170000"/>
+          </a:schemeClr>
+        </a:solidFill>
+        <a:gradFill rotWithShape="1">
+          <a:gsLst>
+            <a:gs pos="0">
+              <a:schemeClr val="phClr">
+                <a:tint val="93000"/>
+                <a:satMod val="150000"/>
+                <a:shade val="98000"/>
+                <a:lumMod val="102000"/>
+              </a:schemeClr>
+            </a:gs>
+            <a:gs pos="50000">
+              <a:schemeClr val="phClr">
+                <a:tint val="98000"/>
+                <a:satMod val="130000"/>
+                <a:shade val="90000"/>
+                <a:lumMod val="103000"/>
+              </a:schemeClr>
+            </a:gs>
+            <a:gs pos="100000">
+              <a:schemeClr val="phClr">
+                <a:shade val="63000"/>
+                <a:satMod val="120000"/>
+              </a:schemeClr>
+            </a:gs>
+          </a:gsLst>
+          <a:lin ang="5400000" scaled="0"/>
+        </a:gradFill>
+      </a:bgFillStyleLst>
+    </a:fmtScheme>
+  </a:themeElements>
+  <a:objectDefaults>
+    <a:lnDef>
+      <a:spPr/>
+      <a:bodyPr/>
+      <a:lstStyle/>
+      <a:style>
+        <a:lnRef idx="2">
+          <a:schemeClr val="accent1"/>
+        </a:lnRef>
+        <a:fillRef idx="0">
+          <a:schemeClr val="accent1"/>
+        </a:fillRef>
+        <a:effectRef idx="1">
+          <a:schemeClr val="accent1"/>
+        </a:effectRef>
+        <a:fontRef idx="minor">
+          <a:schemeClr val="tx1"/>
+        </a:fontRef>
+      </a:style>
+    </a:lnDef>
+  </a:objectDefaults>
+  <a:extraClrSchemeLst/>
+  <a:extLst>
+    <a:ext uri="{05A4C25C-085E-4340-85A3-A5531E510DB2}">
+      <thm15:themeFamily xmlns:thm15="http://schemas.microsoft.com/office/thememl/2012/main" name="Office Theme" id="{2E142A2C-CD16-42D6-873A-C26D2A0506FA}" vid="{1BDDFF52-6CD6-40A5-AB3C-68EB2F1E4D0A}"/>
+    </a:ext>
+  </a:extLst>
+</a:theme>
 </file>
--- a/docs/Z80-ROMless-SBC-Design-Overview.pptx
+++ b/docs/Z80-ROMless-SBC-Design-Overview.pptx
@@ -1330,7 +1330,7 @@
                 <a:ea typeface="Arial" pitchFamily="34" charset="-122"/>
                 <a:cs typeface="Arial" pitchFamily="34" charset="-120"/>
               </a:rPr>
-              <a:t>Stage 10 implementation | Current breadboard architecture | 22 October 2026</a:t>
+              <a:t>Stage 10 implementation | Current breadboard architecture | 24 October 2026</a:t>
             </a:r>
             <a:endParaRPr lang="en-US" sz="1000" dirty="0"/>
           </a:p>
@@ -1663,8 +1663,8 @@
         </p:nvSpPr>
         <p:spPr>
           <a:xfrm>
-            <a:off x="3529584" y="3474720"/>
-            <a:ext cx="3227832" cy="731520"/>
+            <a:off x="3529584" y="3300000"/>
+            <a:ext cx="3227832" cy="1000000"/>
           </a:xfrm>
           <a:prstGeom prst="rect">
             <a:avLst/>
@@ -1706,6 +1706,23 @@
                 <a:cs typeface="Arial" pitchFamily="34" charset="-120"/>
               </a:rPr>
               <a:t>Core 1: USB, storage + Wi-Fi</a:t>
+            </a:r>
+            <a:endParaRPr lang="en-US" sz="1800" dirty="0"/>
+          </a:p>
+          <a:p>
+            <a:pPr marL="0" indent="0">
+              <a:buNone/>
+            </a:pPr>
+            <a:r>
+              <a:rPr lang="en-US" sz="1800" dirty="0">
+                <a:solidFill>
+                  <a:srgbClr val="172C46"/>
+                </a:solidFill>
+                <a:latin typeface="Arial" pitchFamily="34" charset="0"/>
+                <a:ea typeface="Arial" pitchFamily="34" charset="-122"/>
+                <a:cs typeface="Arial" pitchFamily="34" charset="-120"/>
+              </a:rPr>
+              <a:t>PIO0: I²C matrix display</a:t>
             </a:r>
             <a:endParaRPr lang="en-US" sz="1800" dirty="0"/>
           </a:p>
@@ -2431,7 +2448,7 @@
                 <a:ea typeface="Arial" pitchFamily="34" charset="-122"/>
                 <a:cs typeface="Arial" pitchFamily="34" charset="-120"/>
               </a:rPr>
-              <a:t>Stage 10 implementation | Current breadboard architecture | 22 October 2026</a:t>
+              <a:t>Stage 10 implementation | Current breadboard architecture | 24 October 2026</a:t>
             </a:r>
             <a:endParaRPr lang="en-US" sz="1000" dirty="0"/>
           </a:p>
@@ -3259,7 +3276,7 @@
                 <a:ea typeface="Arial" pitchFamily="34" charset="-122"/>
                 <a:cs typeface="Arial" pitchFamily="34" charset="-120"/>
               </a:rPr>
-              <a:t>Stage 10 implementation | Current breadboard architecture | 22 October 2026</a:t>
+              <a:t>Stage 10 implementation | Current breadboard architecture | 24 October 2026</a:t>
             </a:r>
             <a:endParaRPr lang="en-US" sz="1000" dirty="0"/>
           </a:p>
@@ -3790,7 +3807,7 @@
         <p:spPr>
           <a:xfrm>
             <a:off x="7882128" y="3520440"/>
-            <a:ext cx="3602736" cy="1508760"/>
+            <a:ext cx="3602736" cy="1800000"/>
           </a:xfrm>
           <a:prstGeom prst="rect">
             <a:avLst/>
@@ -3814,7 +3831,7 @@
                 <a:ea typeface="Arial" pitchFamily="34" charset="-122"/>
                 <a:cs typeface="Arial" pitchFamily="34" charset="-120"/>
               </a:rPr>
-              <a:t>USB initialization, IRQs and console</a:t>
+              <a:t>USB setup, IRQs and console</a:t>
             </a:r>
             <a:endParaRPr lang="en-US" sz="1800" dirty="0"/>
           </a:p>
@@ -3848,7 +3865,7 @@
                 <a:ea typeface="Arial" pitchFamily="34" charset="-122"/>
                 <a:cs typeface="Arial" pitchFamily="34" charset="-120"/>
               </a:rPr>
-              <a:t>Wi-Fi + HTTP / WebSocket terminal</a:t>
+              <a:t>Wi-Fi, HTTP + WebSocket</a:t>
             </a:r>
             <a:endParaRPr lang="en-US" sz="1800" dirty="0"/>
           </a:p>
@@ -3866,6 +3883,40 @@
                 <a:cs typeface="Arial" pitchFamily="34" charset="-120"/>
               </a:rPr>
               <a:t>SNTP, weather and chat clients</a:t>
+            </a:r>
+            <a:endParaRPr lang="en-US" sz="1800" dirty="0"/>
+          </a:p>
+          <a:p>
+            <a:pPr marL="0" indent="0">
+              <a:buNone/>
+            </a:pPr>
+            <a:r>
+              <a:rPr lang="en-US" sz="1800" dirty="0">
+                <a:solidFill>
+                  <a:srgbClr val="172C46"/>
+                </a:solidFill>
+                <a:latin typeface="Arial" pitchFamily="34" charset="0"/>
+                <a:ea typeface="Arial" pitchFamily="34" charset="-122"/>
+                <a:cs typeface="Arial" pitchFamily="34" charset="-120"/>
+              </a:rPr>
+              <a:t>PIO0 I²C for HT16K33 matrix</a:t>
+            </a:r>
+            <a:endParaRPr lang="en-US" sz="1800" dirty="0"/>
+          </a:p>
+          <a:p>
+            <a:pPr marL="0" indent="0">
+              <a:buNone/>
+            </a:pPr>
+            <a:r>
+              <a:rPr lang="en-US" sz="1800" dirty="0">
+                <a:solidFill>
+                  <a:srgbClr val="172C46"/>
+                </a:solidFill>
+                <a:latin typeface="Arial" pitchFamily="34" charset="0"/>
+                <a:ea typeface="Arial" pitchFamily="34" charset="-122"/>
+                <a:cs typeface="Arial" pitchFamily="34" charset="-120"/>
+              </a:rPr>
+              <a:t>100 kHz: GP26 SCL, GP22 SDA</a:t>
             </a:r>
             <a:endParaRPr lang="en-US" sz="1800" dirty="0"/>
           </a:p>
@@ -4223,7 +4274,7 @@
                 <a:ea typeface="Arial" pitchFamily="34" charset="-122"/>
                 <a:cs typeface="Arial" pitchFamily="34" charset="-120"/>
               </a:rPr>
-              <a:t>Stage 10 implementation | Current breadboard architecture | 22 October 2026</a:t>
+              <a:t>Stage 10 implementation | Current breadboard architecture | 24 October 2026</a:t>
             </a:r>
             <a:endParaRPr lang="en-US" sz="1000" dirty="0"/>
           </a:p>
@@ -5814,7 +5865,7 @@
                 <a:ea typeface="Arial" pitchFamily="34" charset="-122"/>
                 <a:cs typeface="Arial" pitchFamily="34" charset="-120"/>
               </a:rPr>
-              <a:t>Stage 10 implementation | Current breadboard architecture | 22 October 2026</a:t>
+              <a:t>Stage 10 implementation | Current breadboard architecture | 24 October 2026</a:t>
             </a:r>
             <a:endParaRPr lang="en-US" sz="1000" dirty="0"/>
           </a:p>
@@ -6911,7 +6962,7 @@
                 <a:ea typeface="Arial" pitchFamily="34" charset="-122"/>
                 <a:cs typeface="Arial" pitchFamily="34" charset="-120"/>
               </a:rPr>
-              <a:t>Stage 10 implementation | Current breadboard architecture | 22 October 2026</a:t>
+              <a:t>Stage 10 implementation | Current breadboard architecture | 24 October 2026</a:t>
             </a:r>
             <a:endParaRPr lang="en-US" sz="1000" dirty="0"/>
           </a:p>
@@ -7664,7 +7715,7 @@
               </a:defRPr>
             </a:pPr>
             <a:r>
-              <a:t>Stage 10 implementation | Current breadboard architecture | 22 October 2026</a:t>
+              <a:t>Stage 10 implementation | Current breadboard architecture | 24 October 2026</a:t>
             </a:r>
           </a:p>
         </p:txBody>
@@ -8068,7 +8119,7 @@
               </a:defRPr>
             </a:pPr>
             <a:r>
-              <a:t>Owns USB, Wi-Fi, flash disks and asynchronous services.</a:t>
+              <a:t>Owns USB, Wi-Fi, flash disks, services and PIO I²C display.</a:t>
             </a:r>
           </a:p>
         </p:txBody>
@@ -9208,7 +9259,7 @@
               </a:defRPr>
             </a:pPr>
             <a:r>
-              <a:t>At boot, the Pico supplies instructions; the Z80 itself writes and verifies its SRAM image.</a:t>
+              <a:t>At boot, the Z80 writes SRAM using Pico-injected instructions. The Pico compares every read-back byte.</a:t>
             </a:r>
           </a:p>
         </p:txBody>
@@ -9429,7 +9480,7 @@
               </a:defRPr>
             </a:pPr>
             <a:r>
-              <a:t>Stage 10 implementation | Current breadboard architecture | 22 October 2026</a:t>
+              <a:t>Stage 10 implementation | Current breadboard architecture | 24 October 2026</a:t>
             </a:r>
           </a:p>
         </p:txBody>
@@ -10718,7 +10769,7 @@
               </a:defRPr>
             </a:pPr>
             <a:r>
-              <a:t>Stage 10 implementation | Current breadboard architecture | 22 October 2026</a:t>
+              <a:t>Stage 10 implementation | Current breadboard architecture | 24 October 2026</a:t>
             </a:r>
           </a:p>
         </p:txBody>
@@ -11976,7 +12027,7 @@
               </a:defRPr>
             </a:pPr>
             <a:r>
-              <a:t>Captures Z80/SRAM data for verification and I/O reads.</a:t>
+              <a:t>Captures SRAM read-back and Z80 I/O write data.</a:t>
             </a:r>
           </a:p>
         </p:txBody>

--- a/docs/Z80-ROMless-SBC-Design-Overview.pptx
+++ b/docs/Z80-ROMless-SBC-Design-Overview.pptx
@@ -1722,7 +1722,7 @@
                 <a:ea typeface="Arial" pitchFamily="34" charset="-122"/>
                 <a:cs typeface="Arial" pitchFamily="34" charset="-120"/>
               </a:rPr>
-              <a:t>PIO0: I²C matrix display</a:t>
+              <a:t>PIO0 matrix; PIO1 bank select</a:t>
             </a:r>
             <a:endParaRPr lang="en-US" sz="1800" dirty="0"/>
           </a:p>
@@ -1980,7 +1980,7 @@
                 <a:ea typeface="Arial" pitchFamily="34" charset="-122"/>
                 <a:cs typeface="Arial" pitchFamily="34" charset="-120"/>
               </a:rPr>
-              <a:t>64 KiB SRAM</a:t>
+              <a:t>128 KiB SRAM</a:t>
             </a:r>
             <a:endParaRPr lang="en-US" sz="2500" dirty="0"/>
           </a:p>
@@ -2019,7 +2019,7 @@
                 <a:ea typeface="Arial" pitchFamily="34" charset="-122"/>
                 <a:cs typeface="Arial" pitchFamily="34" charset="-120"/>
               </a:rPr>
-              <a:t>Code, operating system and data</a:t>
+              <a:t>2 banks; 64 KiB Z80 window</a:t>
             </a:r>
             <a:endParaRPr lang="en-US" sz="1800" dirty="0"/>
           </a:p>
@@ -2616,7 +2616,7 @@
                 <a:ea typeface="Arial" pitchFamily="34" charset="-122"/>
                 <a:cs typeface="Arial" pitchFamily="34" charset="-120"/>
               </a:rPr>
-              <a:t>64 KiB SRAM address space</a:t>
+              <a:t>128 KiB SRAM; two 64 KiB banks</a:t>
             </a:r>
             <a:endParaRPr lang="en-US" sz="1800" dirty="0"/>
           </a:p>
@@ -2639,7 +2639,7 @@
                 <a:ea typeface="Arial" pitchFamily="34" charset="-122"/>
                 <a:cs typeface="Arial" pitchFamily="34" charset="-120"/>
               </a:rPr>
-              <a:t>Z80 alone drives memory addresses and writes SRAM, even during boot.</a:t>
+              <a:t>GP8→U4 selects SRAM A16; Z80 owns A0-A15 and all writes.</a:t>
             </a:r>
             <a:endParaRPr lang="en-US" sz="1800" dirty="0"/>
           </a:p>
@@ -3055,7 +3055,7 @@
                 <a:ea typeface="Arial" pitchFamily="34" charset="-122"/>
                 <a:cs typeface="Arial" pitchFamily="34" charset="-120"/>
               </a:rPr>
-              <a:t>Pico PWM  →  AHCT244 level buffer  →  Z80 CLK: 20 MHz nominal</a:t>
+              <a:t>Pico PWM / PIO1  →  AHCT244 level buffer  →  Z80 CLK: 20 MHz nominal</a:t>
             </a:r>
             <a:endParaRPr lang="en-US" sz="2300" dirty="0"/>
           </a:p>
@@ -3500,7 +3500,7 @@
                 <a:ea typeface="Arial" pitchFamily="34" charset="-122"/>
                 <a:cs typeface="Arial" pitchFamily="34" charset="-120"/>
               </a:rPr>
-              <a:t>I/O traps and port adapters</a:t>
+              <a:t>I/O traps and PIO1 bank select</a:t>
             </a:r>
             <a:endParaRPr lang="en-US" sz="1800" dirty="0"/>
           </a:p>
@@ -5826,7 +5826,7 @@
                 <a:ea typeface="Arial" pitchFamily="34" charset="-122"/>
                 <a:cs typeface="Arial" pitchFamily="34" charset="-120"/>
               </a:rPr>
-              <a:t>The Z80 runs from SRAM until an IN or OUT instruction needs a Pico-managed peripheral.</a:t>
+              <a:t>The Z80 runs directly from SRAM. PIO1 handles bank-select OUT 07h at hardware speed.</a:t>
             </a:r>
             <a:endParaRPr lang="en-US" sz="1800" dirty="0"/>
           </a:p>
@@ -6123,7 +6123,7 @@
                 <a:ea typeface="Arial" pitchFamily="34" charset="-122"/>
                 <a:cs typeface="Arial" pitchFamily="34" charset="-120"/>
               </a:rPr>
-              <a:t>Core-0 I/O trap</a:t>
+              <a:t>Bank select + I/O traps</a:t>
             </a:r>
             <a:endParaRPr lang="en-US" sz="2500" dirty="0"/>
           </a:p>
@@ -7454,7 +7454,7 @@
                 <a:ea typeface="Arial" pitchFamily="34" charset="-122"/>
                 <a:cs typeface="Arial" pitchFamily="34" charset="-120"/>
               </a:rPr>
-              <a:t>The Pico injects instructions, verifies SRAM, then supplies the 20 MHz clock.</a:t>
+              <a:t>The Pico loads and verifies SRAM. PIO1 selects either 64 KiB bank without changing the 20 MHz clock.</a:t>
             </a:r>
             <a:endParaRPr lang="en-US" sz="1800" dirty="0"/>
           </a:p>
@@ -8011,7 +8011,7 @@
               </a:defRPr>
             </a:pPr>
             <a:r>
-              <a:t>Clocks and resets the CPU; traps I/O and injects/verifies the SRAM image.</a:t>
+              <a:t>Clocks/resets CPU; PIO1 bank switch; injects/verifies SRAM.</a:t>
             </a:r>
           </a:p>
         </p:txBody>
@@ -8119,7 +8119,7 @@
               </a:defRPr>
             </a:pPr>
             <a:r>
-              <a:t>Owns USB, Wi-Fi, flash disks, services and PIO I²C display.</a:t>
+              <a:t>Owns USB, Wi-Fi, flash disks, services and PIO0 I²C display.</a:t>
             </a:r>
           </a:p>
         </p:txBody>
@@ -9035,7 +9035,7 @@
               </a:defRPr>
             </a:pPr>
             <a:r>
-              <a:t>64 KiB address space</a:t>
+              <a:t>Two 64 KiB banks</a:t>
             </a:r>
           </a:p>
         </p:txBody>
@@ -9071,7 +9071,7 @@
               </a:defRPr>
             </a:pPr>
             <a:r>
-              <a:t>A16 is tied LOW, so only the lower 64 KiB is used.</a:t>
+              <a:t>PIO1: GP8→U4→A16; R24 pulls GP8 LOW at startup.</a:t>
             </a:r>
           </a:p>
         </p:txBody>
@@ -9179,7 +9179,7 @@
               </a:defRPr>
             </a:pPr>
             <a:r>
-              <a:t>Holds the running code, CP/M and working data; no ROM is fitted.</a:t>
+              <a:t>Z80 sees one 64 KiB window; OUT 07h selects the other bank.</a:t>
             </a:r>
           </a:p>
         </p:txBody>
@@ -10468,7 +10468,7 @@
               </a:defRPr>
             </a:pPr>
             <a:r>
-              <a:t>Buffers MREQ#, WR# and RD# so SRAM CMOS control inputs receive valid levels.</a:t>
+              <a:t>Buffers memory controls and level-shifts GP8 bank select to SRAM A16.</a:t>
             </a:r>
           </a:p>
         </p:txBody>

--- a/docs/Z80-ROMless-SBC-Design-Overview.pptx
+++ b/docs/Z80-ROMless-SBC-Design-Overview.pptx
@@ -1722,7 +1722,7 @@
                 <a:ea typeface="Arial" pitchFamily="34" charset="-122"/>
                 <a:cs typeface="Arial" pitchFamily="34" charset="-120"/>
               </a:rPr>
-              <a:t>PIO0 matrix; PIO1 bank select</a:t>
+              <a:t>PIO0 clock; PIO1 Z80 I/O</a:t>
             </a:r>
             <a:endParaRPr lang="en-US" sz="1800" dirty="0"/>
           </a:p>
@@ -3055,7 +3055,7 @@
                 <a:ea typeface="Arial" pitchFamily="34" charset="-122"/>
                 <a:cs typeface="Arial" pitchFamily="34" charset="-120"/>
               </a:rPr>
-              <a:t>Pico PWM / PIO1  →  AHCT244 level buffer  →  Z80 CLK: 20 MHz nominal</a:t>
+              <a:t>Pico PIO0  →  AHCT244 level buffer  →  Z80 CLK: 20 MHz nominal</a:t>
             </a:r>
             <a:endParaRPr lang="en-US" sz="2300" dirty="0"/>
           </a:p>
@@ -3500,7 +3500,7 @@
                 <a:ea typeface="Arial" pitchFamily="34" charset="-122"/>
                 <a:cs typeface="Arial" pitchFamily="34" charset="-120"/>
               </a:rPr>
-              <a:t>I/O traps and PIO1 bank select</a:t>
+              <a:t>PIO1 IN/OUT engine service</a:t>
             </a:r>
             <a:endParaRPr lang="en-US" sz="1800" dirty="0"/>
           </a:p>
@@ -5826,7 +5826,7 @@
                 <a:ea typeface="Arial" pitchFamily="34" charset="-122"/>
                 <a:cs typeface="Arial" pitchFamily="34" charset="-120"/>
               </a:rPr>
-              <a:t>The Z80 runs directly from SRAM. PIO1 handles bank-select OUT 07h at hardware speed.</a:t>
+              <a:t>The Z80 runs directly from SRAM. PIO1 completes every IN and OUT at hardware speed.</a:t>
             </a:r>
             <a:endParaRPr lang="en-US" sz="1800" dirty="0"/>
           </a:p>
@@ -6123,7 +6123,7 @@
                 <a:ea typeface="Arial" pitchFamily="34" charset="-122"/>
                 <a:cs typeface="Arial" pitchFamily="34" charset="-120"/>
               </a:rPr>
-              <a:t>Bank select + I/O traps</a:t>
+              <a:t>PIO1 I/O engine</a:t>
             </a:r>
             <a:endParaRPr lang="en-US" sz="2500" dirty="0"/>
           </a:p>
@@ -6179,7 +6179,7 @@
                 <a:ea typeface="Arial" pitchFamily="34" charset="-122"/>
                 <a:cs typeface="Arial" pitchFamily="34" charset="-120"/>
               </a:rPr>
-              <a:t>Stop clock; transfer byte.</a:t>
+              <a:t>Hold clock; core 0 byte.</a:t>
             </a:r>
             <a:endParaRPr lang="en-US" sz="1700" dirty="0"/>
           </a:p>
@@ -6196,7 +6196,7 @@
                 <a:ea typeface="Arial" pitchFamily="34" charset="-122"/>
                 <a:cs typeface="Arial" pitchFamily="34" charset="-120"/>
               </a:rPr>
-              <a:t>Step cycle; resume PWM.</a:t>
+              <a:t>PIO turns bus; resumes.</a:t>
             </a:r>
             <a:endParaRPr lang="en-US" sz="1700" dirty="0"/>
           </a:p>
@@ -6668,7 +6668,7 @@
                 <a:ea typeface="Arial" pitchFamily="34" charset="-122"/>
                 <a:cs typeface="Arial" pitchFamily="34" charset="-120"/>
               </a:rPr>
-              <a:t>Fast reads on core 0; queued writes / flash commits on core 1.</a:t>
+              <a:t>SRAM read-ahead on core 0; writes / flash commits on core 1.</a:t>
             </a:r>
             <a:endParaRPr lang="en-US" sz="1600" dirty="0"/>
           </a:p>
@@ -8011,7 +8011,7 @@
               </a:defRPr>
             </a:pPr>
             <a:r>
-              <a:t>Clocks/resets CPU; PIO1 bank switch; injects/verifies SRAM.</a:t>
+              <a:t>Resets CPU; PIO clock + I/O; injects/verifies SRAM.</a:t>
             </a:r>
           </a:p>
         </p:txBody>
